--- a/output/wordlabs-reject-3day.pptx
+++ b/output/wordlabs-reject-3day.pptx
@@ -4240,7 +4240,7 @@
                 <a:ea typeface="Calibri" pitchFamily="34" charset="-122"/>
                 <a:cs typeface="Calibri" pitchFamily="34" charset="-120"/>
               </a:rPr>
-              <a:t>"throw back, refuse to accept"</a:t>
+              <a:t>"throw back, refuse, push away"</a:t>
             </a:r>
             <a:endParaRPr lang="en-US" sz="2200" dirty="0"/>
           </a:p>
@@ -5288,7 +5288,7 @@
                 <a:ea typeface="Calibri" pitchFamily="34" charset="-122"/>
                 <a:cs typeface="Calibri" pitchFamily="34" charset="-120"/>
               </a:rPr>
-              <a:t>Word Labs  •  wordlabs.app  •  Root: 'reject' = throw back, refuse to accept</a:t>
+              <a:t>Word Labs  •  wordlabs.app  •  Root: 'reject' = throw back, refuse, push away</a:t>
             </a:r>
             <a:endParaRPr lang="en-US" sz="800" dirty="0"/>
           </a:p>
@@ -5928,7 +5928,7 @@
                 <a:ea typeface="Calibri" pitchFamily="34" charset="-122"/>
                 <a:cs typeface="Calibri" pitchFamily="34" charset="-120"/>
               </a:rPr>
-              <a:t>Word Labs  •  wordlabs.app  •  Root: 'reject' = throw back, refuse to accept</a:t>
+              <a:t>Word Labs  •  wordlabs.app  •  Root: 'reject' = throw back, refuse, push away</a:t>
             </a:r>
             <a:endParaRPr lang="en-US" sz="800" dirty="0"/>
           </a:p>
@@ -6040,7 +6040,7 @@
                 <a:ea typeface="Calibri" pitchFamily="34" charset="-122"/>
                 <a:cs typeface="Calibri" pitchFamily="34" charset="-120"/>
               </a:rPr>
-              <a:t>The team felt the sting of </a:t>
+              <a:t>The team felt the </a:t>
             </a:r>
             <a:pPr algn="l" indent="0" marL="0">
               <a:buNone/>
@@ -6071,7 +6071,7 @@
                 <a:ea typeface="Calibri" pitchFamily="34" charset="-122"/>
                 <a:cs typeface="Calibri" pitchFamily="34" charset="-120"/>
               </a:rPr>
-              <a:t>, but they refused to stop trying after being </a:t>
+              <a:t> deeply, but they refused to stop trying after being </a:t>
             </a:r>
             <a:pPr algn="l" indent="0" marL="0">
               <a:buNone/>
@@ -6102,7 +6102,7 @@
                 <a:ea typeface="Calibri" pitchFamily="34" charset="-122"/>
                 <a:cs typeface="Calibri" pitchFamily="34" charset="-120"/>
               </a:rPr>
-              <a:t>.</a:t>
+              <a:t> once.</a:t>
             </a:r>
             <a:endParaRPr lang="en-US" sz="1800" dirty="0"/>
           </a:p>
@@ -6716,7 +6716,7 @@
                 <a:ea typeface="Calibri" pitchFamily="34" charset="-122"/>
                 <a:cs typeface="Calibri" pitchFamily="34" charset="-120"/>
               </a:rPr>
-              <a:t>Word Labs  •  wordlabs.app  •  Root: 'reject' = throw back, refuse to accept</a:t>
+              <a:t>Word Labs  •  wordlabs.app  •  Root: 'reject' = throw back, refuse, push away</a:t>
             </a:r>
             <a:endParaRPr lang="en-US" sz="800" dirty="0"/>
           </a:p>
@@ -7543,7 +7543,7 @@
                 <a:ea typeface="Calibri" pitchFamily="34" charset="-122"/>
                 <a:cs typeface="Calibri" pitchFamily="34" charset="-120"/>
               </a:rPr>
-              <a:t>Word Labs  •  wordlabs.app  •  Root: 'reject' = throw back, refuse to accept</a:t>
+              <a:t>Word Labs  •  wordlabs.app  •  Root: 'reject' = throw back, refuse, push away</a:t>
             </a:r>
             <a:endParaRPr lang="en-US" sz="800" dirty="0"/>
           </a:p>
@@ -7762,7 +7762,7 @@
         </p:nvSpPr>
         <p:spPr>
           <a:xfrm>
-            <a:off x="2938272" y="2258568"/>
+            <a:off x="2221992" y="2258568"/>
             <a:ext cx="1828800" cy="292608"/>
           </a:xfrm>
           <a:prstGeom prst="rect">
@@ -7771,11 +7771,11 @@
             </a:avLst>
           </a:prstGeom>
           <a:solidFill>
-            <a:srgbClr val="CCFBF1"/>
+            <a:srgbClr val="DDD6FE"/>
           </a:solidFill>
           <a:ln w="19050">
             <a:solidFill>
-              <a:srgbClr val="0D9488"/>
+              <a:srgbClr val="7C3AED"/>
             </a:solidFill>
             <a:prstDash val="solid"/>
           </a:ln>
@@ -7796,7 +7796,7 @@
         </p:nvSpPr>
         <p:spPr>
           <a:xfrm>
-            <a:off x="2938272" y="2258568"/>
+            <a:off x="2221992" y="2258568"/>
             <a:ext cx="1828800" cy="292608"/>
           </a:xfrm>
           <a:prstGeom prst="rect">
@@ -7815,13 +7815,13 @@
             <a:r>
               <a:rPr lang="en-US" sz="1300" b="1" dirty="0">
                 <a:solidFill>
-                  <a:srgbClr val="0F766E"/>
+                  <a:srgbClr val="4C1D95"/>
                 </a:solidFill>
                 <a:latin typeface="Trebuchet MS" pitchFamily="34" charset="0"/>
                 <a:ea typeface="Trebuchet MS" pitchFamily="34" charset="-122"/>
                 <a:cs typeface="Trebuchet MS" pitchFamily="34" charset="-120"/>
               </a:rPr>
-              <a:t>reject</a:t>
+              <a:t>re</a:t>
             </a:r>
             <a:endParaRPr lang="en-US" sz="1300" dirty="0"/>
           </a:p>
@@ -7835,7 +7835,7 @@
         </p:nvSpPr>
         <p:spPr>
           <a:xfrm>
-            <a:off x="2938272" y="2569464"/>
+            <a:off x="2221992" y="2569464"/>
             <a:ext cx="1828800" cy="201168"/>
           </a:xfrm>
           <a:prstGeom prst="rect">
@@ -7860,7 +7860,7 @@
                 <a:ea typeface="Calibri" pitchFamily="34" charset="-122"/>
                 <a:cs typeface="Calibri" pitchFamily="34" charset="-120"/>
               </a:rPr>
-              <a:t>to throw back or refuse</a:t>
+              <a:t>back</a:t>
             </a:r>
             <a:endParaRPr lang="en-US" sz="850" dirty="0"/>
           </a:p>
@@ -7874,7 +7874,7 @@
         </p:nvSpPr>
         <p:spPr>
           <a:xfrm>
-            <a:off x="5803392" y="2258568"/>
+            <a:off x="4370832" y="2258568"/>
             <a:ext cx="1828800" cy="292608"/>
           </a:xfrm>
           <a:prstGeom prst="rect">
@@ -7908,7 +7908,7 @@
         </p:nvSpPr>
         <p:spPr>
           <a:xfrm>
-            <a:off x="5803392" y="2258568"/>
+            <a:off x="4370832" y="2258568"/>
             <a:ext cx="1828800" cy="292608"/>
           </a:xfrm>
           <a:prstGeom prst="rect">
@@ -7933,7 +7933,7 @@
                 <a:ea typeface="Trebuchet MS" pitchFamily="34" charset="-122"/>
                 <a:cs typeface="Trebuchet MS" pitchFamily="34" charset="-120"/>
               </a:rPr>
-              <a:t>ion</a:t>
+              <a:t>ject</a:t>
             </a:r>
             <a:endParaRPr lang="en-US" sz="1300" dirty="0"/>
           </a:p>
@@ -7947,7 +7947,7 @@
         </p:nvSpPr>
         <p:spPr>
           <a:xfrm>
-            <a:off x="5803392" y="2569464"/>
+            <a:off x="4370832" y="2569464"/>
             <a:ext cx="1828800" cy="201168"/>
           </a:xfrm>
           <a:prstGeom prst="rect">
@@ -7972,7 +7972,7 @@
                 <a:ea typeface="Calibri" pitchFamily="34" charset="-122"/>
                 <a:cs typeface="Calibri" pitchFamily="34" charset="-120"/>
               </a:rPr>
-              <a:t>act or state of</a:t>
+              <a:t>throw</a:t>
             </a:r>
             <a:endParaRPr lang="en-US" sz="850" dirty="0"/>
           </a:p>
@@ -7981,6 +7981,118 @@
       <p:sp>
         <p:nvSpPr>
           <p:cNvPr id="22" name="Shape 20"/>
+          <p:cNvSpPr/>
+          <p:nvPr/>
+        </p:nvSpPr>
+        <p:spPr>
+          <a:xfrm>
+            <a:off x="6519672" y="2258568"/>
+            <a:ext cx="1828800" cy="292608"/>
+          </a:xfrm>
+          <a:prstGeom prst="rect">
+            <a:avLst>
+              <a:gd name="adj" fmla="val 25000"/>
+            </a:avLst>
+          </a:prstGeom>
+          <a:solidFill>
+            <a:srgbClr val="FCE7F3"/>
+          </a:solidFill>
+          <a:ln w="19050">
+            <a:solidFill>
+              <a:srgbClr val="DB2777"/>
+            </a:solidFill>
+            <a:prstDash val="solid"/>
+          </a:ln>
+          <a:effectLst>
+            <a:outerShdw sx="100000" sy="100000" kx="0" ky="0" algn="bl" rotWithShape="0" blurRad="101600" dist="38100" dir="8100000">
+              <a:srgbClr val="000000">
+                <a:alpha val="12000"/>
+              </a:srgbClr>
+            </a:outerShdw>
+          </a:effectLst>
+        </p:spPr>
+      </p:sp>
+      <p:sp>
+        <p:nvSpPr>
+          <p:cNvPr id="23" name="Text 21"/>
+          <p:cNvSpPr/>
+          <p:nvPr/>
+        </p:nvSpPr>
+        <p:spPr>
+          <a:xfrm>
+            <a:off x="6519672" y="2258568"/>
+            <a:ext cx="1828800" cy="292608"/>
+          </a:xfrm>
+          <a:prstGeom prst="rect">
+            <a:avLst/>
+          </a:prstGeom>
+          <a:noFill/>
+          <a:ln/>
+        </p:spPr>
+        <p:txBody>
+          <a:bodyPr wrap="square" lIns="0" tIns="0" rIns="0" bIns="0" rtlCol="0" anchor="ctr"/>
+          <a:lstStyle/>
+          <a:p>
+            <a:pPr algn="ctr" indent="0" marL="0">
+              <a:buNone/>
+            </a:pPr>
+            <a:r>
+              <a:rPr lang="en-US" sz="1300" b="1" dirty="0">
+                <a:solidFill>
+                  <a:srgbClr val="9D174D"/>
+                </a:solidFill>
+                <a:latin typeface="Trebuchet MS" pitchFamily="34" charset="0"/>
+                <a:ea typeface="Trebuchet MS" pitchFamily="34" charset="-122"/>
+                <a:cs typeface="Trebuchet MS" pitchFamily="34" charset="-120"/>
+              </a:rPr>
+              <a:t>ion</a:t>
+            </a:r>
+            <a:endParaRPr lang="en-US" sz="1300" dirty="0"/>
+          </a:p>
+        </p:txBody>
+      </p:sp>
+      <p:sp>
+        <p:nvSpPr>
+          <p:cNvPr id="24" name="Text 22"/>
+          <p:cNvSpPr/>
+          <p:nvPr/>
+        </p:nvSpPr>
+        <p:spPr>
+          <a:xfrm>
+            <a:off x="6519672" y="2569464"/>
+            <a:ext cx="1828800" cy="201168"/>
+          </a:xfrm>
+          <a:prstGeom prst="rect">
+            <a:avLst/>
+          </a:prstGeom>
+          <a:noFill/>
+          <a:ln/>
+        </p:spPr>
+        <p:txBody>
+          <a:bodyPr wrap="square" lIns="0" tIns="0" rIns="0" bIns="0" rtlCol="0" anchor="t"/>
+          <a:lstStyle/>
+          <a:p>
+            <a:pPr algn="ctr" indent="0" marL="0">
+              <a:buNone/>
+            </a:pPr>
+            <a:r>
+              <a:rPr lang="en-US" sz="850" dirty="0">
+                <a:solidFill>
+                  <a:srgbClr val="475569"/>
+                </a:solidFill>
+                <a:latin typeface="Calibri" pitchFamily="34" charset="0"/>
+                <a:ea typeface="Calibri" pitchFamily="34" charset="-122"/>
+                <a:cs typeface="Calibri" pitchFamily="34" charset="-120"/>
+              </a:rPr>
+              <a:t>act or result of</a:t>
+            </a:r>
+            <a:endParaRPr lang="en-US" sz="850" dirty="0"/>
+          </a:p>
+        </p:txBody>
+      </p:sp>
+      <p:sp>
+        <p:nvSpPr>
+          <p:cNvPr id="25" name="Shape 23"/>
           <p:cNvSpPr/>
           <p:nvPr/>
         </p:nvSpPr>
@@ -8007,7 +8119,7 @@
       </p:sp>
       <p:sp>
         <p:nvSpPr>
-          <p:cNvPr id="23" name="Text 21"/>
+          <p:cNvPr id="26" name="Text 24"/>
           <p:cNvSpPr/>
           <p:nvPr/>
         </p:nvSpPr>
@@ -8046,7 +8158,7 @@
       </p:sp>
       <p:sp>
         <p:nvSpPr>
-          <p:cNvPr id="24" name="Shape 22"/>
+          <p:cNvPr id="27" name="Shape 25"/>
           <p:cNvSpPr/>
           <p:nvPr/>
         </p:nvSpPr>
@@ -8073,7 +8185,7 @@
       </p:sp>
       <p:sp>
         <p:nvSpPr>
-          <p:cNvPr id="25" name="Text 23"/>
+          <p:cNvPr id="28" name="Text 26"/>
           <p:cNvSpPr/>
           <p:nvPr/>
         </p:nvSpPr>
@@ -8112,7 +8224,7 @@
       </p:sp>
       <p:sp>
         <p:nvSpPr>
-          <p:cNvPr id="26" name="Shape 24"/>
+          <p:cNvPr id="29" name="Shape 27"/>
           <p:cNvSpPr/>
           <p:nvPr/>
         </p:nvSpPr>
@@ -8139,7 +8251,7 @@
       </p:sp>
       <p:sp>
         <p:nvSpPr>
-          <p:cNvPr id="27" name="Text 25"/>
+          <p:cNvPr id="30" name="Text 28"/>
           <p:cNvSpPr/>
           <p:nvPr/>
         </p:nvSpPr>
@@ -8178,7 +8290,7 @@
       </p:sp>
       <p:sp>
         <p:nvSpPr>
-          <p:cNvPr id="28" name="Shape 26"/>
+          <p:cNvPr id="31" name="Shape 29"/>
           <p:cNvSpPr/>
           <p:nvPr/>
         </p:nvSpPr>
@@ -8205,7 +8317,7 @@
       </p:sp>
       <p:sp>
         <p:nvSpPr>
-          <p:cNvPr id="29" name="Text 27"/>
+          <p:cNvPr id="32" name="Text 30"/>
           <p:cNvSpPr/>
           <p:nvPr/>
         </p:nvSpPr>
@@ -8528,7 +8640,7 @@
                 <a:ea typeface="Calibri" pitchFamily="34" charset="-122"/>
                 <a:cs typeface="Calibri" pitchFamily="34" charset="-120"/>
               </a:rPr>
-              <a:t>Word Labs  •  wordlabs.app  •  Root: 'reject' = throw back, refuse to accept</a:t>
+              <a:t>Word Labs  •  wordlabs.app  •  Root: 'reject' = throw back, refuse, push away</a:t>
             </a:r>
             <a:endParaRPr lang="en-US" sz="800" dirty="0"/>
           </a:p>
@@ -8747,7 +8859,7 @@
         </p:nvSpPr>
         <p:spPr>
           <a:xfrm>
-            <a:off x="2938272" y="2258568"/>
+            <a:off x="2221992" y="2258568"/>
             <a:ext cx="1828800" cy="292608"/>
           </a:xfrm>
           <a:prstGeom prst="rect">
@@ -8756,11 +8868,11 @@
             </a:avLst>
           </a:prstGeom>
           <a:solidFill>
-            <a:srgbClr val="CCFBF1"/>
+            <a:srgbClr val="DDD6FE"/>
           </a:solidFill>
           <a:ln w="19050">
             <a:solidFill>
-              <a:srgbClr val="0D9488"/>
+              <a:srgbClr val="7C3AED"/>
             </a:solidFill>
             <a:prstDash val="solid"/>
           </a:ln>
@@ -8781,7 +8893,7 @@
         </p:nvSpPr>
         <p:spPr>
           <a:xfrm>
-            <a:off x="2938272" y="2258568"/>
+            <a:off x="2221992" y="2258568"/>
             <a:ext cx="1828800" cy="292608"/>
           </a:xfrm>
           <a:prstGeom prst="rect">
@@ -8800,13 +8912,13 @@
             <a:r>
               <a:rPr lang="en-US" sz="1300" b="1" dirty="0">
                 <a:solidFill>
-                  <a:srgbClr val="0F766E"/>
+                  <a:srgbClr val="4C1D95"/>
                 </a:solidFill>
                 <a:latin typeface="Trebuchet MS" pitchFamily="34" charset="0"/>
                 <a:ea typeface="Trebuchet MS" pitchFamily="34" charset="-122"/>
                 <a:cs typeface="Trebuchet MS" pitchFamily="34" charset="-120"/>
               </a:rPr>
-              <a:t>reject</a:t>
+              <a:t>re</a:t>
             </a:r>
             <a:endParaRPr lang="en-US" sz="1300" dirty="0"/>
           </a:p>
@@ -8820,7 +8932,7 @@
         </p:nvSpPr>
         <p:spPr>
           <a:xfrm>
-            <a:off x="2938272" y="2569464"/>
+            <a:off x="2221992" y="2569464"/>
             <a:ext cx="1828800" cy="201168"/>
           </a:xfrm>
           <a:prstGeom prst="rect">
@@ -8845,7 +8957,7 @@
                 <a:ea typeface="Calibri" pitchFamily="34" charset="-122"/>
                 <a:cs typeface="Calibri" pitchFamily="34" charset="-120"/>
               </a:rPr>
-              <a:t>to throw back or refuse</a:t>
+              <a:t>back</a:t>
             </a:r>
             <a:endParaRPr lang="en-US" sz="850" dirty="0"/>
           </a:p>
@@ -8859,7 +8971,7 @@
         </p:nvSpPr>
         <p:spPr>
           <a:xfrm>
-            <a:off x="5803392" y="2258568"/>
+            <a:off x="4370832" y="2258568"/>
             <a:ext cx="1828800" cy="292608"/>
           </a:xfrm>
           <a:prstGeom prst="rect">
@@ -8893,7 +9005,7 @@
         </p:nvSpPr>
         <p:spPr>
           <a:xfrm>
-            <a:off x="5803392" y="2258568"/>
+            <a:off x="4370832" y="2258568"/>
             <a:ext cx="1828800" cy="292608"/>
           </a:xfrm>
           <a:prstGeom prst="rect">
@@ -8918,7 +9030,7 @@
                 <a:ea typeface="Trebuchet MS" pitchFamily="34" charset="-122"/>
                 <a:cs typeface="Trebuchet MS" pitchFamily="34" charset="-120"/>
               </a:rPr>
-              <a:t>ion</a:t>
+              <a:t>ject</a:t>
             </a:r>
             <a:endParaRPr lang="en-US" sz="1300" dirty="0"/>
           </a:p>
@@ -8932,7 +9044,7 @@
         </p:nvSpPr>
         <p:spPr>
           <a:xfrm>
-            <a:off x="5803392" y="2569464"/>
+            <a:off x="4370832" y="2569464"/>
             <a:ext cx="1828800" cy="201168"/>
           </a:xfrm>
           <a:prstGeom prst="rect">
@@ -8957,7 +9069,7 @@
                 <a:ea typeface="Calibri" pitchFamily="34" charset="-122"/>
                 <a:cs typeface="Calibri" pitchFamily="34" charset="-120"/>
               </a:rPr>
-              <a:t>act or state of</a:t>
+              <a:t>throw</a:t>
             </a:r>
             <a:endParaRPr lang="en-US" sz="850" dirty="0"/>
           </a:p>
@@ -8966,6 +9078,118 @@
       <p:sp>
         <p:nvSpPr>
           <p:cNvPr id="22" name="Shape 20"/>
+          <p:cNvSpPr/>
+          <p:nvPr/>
+        </p:nvSpPr>
+        <p:spPr>
+          <a:xfrm>
+            <a:off x="6519672" y="2258568"/>
+            <a:ext cx="1828800" cy="292608"/>
+          </a:xfrm>
+          <a:prstGeom prst="rect">
+            <a:avLst>
+              <a:gd name="adj" fmla="val 25000"/>
+            </a:avLst>
+          </a:prstGeom>
+          <a:solidFill>
+            <a:srgbClr val="FCE7F3"/>
+          </a:solidFill>
+          <a:ln w="19050">
+            <a:solidFill>
+              <a:srgbClr val="DB2777"/>
+            </a:solidFill>
+            <a:prstDash val="solid"/>
+          </a:ln>
+          <a:effectLst>
+            <a:outerShdw sx="100000" sy="100000" kx="0" ky="0" algn="bl" rotWithShape="0" blurRad="101600" dist="38100" dir="8100000">
+              <a:srgbClr val="000000">
+                <a:alpha val="12000"/>
+              </a:srgbClr>
+            </a:outerShdw>
+          </a:effectLst>
+        </p:spPr>
+      </p:sp>
+      <p:sp>
+        <p:nvSpPr>
+          <p:cNvPr id="23" name="Text 21"/>
+          <p:cNvSpPr/>
+          <p:nvPr/>
+        </p:nvSpPr>
+        <p:spPr>
+          <a:xfrm>
+            <a:off x="6519672" y="2258568"/>
+            <a:ext cx="1828800" cy="292608"/>
+          </a:xfrm>
+          <a:prstGeom prst="rect">
+            <a:avLst/>
+          </a:prstGeom>
+          <a:noFill/>
+          <a:ln/>
+        </p:spPr>
+        <p:txBody>
+          <a:bodyPr wrap="square" lIns="0" tIns="0" rIns="0" bIns="0" rtlCol="0" anchor="ctr"/>
+          <a:lstStyle/>
+          <a:p>
+            <a:pPr algn="ctr" indent="0" marL="0">
+              <a:buNone/>
+            </a:pPr>
+            <a:r>
+              <a:rPr lang="en-US" sz="1300" b="1" dirty="0">
+                <a:solidFill>
+                  <a:srgbClr val="9D174D"/>
+                </a:solidFill>
+                <a:latin typeface="Trebuchet MS" pitchFamily="34" charset="0"/>
+                <a:ea typeface="Trebuchet MS" pitchFamily="34" charset="-122"/>
+                <a:cs typeface="Trebuchet MS" pitchFamily="34" charset="-120"/>
+              </a:rPr>
+              <a:t>ion</a:t>
+            </a:r>
+            <a:endParaRPr lang="en-US" sz="1300" dirty="0"/>
+          </a:p>
+        </p:txBody>
+      </p:sp>
+      <p:sp>
+        <p:nvSpPr>
+          <p:cNvPr id="24" name="Text 22"/>
+          <p:cNvSpPr/>
+          <p:nvPr/>
+        </p:nvSpPr>
+        <p:spPr>
+          <a:xfrm>
+            <a:off x="6519672" y="2569464"/>
+            <a:ext cx="1828800" cy="201168"/>
+          </a:xfrm>
+          <a:prstGeom prst="rect">
+            <a:avLst/>
+          </a:prstGeom>
+          <a:noFill/>
+          <a:ln/>
+        </p:spPr>
+        <p:txBody>
+          <a:bodyPr wrap="square" lIns="0" tIns="0" rIns="0" bIns="0" rtlCol="0" anchor="t"/>
+          <a:lstStyle/>
+          <a:p>
+            <a:pPr algn="ctr" indent="0" marL="0">
+              <a:buNone/>
+            </a:pPr>
+            <a:r>
+              <a:rPr lang="en-US" sz="850" dirty="0">
+                <a:solidFill>
+                  <a:srgbClr val="475569"/>
+                </a:solidFill>
+                <a:latin typeface="Calibri" pitchFamily="34" charset="0"/>
+                <a:ea typeface="Calibri" pitchFamily="34" charset="-122"/>
+                <a:cs typeface="Calibri" pitchFamily="34" charset="-120"/>
+              </a:rPr>
+              <a:t>act or result of</a:t>
+            </a:r>
+            <a:endParaRPr lang="en-US" sz="850" dirty="0"/>
+          </a:p>
+        </p:txBody>
+      </p:sp>
+      <p:sp>
+        <p:nvSpPr>
+          <p:cNvPr id="25" name="Shape 23"/>
           <p:cNvSpPr/>
           <p:nvPr/>
         </p:nvSpPr>
@@ -8992,7 +9216,7 @@
       </p:sp>
       <p:sp>
         <p:nvSpPr>
-          <p:cNvPr id="23" name="Text 21"/>
+          <p:cNvPr id="26" name="Text 24"/>
           <p:cNvSpPr/>
           <p:nvPr/>
         </p:nvSpPr>
@@ -9031,7 +9255,7 @@
       </p:sp>
       <p:sp>
         <p:nvSpPr>
-          <p:cNvPr id="24" name="Shape 22"/>
+          <p:cNvPr id="27" name="Shape 25"/>
           <p:cNvSpPr/>
           <p:nvPr/>
         </p:nvSpPr>
@@ -9058,7 +9282,7 @@
       </p:sp>
       <p:sp>
         <p:nvSpPr>
-          <p:cNvPr id="25" name="Shape 23"/>
+          <p:cNvPr id="28" name="Shape 26"/>
           <p:cNvSpPr/>
           <p:nvPr/>
         </p:nvSpPr>
@@ -9085,7 +9309,7 @@
       </p:sp>
       <p:sp>
         <p:nvSpPr>
-          <p:cNvPr id="26" name="Text 24"/>
+          <p:cNvPr id="29" name="Text 27"/>
           <p:cNvSpPr/>
           <p:nvPr/>
         </p:nvSpPr>
@@ -9124,7 +9348,7 @@
       </p:sp>
       <p:sp>
         <p:nvSpPr>
-          <p:cNvPr id="27" name="Text 25"/>
+          <p:cNvPr id="30" name="Text 28"/>
           <p:cNvSpPr/>
           <p:nvPr/>
         </p:nvSpPr>
@@ -9163,7 +9387,7 @@
       </p:sp>
       <p:sp>
         <p:nvSpPr>
-          <p:cNvPr id="28" name="Shape 26"/>
+          <p:cNvPr id="31" name="Shape 29"/>
           <p:cNvSpPr/>
           <p:nvPr/>
         </p:nvSpPr>
@@ -9190,7 +9414,7 @@
       </p:sp>
       <p:sp>
         <p:nvSpPr>
-          <p:cNvPr id="29" name="Text 27"/>
+          <p:cNvPr id="32" name="Text 30"/>
           <p:cNvSpPr/>
           <p:nvPr/>
         </p:nvSpPr>
@@ -9229,7 +9453,7 @@
       </p:sp>
       <p:sp>
         <p:nvSpPr>
-          <p:cNvPr id="30" name="Text 28"/>
+          <p:cNvPr id="33" name="Text 31"/>
           <p:cNvSpPr/>
           <p:nvPr/>
         </p:nvSpPr>
@@ -9268,7 +9492,7 @@
       </p:sp>
       <p:sp>
         <p:nvSpPr>
-          <p:cNvPr id="31" name="Shape 29"/>
+          <p:cNvPr id="34" name="Shape 32"/>
           <p:cNvSpPr/>
           <p:nvPr/>
         </p:nvSpPr>
@@ -9295,7 +9519,7 @@
       </p:sp>
       <p:sp>
         <p:nvSpPr>
-          <p:cNvPr id="32" name="Text 30"/>
+          <p:cNvPr id="35" name="Text 33"/>
           <p:cNvSpPr/>
           <p:nvPr/>
         </p:nvSpPr>
@@ -9334,7 +9558,7 @@
       </p:sp>
       <p:sp>
         <p:nvSpPr>
-          <p:cNvPr id="33" name="Shape 31"/>
+          <p:cNvPr id="36" name="Shape 34"/>
           <p:cNvSpPr/>
           <p:nvPr/>
         </p:nvSpPr>
@@ -9361,7 +9585,7 @@
       </p:sp>
       <p:sp>
         <p:nvSpPr>
-          <p:cNvPr id="34" name="Text 32"/>
+          <p:cNvPr id="37" name="Text 35"/>
           <p:cNvSpPr/>
           <p:nvPr/>
         </p:nvSpPr>
@@ -9400,7 +9624,7 @@
       </p:sp>
       <p:sp>
         <p:nvSpPr>
-          <p:cNvPr id="35" name="Shape 33"/>
+          <p:cNvPr id="38" name="Shape 36"/>
           <p:cNvSpPr/>
           <p:nvPr/>
         </p:nvSpPr>
@@ -9427,7 +9651,7 @@
       </p:sp>
       <p:sp>
         <p:nvSpPr>
-          <p:cNvPr id="36" name="Text 34"/>
+          <p:cNvPr id="39" name="Text 37"/>
           <p:cNvSpPr/>
           <p:nvPr/>
         </p:nvSpPr>
@@ -9750,7 +9974,7 @@
                 <a:ea typeface="Calibri" pitchFamily="34" charset="-122"/>
                 <a:cs typeface="Calibri" pitchFamily="34" charset="-120"/>
               </a:rPr>
-              <a:t>Word Labs  •  wordlabs.app  •  Root: 'reject' = throw back, refuse to accept</a:t>
+              <a:t>Word Labs  •  wordlabs.app  •  Root: 'reject' = throw back, refuse, push away</a:t>
             </a:r>
             <a:endParaRPr lang="en-US" sz="800" dirty="0"/>
           </a:p>
@@ -9969,7 +10193,7 @@
         </p:nvSpPr>
         <p:spPr>
           <a:xfrm>
-            <a:off x="2938272" y="2258568"/>
+            <a:off x="2221992" y="2258568"/>
             <a:ext cx="1828800" cy="292608"/>
           </a:xfrm>
           <a:prstGeom prst="rect">
@@ -9978,11 +10202,11 @@
             </a:avLst>
           </a:prstGeom>
           <a:solidFill>
-            <a:srgbClr val="CCFBF1"/>
+            <a:srgbClr val="DDD6FE"/>
           </a:solidFill>
           <a:ln w="19050">
             <a:solidFill>
-              <a:srgbClr val="0D9488"/>
+              <a:srgbClr val="7C3AED"/>
             </a:solidFill>
             <a:prstDash val="solid"/>
           </a:ln>
@@ -10003,7 +10227,7 @@
         </p:nvSpPr>
         <p:spPr>
           <a:xfrm>
-            <a:off x="2938272" y="2258568"/>
+            <a:off x="2221992" y="2258568"/>
             <a:ext cx="1828800" cy="292608"/>
           </a:xfrm>
           <a:prstGeom prst="rect">
@@ -10022,13 +10246,13 @@
             <a:r>
               <a:rPr lang="en-US" sz="1300" b="1" dirty="0">
                 <a:solidFill>
-                  <a:srgbClr val="0F766E"/>
+                  <a:srgbClr val="4C1D95"/>
                 </a:solidFill>
                 <a:latin typeface="Trebuchet MS" pitchFamily="34" charset="0"/>
                 <a:ea typeface="Trebuchet MS" pitchFamily="34" charset="-122"/>
                 <a:cs typeface="Trebuchet MS" pitchFamily="34" charset="-120"/>
               </a:rPr>
-              <a:t>reject</a:t>
+              <a:t>re</a:t>
             </a:r>
             <a:endParaRPr lang="en-US" sz="1300" dirty="0"/>
           </a:p>
@@ -10042,7 +10266,7 @@
         </p:nvSpPr>
         <p:spPr>
           <a:xfrm>
-            <a:off x="2938272" y="2569464"/>
+            <a:off x="2221992" y="2569464"/>
             <a:ext cx="1828800" cy="201168"/>
           </a:xfrm>
           <a:prstGeom prst="rect">
@@ -10067,7 +10291,7 @@
                 <a:ea typeface="Calibri" pitchFamily="34" charset="-122"/>
                 <a:cs typeface="Calibri" pitchFamily="34" charset="-120"/>
               </a:rPr>
-              <a:t>to throw back or refuse</a:t>
+              <a:t>back</a:t>
             </a:r>
             <a:endParaRPr lang="en-US" sz="850" dirty="0"/>
           </a:p>
@@ -10081,7 +10305,7 @@
         </p:nvSpPr>
         <p:spPr>
           <a:xfrm>
-            <a:off x="5803392" y="2258568"/>
+            <a:off x="4370832" y="2258568"/>
             <a:ext cx="1828800" cy="292608"/>
           </a:xfrm>
           <a:prstGeom prst="rect">
@@ -10115,7 +10339,7 @@
         </p:nvSpPr>
         <p:spPr>
           <a:xfrm>
-            <a:off x="5803392" y="2258568"/>
+            <a:off x="4370832" y="2258568"/>
             <a:ext cx="1828800" cy="292608"/>
           </a:xfrm>
           <a:prstGeom prst="rect">
@@ -10140,7 +10364,7 @@
                 <a:ea typeface="Trebuchet MS" pitchFamily="34" charset="-122"/>
                 <a:cs typeface="Trebuchet MS" pitchFamily="34" charset="-120"/>
               </a:rPr>
-              <a:t>ion</a:t>
+              <a:t>ject</a:t>
             </a:r>
             <a:endParaRPr lang="en-US" sz="1300" dirty="0"/>
           </a:p>
@@ -10154,7 +10378,7 @@
         </p:nvSpPr>
         <p:spPr>
           <a:xfrm>
-            <a:off x="5803392" y="2569464"/>
+            <a:off x="4370832" y="2569464"/>
             <a:ext cx="1828800" cy="201168"/>
           </a:xfrm>
           <a:prstGeom prst="rect">
@@ -10179,7 +10403,7 @@
                 <a:ea typeface="Calibri" pitchFamily="34" charset="-122"/>
                 <a:cs typeface="Calibri" pitchFamily="34" charset="-120"/>
               </a:rPr>
-              <a:t>act or state of</a:t>
+              <a:t>throw</a:t>
             </a:r>
             <a:endParaRPr lang="en-US" sz="850" dirty="0"/>
           </a:p>
@@ -10188,6 +10412,118 @@
       <p:sp>
         <p:nvSpPr>
           <p:cNvPr id="22" name="Shape 20"/>
+          <p:cNvSpPr/>
+          <p:nvPr/>
+        </p:nvSpPr>
+        <p:spPr>
+          <a:xfrm>
+            <a:off x="6519672" y="2258568"/>
+            <a:ext cx="1828800" cy="292608"/>
+          </a:xfrm>
+          <a:prstGeom prst="rect">
+            <a:avLst>
+              <a:gd name="adj" fmla="val 25000"/>
+            </a:avLst>
+          </a:prstGeom>
+          <a:solidFill>
+            <a:srgbClr val="FCE7F3"/>
+          </a:solidFill>
+          <a:ln w="19050">
+            <a:solidFill>
+              <a:srgbClr val="DB2777"/>
+            </a:solidFill>
+            <a:prstDash val="solid"/>
+          </a:ln>
+          <a:effectLst>
+            <a:outerShdw sx="100000" sy="100000" kx="0" ky="0" algn="bl" rotWithShape="0" blurRad="101600" dist="38100" dir="8100000">
+              <a:srgbClr val="000000">
+                <a:alpha val="12000"/>
+              </a:srgbClr>
+            </a:outerShdw>
+          </a:effectLst>
+        </p:spPr>
+      </p:sp>
+      <p:sp>
+        <p:nvSpPr>
+          <p:cNvPr id="23" name="Text 21"/>
+          <p:cNvSpPr/>
+          <p:nvPr/>
+        </p:nvSpPr>
+        <p:spPr>
+          <a:xfrm>
+            <a:off x="6519672" y="2258568"/>
+            <a:ext cx="1828800" cy="292608"/>
+          </a:xfrm>
+          <a:prstGeom prst="rect">
+            <a:avLst/>
+          </a:prstGeom>
+          <a:noFill/>
+          <a:ln/>
+        </p:spPr>
+        <p:txBody>
+          <a:bodyPr wrap="square" lIns="0" tIns="0" rIns="0" bIns="0" rtlCol="0" anchor="ctr"/>
+          <a:lstStyle/>
+          <a:p>
+            <a:pPr algn="ctr" indent="0" marL="0">
+              <a:buNone/>
+            </a:pPr>
+            <a:r>
+              <a:rPr lang="en-US" sz="1300" b="1" dirty="0">
+                <a:solidFill>
+                  <a:srgbClr val="9D174D"/>
+                </a:solidFill>
+                <a:latin typeface="Trebuchet MS" pitchFamily="34" charset="0"/>
+                <a:ea typeface="Trebuchet MS" pitchFamily="34" charset="-122"/>
+                <a:cs typeface="Trebuchet MS" pitchFamily="34" charset="-120"/>
+              </a:rPr>
+              <a:t>ion</a:t>
+            </a:r>
+            <a:endParaRPr lang="en-US" sz="1300" dirty="0"/>
+          </a:p>
+        </p:txBody>
+      </p:sp>
+      <p:sp>
+        <p:nvSpPr>
+          <p:cNvPr id="24" name="Text 22"/>
+          <p:cNvSpPr/>
+          <p:nvPr/>
+        </p:nvSpPr>
+        <p:spPr>
+          <a:xfrm>
+            <a:off x="6519672" y="2569464"/>
+            <a:ext cx="1828800" cy="201168"/>
+          </a:xfrm>
+          <a:prstGeom prst="rect">
+            <a:avLst/>
+          </a:prstGeom>
+          <a:noFill/>
+          <a:ln/>
+        </p:spPr>
+        <p:txBody>
+          <a:bodyPr wrap="square" lIns="0" tIns="0" rIns="0" bIns="0" rtlCol="0" anchor="t"/>
+          <a:lstStyle/>
+          <a:p>
+            <a:pPr algn="ctr" indent="0" marL="0">
+              <a:buNone/>
+            </a:pPr>
+            <a:r>
+              <a:rPr lang="en-US" sz="850" dirty="0">
+                <a:solidFill>
+                  <a:srgbClr val="475569"/>
+                </a:solidFill>
+                <a:latin typeface="Calibri" pitchFamily="34" charset="0"/>
+                <a:ea typeface="Calibri" pitchFamily="34" charset="-122"/>
+                <a:cs typeface="Calibri" pitchFamily="34" charset="-120"/>
+              </a:rPr>
+              <a:t>act or result of</a:t>
+            </a:r>
+            <a:endParaRPr lang="en-US" sz="850" dirty="0"/>
+          </a:p>
+        </p:txBody>
+      </p:sp>
+      <p:sp>
+        <p:nvSpPr>
+          <p:cNvPr id="25" name="Shape 23"/>
           <p:cNvSpPr/>
           <p:nvPr/>
         </p:nvSpPr>
@@ -10214,7 +10550,7 @@
       </p:sp>
       <p:sp>
         <p:nvSpPr>
-          <p:cNvPr id="23" name="Text 21"/>
+          <p:cNvPr id="26" name="Text 24"/>
           <p:cNvSpPr/>
           <p:nvPr/>
         </p:nvSpPr>
@@ -10253,7 +10589,7 @@
       </p:sp>
       <p:sp>
         <p:nvSpPr>
-          <p:cNvPr id="24" name="Shape 22"/>
+          <p:cNvPr id="27" name="Shape 25"/>
           <p:cNvSpPr/>
           <p:nvPr/>
         </p:nvSpPr>
@@ -10280,7 +10616,7 @@
       </p:sp>
       <p:sp>
         <p:nvSpPr>
-          <p:cNvPr id="25" name="Shape 23"/>
+          <p:cNvPr id="28" name="Shape 26"/>
           <p:cNvSpPr/>
           <p:nvPr/>
         </p:nvSpPr>
@@ -10307,7 +10643,7 @@
       </p:sp>
       <p:sp>
         <p:nvSpPr>
-          <p:cNvPr id="26" name="Text 24"/>
+          <p:cNvPr id="29" name="Text 27"/>
           <p:cNvSpPr/>
           <p:nvPr/>
         </p:nvSpPr>
@@ -10346,7 +10682,7 @@
       </p:sp>
       <p:sp>
         <p:nvSpPr>
-          <p:cNvPr id="27" name="Text 25"/>
+          <p:cNvPr id="30" name="Text 28"/>
           <p:cNvSpPr/>
           <p:nvPr/>
         </p:nvSpPr>
@@ -10385,7 +10721,7 @@
       </p:sp>
       <p:sp>
         <p:nvSpPr>
-          <p:cNvPr id="28" name="Shape 26"/>
+          <p:cNvPr id="31" name="Shape 29"/>
           <p:cNvSpPr/>
           <p:nvPr/>
         </p:nvSpPr>
@@ -10412,7 +10748,7 @@
       </p:sp>
       <p:sp>
         <p:nvSpPr>
-          <p:cNvPr id="29" name="Text 27"/>
+          <p:cNvPr id="32" name="Text 30"/>
           <p:cNvSpPr/>
           <p:nvPr/>
         </p:nvSpPr>
@@ -10451,7 +10787,7 @@
       </p:sp>
       <p:sp>
         <p:nvSpPr>
-          <p:cNvPr id="30" name="Text 28"/>
+          <p:cNvPr id="33" name="Text 31"/>
           <p:cNvSpPr/>
           <p:nvPr/>
         </p:nvSpPr>
@@ -10490,7 +10826,7 @@
       </p:sp>
       <p:sp>
         <p:nvSpPr>
-          <p:cNvPr id="31" name="Shape 29"/>
+          <p:cNvPr id="34" name="Shape 32"/>
           <p:cNvSpPr/>
           <p:nvPr/>
         </p:nvSpPr>
@@ -10517,7 +10853,7 @@
       </p:sp>
       <p:sp>
         <p:nvSpPr>
-          <p:cNvPr id="32" name="Text 30"/>
+          <p:cNvPr id="35" name="Text 33"/>
           <p:cNvSpPr/>
           <p:nvPr/>
         </p:nvSpPr>
@@ -10556,7 +10892,7 @@
       </p:sp>
       <p:sp>
         <p:nvSpPr>
-          <p:cNvPr id="33" name="Shape 31"/>
+          <p:cNvPr id="36" name="Shape 34"/>
           <p:cNvSpPr/>
           <p:nvPr/>
         </p:nvSpPr>
@@ -10583,7 +10919,7 @@
       </p:sp>
       <p:sp>
         <p:nvSpPr>
-          <p:cNvPr id="34" name="Text 32"/>
+          <p:cNvPr id="37" name="Text 35"/>
           <p:cNvSpPr/>
           <p:nvPr/>
         </p:nvSpPr>
@@ -10622,7 +10958,7 @@
       </p:sp>
       <p:sp>
         <p:nvSpPr>
-          <p:cNvPr id="35" name="Shape 33"/>
+          <p:cNvPr id="38" name="Shape 36"/>
           <p:cNvSpPr/>
           <p:nvPr/>
         </p:nvSpPr>
@@ -10649,13 +10985,13 @@
       </p:sp>
       <p:sp>
         <p:nvSpPr>
-          <p:cNvPr id="36" name="Shape 34"/>
-          <p:cNvSpPr/>
-          <p:nvPr/>
-        </p:nvSpPr>
-        <p:spPr>
-          <a:xfrm>
-            <a:off x="2023872" y="4169664"/>
+          <p:cNvPr id="39" name="Shape 37"/>
+          <p:cNvSpPr/>
+          <p:nvPr/>
+        </p:nvSpPr>
+        <p:spPr>
+          <a:xfrm>
+            <a:off x="2124837" y="4169664"/>
             <a:ext cx="685800" cy="384048"/>
           </a:xfrm>
           <a:prstGeom prst="rect">
@@ -10676,13 +11012,13 @@
       </p:sp>
       <p:sp>
         <p:nvSpPr>
-          <p:cNvPr id="37" name="Text 35"/>
-          <p:cNvSpPr/>
-          <p:nvPr/>
-        </p:nvSpPr>
-        <p:spPr>
-          <a:xfrm>
-            <a:off x="2023872" y="4169664"/>
+          <p:cNvPr id="40" name="Text 38"/>
+          <p:cNvSpPr/>
+          <p:nvPr/>
+        </p:nvSpPr>
+        <p:spPr>
+          <a:xfrm>
+            <a:off x="2124837" y="4169664"/>
             <a:ext cx="685800" cy="384048"/>
           </a:xfrm>
           <a:prstGeom prst="rect">
@@ -10715,13 +11051,13 @@
       </p:sp>
       <p:sp>
         <p:nvSpPr>
-          <p:cNvPr id="38" name="Shape 36"/>
-          <p:cNvSpPr/>
-          <p:nvPr/>
-        </p:nvSpPr>
-        <p:spPr>
-          <a:xfrm>
-            <a:off x="2831592" y="4169664"/>
+          <p:cNvPr id="41" name="Shape 39"/>
+          <p:cNvSpPr/>
+          <p:nvPr/>
+        </p:nvSpPr>
+        <p:spPr>
+          <a:xfrm>
+            <a:off x="3033522" y="4169664"/>
             <a:ext cx="685800" cy="384048"/>
           </a:xfrm>
           <a:prstGeom prst="rect">
@@ -10742,13 +11078,13 @@
       </p:sp>
       <p:sp>
         <p:nvSpPr>
-          <p:cNvPr id="39" name="Text 37"/>
-          <p:cNvSpPr/>
-          <p:nvPr/>
-        </p:nvSpPr>
-        <p:spPr>
-          <a:xfrm>
-            <a:off x="2831592" y="4169664"/>
+          <p:cNvPr id="42" name="Text 40"/>
+          <p:cNvSpPr/>
+          <p:nvPr/>
+        </p:nvSpPr>
+        <p:spPr>
+          <a:xfrm>
+            <a:off x="3033522" y="4169664"/>
             <a:ext cx="685800" cy="384048"/>
           </a:xfrm>
           <a:prstGeom prst="rect">
@@ -10781,13 +11117,13 @@
       </p:sp>
       <p:sp>
         <p:nvSpPr>
-          <p:cNvPr id="40" name="Shape 38"/>
-          <p:cNvSpPr/>
-          <p:nvPr/>
-        </p:nvSpPr>
-        <p:spPr>
-          <a:xfrm>
-            <a:off x="3639312" y="4169664"/>
+          <p:cNvPr id="43" name="Shape 41"/>
+          <p:cNvSpPr/>
+          <p:nvPr/>
+        </p:nvSpPr>
+        <p:spPr>
+          <a:xfrm>
+            <a:off x="3942207" y="4169664"/>
             <a:ext cx="685800" cy="384048"/>
           </a:xfrm>
           <a:prstGeom prst="rect">
@@ -10808,13 +11144,13 @@
       </p:sp>
       <p:sp>
         <p:nvSpPr>
-          <p:cNvPr id="41" name="Text 39"/>
-          <p:cNvSpPr/>
-          <p:nvPr/>
-        </p:nvSpPr>
-        <p:spPr>
-          <a:xfrm>
-            <a:off x="3639312" y="4169664"/>
+          <p:cNvPr id="44" name="Text 42"/>
+          <p:cNvSpPr/>
+          <p:nvPr/>
+        </p:nvSpPr>
+        <p:spPr>
+          <a:xfrm>
+            <a:off x="3942207" y="4169664"/>
             <a:ext cx="685800" cy="384048"/>
           </a:xfrm>
           <a:prstGeom prst="rect">
@@ -10847,13 +11183,13 @@
       </p:sp>
       <p:sp>
         <p:nvSpPr>
-          <p:cNvPr id="42" name="Shape 40"/>
-          <p:cNvSpPr/>
-          <p:nvPr/>
-        </p:nvSpPr>
-        <p:spPr>
-          <a:xfrm>
-            <a:off x="4447032" y="4169664"/>
+          <p:cNvPr id="45" name="Shape 43"/>
+          <p:cNvSpPr/>
+          <p:nvPr/>
+        </p:nvSpPr>
+        <p:spPr>
+          <a:xfrm>
+            <a:off x="4850892" y="4169664"/>
             <a:ext cx="685800" cy="384048"/>
           </a:xfrm>
           <a:prstGeom prst="rect">
@@ -10874,13 +11210,13 @@
       </p:sp>
       <p:sp>
         <p:nvSpPr>
-          <p:cNvPr id="43" name="Text 41"/>
-          <p:cNvSpPr/>
-          <p:nvPr/>
-        </p:nvSpPr>
-        <p:spPr>
-          <a:xfrm>
-            <a:off x="4447032" y="4169664"/>
+          <p:cNvPr id="46" name="Text 44"/>
+          <p:cNvSpPr/>
+          <p:nvPr/>
+        </p:nvSpPr>
+        <p:spPr>
+          <a:xfrm>
+            <a:off x="4850892" y="4169664"/>
             <a:ext cx="685800" cy="384048"/>
           </a:xfrm>
           <a:prstGeom prst="rect">
@@ -10913,13 +11249,13 @@
       </p:sp>
       <p:sp>
         <p:nvSpPr>
-          <p:cNvPr id="44" name="Shape 42"/>
-          <p:cNvSpPr/>
-          <p:nvPr/>
-        </p:nvSpPr>
-        <p:spPr>
-          <a:xfrm>
-            <a:off x="5254752" y="4169664"/>
+          <p:cNvPr id="47" name="Shape 45"/>
+          <p:cNvSpPr/>
+          <p:nvPr/>
+        </p:nvSpPr>
+        <p:spPr>
+          <a:xfrm>
+            <a:off x="5759577" y="4169664"/>
             <a:ext cx="685800" cy="384048"/>
           </a:xfrm>
           <a:prstGeom prst="rect">
@@ -10940,13 +11276,13 @@
       </p:sp>
       <p:sp>
         <p:nvSpPr>
-          <p:cNvPr id="45" name="Text 43"/>
-          <p:cNvSpPr/>
-          <p:nvPr/>
-        </p:nvSpPr>
-        <p:spPr>
-          <a:xfrm>
-            <a:off x="5254752" y="4169664"/>
+          <p:cNvPr id="48" name="Text 46"/>
+          <p:cNvSpPr/>
+          <p:nvPr/>
+        </p:nvSpPr>
+        <p:spPr>
+          <a:xfrm>
+            <a:off x="5759577" y="4169664"/>
             <a:ext cx="685800" cy="384048"/>
           </a:xfrm>
           <a:prstGeom prst="rect">
@@ -10979,13 +11315,13 @@
       </p:sp>
       <p:sp>
         <p:nvSpPr>
-          <p:cNvPr id="46" name="Text 44"/>
-          <p:cNvSpPr/>
-          <p:nvPr/>
-        </p:nvSpPr>
-        <p:spPr>
-          <a:xfrm>
-            <a:off x="5254752" y="4572000"/>
+          <p:cNvPr id="49" name="Text 47"/>
+          <p:cNvSpPr/>
+          <p:nvPr/>
+        </p:nvSpPr>
+        <p:spPr>
+          <a:xfrm>
+            <a:off x="5759577" y="4572000"/>
             <a:ext cx="685800" cy="219456"/>
           </a:xfrm>
           <a:prstGeom prst="rect">
@@ -11018,13 +11354,13 @@
       </p:sp>
       <p:sp>
         <p:nvSpPr>
-          <p:cNvPr id="47" name="Shape 45"/>
-          <p:cNvSpPr/>
-          <p:nvPr/>
-        </p:nvSpPr>
-        <p:spPr>
-          <a:xfrm>
-            <a:off x="6062472" y="4169664"/>
+          <p:cNvPr id="50" name="Shape 48"/>
+          <p:cNvSpPr/>
+          <p:nvPr/>
+        </p:nvSpPr>
+        <p:spPr>
+          <a:xfrm>
+            <a:off x="6668262" y="4169664"/>
             <a:ext cx="685800" cy="384048"/>
           </a:xfrm>
           <a:prstGeom prst="rect">
@@ -11045,13 +11381,13 @@
       </p:sp>
       <p:sp>
         <p:nvSpPr>
-          <p:cNvPr id="48" name="Text 46"/>
-          <p:cNvSpPr/>
-          <p:nvPr/>
-        </p:nvSpPr>
-        <p:spPr>
-          <a:xfrm>
-            <a:off x="6062472" y="4169664"/>
+          <p:cNvPr id="51" name="Text 49"/>
+          <p:cNvSpPr/>
+          <p:nvPr/>
+        </p:nvSpPr>
+        <p:spPr>
+          <a:xfrm>
+            <a:off x="6668262" y="4169664"/>
             <a:ext cx="685800" cy="384048"/>
           </a:xfrm>
           <a:prstGeom prst="rect">
@@ -11084,13 +11420,13 @@
       </p:sp>
       <p:sp>
         <p:nvSpPr>
-          <p:cNvPr id="49" name="Shape 47"/>
-          <p:cNvSpPr/>
-          <p:nvPr/>
-        </p:nvSpPr>
-        <p:spPr>
-          <a:xfrm>
-            <a:off x="6870192" y="4169664"/>
+          <p:cNvPr id="52" name="Shape 50"/>
+          <p:cNvSpPr/>
+          <p:nvPr/>
+        </p:nvSpPr>
+        <p:spPr>
+          <a:xfrm>
+            <a:off x="7576947" y="4169664"/>
             <a:ext cx="685800" cy="384048"/>
           </a:xfrm>
           <a:prstGeom prst="rect">
@@ -11111,13 +11447,13 @@
       </p:sp>
       <p:sp>
         <p:nvSpPr>
-          <p:cNvPr id="50" name="Text 48"/>
-          <p:cNvSpPr/>
-          <p:nvPr/>
-        </p:nvSpPr>
-        <p:spPr>
-          <a:xfrm>
-            <a:off x="6870192" y="4169664"/>
+          <p:cNvPr id="53" name="Text 51"/>
+          <p:cNvSpPr/>
+          <p:nvPr/>
+        </p:nvSpPr>
+        <p:spPr>
+          <a:xfrm>
+            <a:off x="7576947" y="4169664"/>
             <a:ext cx="685800" cy="384048"/>
           </a:xfrm>
           <a:prstGeom prst="rect">
@@ -11142,7 +11478,7 @@
                 <a:ea typeface="Trebuchet MS" pitchFamily="34" charset="-122"/>
                 <a:cs typeface="Trebuchet MS" pitchFamily="34" charset="-120"/>
               </a:rPr>
-              <a:t>io</a:t>
+              <a:t>ion</a:t>
             </a:r>
             <a:endParaRPr lang="en-US" sz="900" dirty="0"/>
           </a:p>
@@ -11150,13 +11486,13 @@
       </p:sp>
       <p:sp>
         <p:nvSpPr>
-          <p:cNvPr id="51" name="Text 49"/>
-          <p:cNvSpPr/>
-          <p:nvPr/>
-        </p:nvSpPr>
-        <p:spPr>
-          <a:xfrm>
-            <a:off x="6870192" y="4572000"/>
+          <p:cNvPr id="54" name="Text 52"/>
+          <p:cNvSpPr/>
+          <p:nvPr/>
+        </p:nvSpPr>
+        <p:spPr>
+          <a:xfrm>
+            <a:off x="7576947" y="4572000"/>
             <a:ext cx="685800" cy="219456"/>
           </a:xfrm>
           <a:prstGeom prst="rect">
@@ -11181,75 +11517,9 @@
                 <a:ea typeface="Calibri" pitchFamily="34" charset="-122"/>
                 <a:cs typeface="Calibri" pitchFamily="34" charset="-120"/>
               </a:rPr>
-              <a:t>/sh/</a:t>
+              <a:t>/shun/</a:t>
             </a:r>
             <a:endParaRPr lang="en-US" sz="750" dirty="0"/>
-          </a:p>
-        </p:txBody>
-      </p:sp>
-      <p:sp>
-        <p:nvSpPr>
-          <p:cNvPr id="52" name="Shape 50"/>
-          <p:cNvSpPr/>
-          <p:nvPr/>
-        </p:nvSpPr>
-        <p:spPr>
-          <a:xfrm>
-            <a:off x="7677912" y="4169664"/>
-            <a:ext cx="685800" cy="384048"/>
-          </a:xfrm>
-          <a:prstGeom prst="rect">
-            <a:avLst>
-              <a:gd name="adj" fmla="val 9524"/>
-            </a:avLst>
-          </a:prstGeom>
-          <a:solidFill>
-            <a:srgbClr val="FFFFFF"/>
-          </a:solidFill>
-          <a:ln w="12700">
-            <a:solidFill>
-              <a:srgbClr val="DB2777"/>
-            </a:solidFill>
-            <a:prstDash val="solid"/>
-          </a:ln>
-        </p:spPr>
-      </p:sp>
-      <p:sp>
-        <p:nvSpPr>
-          <p:cNvPr id="53" name="Text 51"/>
-          <p:cNvSpPr/>
-          <p:nvPr/>
-        </p:nvSpPr>
-        <p:spPr>
-          <a:xfrm>
-            <a:off x="7677912" y="4169664"/>
-            <a:ext cx="685800" cy="384048"/>
-          </a:xfrm>
-          <a:prstGeom prst="rect">
-            <a:avLst/>
-          </a:prstGeom>
-          <a:noFill/>
-          <a:ln/>
-        </p:spPr>
-        <p:txBody>
-          <a:bodyPr wrap="square" lIns="0" tIns="0" rIns="0" bIns="0" rtlCol="0" anchor="ctr"/>
-          <a:lstStyle/>
-          <a:p>
-            <a:pPr algn="ctr" indent="0" marL="0">
-              <a:buNone/>
-            </a:pPr>
-            <a:r>
-              <a:rPr lang="en-US" sz="900" b="1" dirty="0">
-                <a:solidFill>
-                  <a:srgbClr val="9D174D"/>
-                </a:solidFill>
-                <a:latin typeface="Trebuchet MS" pitchFamily="34" charset="0"/>
-                <a:ea typeface="Trebuchet MS" pitchFamily="34" charset="-122"/>
-                <a:cs typeface="Trebuchet MS" pitchFamily="34" charset="-120"/>
-              </a:rPr>
-              <a:t>n</a:t>
-            </a:r>
-            <a:endParaRPr lang="en-US" sz="900" dirty="0"/>
           </a:p>
         </p:txBody>
       </p:sp>
@@ -11539,7 +11809,7 @@
                 <a:ea typeface="Calibri" pitchFamily="34" charset="-122"/>
                 <a:cs typeface="Calibri" pitchFamily="34" charset="-120"/>
               </a:rPr>
-              <a:t>Word Labs  •  wordlabs.app  •  Root: 'reject' = throw back, refuse to accept</a:t>
+              <a:t>Word Labs  •  wordlabs.app  •  Root: 'reject' = throw back, refuse, push away</a:t>
             </a:r>
             <a:endParaRPr lang="en-US" sz="800" dirty="0"/>
           </a:p>
@@ -12366,7 +12636,7 @@
                 <a:ea typeface="Calibri" pitchFamily="34" charset="-122"/>
                 <a:cs typeface="Calibri" pitchFamily="34" charset="-120"/>
               </a:rPr>
-              <a:t>Word Labs  •  wordlabs.app  •  Root: 'reject' = throw back, refuse to accept</a:t>
+              <a:t>Word Labs  •  wordlabs.app  •  Root: 'reject' = throw back, refuse, push away</a:t>
             </a:r>
             <a:endParaRPr lang="en-US" sz="800" dirty="0"/>
           </a:p>
@@ -12585,7 +12855,7 @@
         </p:nvSpPr>
         <p:spPr>
           <a:xfrm>
-            <a:off x="2938272" y="2258568"/>
+            <a:off x="2221992" y="2258568"/>
             <a:ext cx="1828800" cy="292608"/>
           </a:xfrm>
           <a:prstGeom prst="rect">
@@ -12594,11 +12864,11 @@
             </a:avLst>
           </a:prstGeom>
           <a:solidFill>
-            <a:srgbClr val="CCFBF1"/>
+            <a:srgbClr val="DDD6FE"/>
           </a:solidFill>
           <a:ln w="19050">
             <a:solidFill>
-              <a:srgbClr val="0D9488"/>
+              <a:srgbClr val="7C3AED"/>
             </a:solidFill>
             <a:prstDash val="solid"/>
           </a:ln>
@@ -12619,7 +12889,7 @@
         </p:nvSpPr>
         <p:spPr>
           <a:xfrm>
-            <a:off x="2938272" y="2258568"/>
+            <a:off x="2221992" y="2258568"/>
             <a:ext cx="1828800" cy="292608"/>
           </a:xfrm>
           <a:prstGeom prst="rect">
@@ -12638,13 +12908,13 @@
             <a:r>
               <a:rPr lang="en-US" sz="1300" b="1" dirty="0">
                 <a:solidFill>
-                  <a:srgbClr val="0F766E"/>
+                  <a:srgbClr val="4C1D95"/>
                 </a:solidFill>
                 <a:latin typeface="Trebuchet MS" pitchFamily="34" charset="0"/>
                 <a:ea typeface="Trebuchet MS" pitchFamily="34" charset="-122"/>
                 <a:cs typeface="Trebuchet MS" pitchFamily="34" charset="-120"/>
               </a:rPr>
-              <a:t>reject</a:t>
+              <a:t>re</a:t>
             </a:r>
             <a:endParaRPr lang="en-US" sz="1300" dirty="0"/>
           </a:p>
@@ -12658,7 +12928,7 @@
         </p:nvSpPr>
         <p:spPr>
           <a:xfrm>
-            <a:off x="2938272" y="2569464"/>
+            <a:off x="2221992" y="2569464"/>
             <a:ext cx="1828800" cy="201168"/>
           </a:xfrm>
           <a:prstGeom prst="rect">
@@ -12683,7 +12953,7 @@
                 <a:ea typeface="Calibri" pitchFamily="34" charset="-122"/>
                 <a:cs typeface="Calibri" pitchFamily="34" charset="-120"/>
               </a:rPr>
-              <a:t>to throw back or refuse</a:t>
+              <a:t>back</a:t>
             </a:r>
             <a:endParaRPr lang="en-US" sz="850" dirty="0"/>
           </a:p>
@@ -12697,7 +12967,7 @@
         </p:nvSpPr>
         <p:spPr>
           <a:xfrm>
-            <a:off x="5803392" y="2258568"/>
+            <a:off x="4370832" y="2258568"/>
             <a:ext cx="1828800" cy="292608"/>
           </a:xfrm>
           <a:prstGeom prst="rect">
@@ -12731,7 +13001,7 @@
         </p:nvSpPr>
         <p:spPr>
           <a:xfrm>
-            <a:off x="5803392" y="2258568"/>
+            <a:off x="4370832" y="2258568"/>
             <a:ext cx="1828800" cy="292608"/>
           </a:xfrm>
           <a:prstGeom prst="rect">
@@ -12756,7 +13026,7 @@
                 <a:ea typeface="Trebuchet MS" pitchFamily="34" charset="-122"/>
                 <a:cs typeface="Trebuchet MS" pitchFamily="34" charset="-120"/>
               </a:rPr>
-              <a:t>ed</a:t>
+              <a:t>ject</a:t>
             </a:r>
             <a:endParaRPr lang="en-US" sz="1300" dirty="0"/>
           </a:p>
@@ -12770,7 +13040,7 @@
         </p:nvSpPr>
         <p:spPr>
           <a:xfrm>
-            <a:off x="5803392" y="2569464"/>
+            <a:off x="4370832" y="2569464"/>
             <a:ext cx="1828800" cy="201168"/>
           </a:xfrm>
           <a:prstGeom prst="rect">
@@ -12795,7 +13065,7 @@
                 <a:ea typeface="Calibri" pitchFamily="34" charset="-122"/>
                 <a:cs typeface="Calibri" pitchFamily="34" charset="-120"/>
               </a:rPr>
-              <a:t>happened in the past</a:t>
+              <a:t>throw</a:t>
             </a:r>
             <a:endParaRPr lang="en-US" sz="850" dirty="0"/>
           </a:p>
@@ -12804,6 +13074,118 @@
       <p:sp>
         <p:nvSpPr>
           <p:cNvPr id="22" name="Shape 20"/>
+          <p:cNvSpPr/>
+          <p:nvPr/>
+        </p:nvSpPr>
+        <p:spPr>
+          <a:xfrm>
+            <a:off x="6519672" y="2258568"/>
+            <a:ext cx="1828800" cy="292608"/>
+          </a:xfrm>
+          <a:prstGeom prst="rect">
+            <a:avLst>
+              <a:gd name="adj" fmla="val 25000"/>
+            </a:avLst>
+          </a:prstGeom>
+          <a:solidFill>
+            <a:srgbClr val="FCE7F3"/>
+          </a:solidFill>
+          <a:ln w="19050">
+            <a:solidFill>
+              <a:srgbClr val="DB2777"/>
+            </a:solidFill>
+            <a:prstDash val="solid"/>
+          </a:ln>
+          <a:effectLst>
+            <a:outerShdw sx="100000" sy="100000" kx="0" ky="0" algn="bl" rotWithShape="0" blurRad="101600" dist="38100" dir="8100000">
+              <a:srgbClr val="000000">
+                <a:alpha val="12000"/>
+              </a:srgbClr>
+            </a:outerShdw>
+          </a:effectLst>
+        </p:spPr>
+      </p:sp>
+      <p:sp>
+        <p:nvSpPr>
+          <p:cNvPr id="23" name="Text 21"/>
+          <p:cNvSpPr/>
+          <p:nvPr/>
+        </p:nvSpPr>
+        <p:spPr>
+          <a:xfrm>
+            <a:off x="6519672" y="2258568"/>
+            <a:ext cx="1828800" cy="292608"/>
+          </a:xfrm>
+          <a:prstGeom prst="rect">
+            <a:avLst/>
+          </a:prstGeom>
+          <a:noFill/>
+          <a:ln/>
+        </p:spPr>
+        <p:txBody>
+          <a:bodyPr wrap="square" lIns="0" tIns="0" rIns="0" bIns="0" rtlCol="0" anchor="ctr"/>
+          <a:lstStyle/>
+          <a:p>
+            <a:pPr algn="ctr" indent="0" marL="0">
+              <a:buNone/>
+            </a:pPr>
+            <a:r>
+              <a:rPr lang="en-US" sz="1300" b="1" dirty="0">
+                <a:solidFill>
+                  <a:srgbClr val="9D174D"/>
+                </a:solidFill>
+                <a:latin typeface="Trebuchet MS" pitchFamily="34" charset="0"/>
+                <a:ea typeface="Trebuchet MS" pitchFamily="34" charset="-122"/>
+                <a:cs typeface="Trebuchet MS" pitchFamily="34" charset="-120"/>
+              </a:rPr>
+              <a:t>ed</a:t>
+            </a:r>
+            <a:endParaRPr lang="en-US" sz="1300" dirty="0"/>
+          </a:p>
+        </p:txBody>
+      </p:sp>
+      <p:sp>
+        <p:nvSpPr>
+          <p:cNvPr id="24" name="Text 22"/>
+          <p:cNvSpPr/>
+          <p:nvPr/>
+        </p:nvSpPr>
+        <p:spPr>
+          <a:xfrm>
+            <a:off x="6519672" y="2569464"/>
+            <a:ext cx="1828800" cy="201168"/>
+          </a:xfrm>
+          <a:prstGeom prst="rect">
+            <a:avLst/>
+          </a:prstGeom>
+          <a:noFill/>
+          <a:ln/>
+        </p:spPr>
+        <p:txBody>
+          <a:bodyPr wrap="square" lIns="0" tIns="0" rIns="0" bIns="0" rtlCol="0" anchor="t"/>
+          <a:lstStyle/>
+          <a:p>
+            <a:pPr algn="ctr" indent="0" marL="0">
+              <a:buNone/>
+            </a:pPr>
+            <a:r>
+              <a:rPr lang="en-US" sz="850" dirty="0">
+                <a:solidFill>
+                  <a:srgbClr val="475569"/>
+                </a:solidFill>
+                <a:latin typeface="Calibri" pitchFamily="34" charset="0"/>
+                <a:ea typeface="Calibri" pitchFamily="34" charset="-122"/>
+                <a:cs typeface="Calibri" pitchFamily="34" charset="-120"/>
+              </a:rPr>
+              <a:t>past tense</a:t>
+            </a:r>
+            <a:endParaRPr lang="en-US" sz="850" dirty="0"/>
+          </a:p>
+        </p:txBody>
+      </p:sp>
+      <p:sp>
+        <p:nvSpPr>
+          <p:cNvPr id="25" name="Shape 23"/>
           <p:cNvSpPr/>
           <p:nvPr/>
         </p:nvSpPr>
@@ -12830,7 +13212,7 @@
       </p:sp>
       <p:sp>
         <p:nvSpPr>
-          <p:cNvPr id="23" name="Text 21"/>
+          <p:cNvPr id="26" name="Text 24"/>
           <p:cNvSpPr/>
           <p:nvPr/>
         </p:nvSpPr>
@@ -12869,7 +13251,7 @@
       </p:sp>
       <p:sp>
         <p:nvSpPr>
-          <p:cNvPr id="24" name="Shape 22"/>
+          <p:cNvPr id="27" name="Shape 25"/>
           <p:cNvSpPr/>
           <p:nvPr/>
         </p:nvSpPr>
@@ -12896,7 +13278,7 @@
       </p:sp>
       <p:sp>
         <p:nvSpPr>
-          <p:cNvPr id="25" name="Text 23"/>
+          <p:cNvPr id="28" name="Text 26"/>
           <p:cNvSpPr/>
           <p:nvPr/>
         </p:nvSpPr>
@@ -12935,7 +13317,7 @@
       </p:sp>
       <p:sp>
         <p:nvSpPr>
-          <p:cNvPr id="26" name="Shape 24"/>
+          <p:cNvPr id="29" name="Shape 27"/>
           <p:cNvSpPr/>
           <p:nvPr/>
         </p:nvSpPr>
@@ -12962,7 +13344,7 @@
       </p:sp>
       <p:sp>
         <p:nvSpPr>
-          <p:cNvPr id="27" name="Text 25"/>
+          <p:cNvPr id="30" name="Text 28"/>
           <p:cNvSpPr/>
           <p:nvPr/>
         </p:nvSpPr>
@@ -13001,7 +13383,7 @@
       </p:sp>
       <p:sp>
         <p:nvSpPr>
-          <p:cNvPr id="28" name="Shape 26"/>
+          <p:cNvPr id="31" name="Shape 29"/>
           <p:cNvSpPr/>
           <p:nvPr/>
         </p:nvSpPr>
@@ -13028,7 +13410,7 @@
       </p:sp>
       <p:sp>
         <p:nvSpPr>
-          <p:cNvPr id="29" name="Text 27"/>
+          <p:cNvPr id="32" name="Text 30"/>
           <p:cNvSpPr/>
           <p:nvPr/>
         </p:nvSpPr>
@@ -13351,7 +13733,7 @@
                 <a:ea typeface="Calibri" pitchFamily="34" charset="-122"/>
                 <a:cs typeface="Calibri" pitchFamily="34" charset="-120"/>
               </a:rPr>
-              <a:t>Word Labs  •  wordlabs.app  •  Root: 'reject' = throw back, refuse to accept</a:t>
+              <a:t>Word Labs  •  wordlabs.app  •  Root: 'reject' = throw back, refuse, push away</a:t>
             </a:r>
             <a:endParaRPr lang="en-US" sz="800" dirty="0"/>
           </a:p>
@@ -13570,7 +13952,7 @@
         </p:nvSpPr>
         <p:spPr>
           <a:xfrm>
-            <a:off x="2938272" y="2258568"/>
+            <a:off x="2221992" y="2258568"/>
             <a:ext cx="1828800" cy="292608"/>
           </a:xfrm>
           <a:prstGeom prst="rect">
@@ -13579,11 +13961,11 @@
             </a:avLst>
           </a:prstGeom>
           <a:solidFill>
-            <a:srgbClr val="CCFBF1"/>
+            <a:srgbClr val="DDD6FE"/>
           </a:solidFill>
           <a:ln w="19050">
             <a:solidFill>
-              <a:srgbClr val="0D9488"/>
+              <a:srgbClr val="7C3AED"/>
             </a:solidFill>
             <a:prstDash val="solid"/>
           </a:ln>
@@ -13604,7 +13986,7 @@
         </p:nvSpPr>
         <p:spPr>
           <a:xfrm>
-            <a:off x="2938272" y="2258568"/>
+            <a:off x="2221992" y="2258568"/>
             <a:ext cx="1828800" cy="292608"/>
           </a:xfrm>
           <a:prstGeom prst="rect">
@@ -13623,13 +14005,13 @@
             <a:r>
               <a:rPr lang="en-US" sz="1300" b="1" dirty="0">
                 <a:solidFill>
-                  <a:srgbClr val="0F766E"/>
+                  <a:srgbClr val="4C1D95"/>
                 </a:solidFill>
                 <a:latin typeface="Trebuchet MS" pitchFamily="34" charset="0"/>
                 <a:ea typeface="Trebuchet MS" pitchFamily="34" charset="-122"/>
                 <a:cs typeface="Trebuchet MS" pitchFamily="34" charset="-120"/>
               </a:rPr>
-              <a:t>reject</a:t>
+              <a:t>re</a:t>
             </a:r>
             <a:endParaRPr lang="en-US" sz="1300" dirty="0"/>
           </a:p>
@@ -13643,7 +14025,7 @@
         </p:nvSpPr>
         <p:spPr>
           <a:xfrm>
-            <a:off x="2938272" y="2569464"/>
+            <a:off x="2221992" y="2569464"/>
             <a:ext cx="1828800" cy="201168"/>
           </a:xfrm>
           <a:prstGeom prst="rect">
@@ -13668,7 +14050,7 @@
                 <a:ea typeface="Calibri" pitchFamily="34" charset="-122"/>
                 <a:cs typeface="Calibri" pitchFamily="34" charset="-120"/>
               </a:rPr>
-              <a:t>to throw back or refuse</a:t>
+              <a:t>back</a:t>
             </a:r>
             <a:endParaRPr lang="en-US" sz="850" dirty="0"/>
           </a:p>
@@ -13682,7 +14064,7 @@
         </p:nvSpPr>
         <p:spPr>
           <a:xfrm>
-            <a:off x="5803392" y="2258568"/>
+            <a:off x="4370832" y="2258568"/>
             <a:ext cx="1828800" cy="292608"/>
           </a:xfrm>
           <a:prstGeom prst="rect">
@@ -13716,7 +14098,7 @@
         </p:nvSpPr>
         <p:spPr>
           <a:xfrm>
-            <a:off x="5803392" y="2258568"/>
+            <a:off x="4370832" y="2258568"/>
             <a:ext cx="1828800" cy="292608"/>
           </a:xfrm>
           <a:prstGeom prst="rect">
@@ -13741,7 +14123,7 @@
                 <a:ea typeface="Trebuchet MS" pitchFamily="34" charset="-122"/>
                 <a:cs typeface="Trebuchet MS" pitchFamily="34" charset="-120"/>
               </a:rPr>
-              <a:t>ed</a:t>
+              <a:t>ject</a:t>
             </a:r>
             <a:endParaRPr lang="en-US" sz="1300" dirty="0"/>
           </a:p>
@@ -13755,7 +14137,7 @@
         </p:nvSpPr>
         <p:spPr>
           <a:xfrm>
-            <a:off x="5803392" y="2569464"/>
+            <a:off x="4370832" y="2569464"/>
             <a:ext cx="1828800" cy="201168"/>
           </a:xfrm>
           <a:prstGeom prst="rect">
@@ -13780,7 +14162,7 @@
                 <a:ea typeface="Calibri" pitchFamily="34" charset="-122"/>
                 <a:cs typeface="Calibri" pitchFamily="34" charset="-120"/>
               </a:rPr>
-              <a:t>happened in the past</a:t>
+              <a:t>throw</a:t>
             </a:r>
             <a:endParaRPr lang="en-US" sz="850" dirty="0"/>
           </a:p>
@@ -13789,6 +14171,118 @@
       <p:sp>
         <p:nvSpPr>
           <p:cNvPr id="22" name="Shape 20"/>
+          <p:cNvSpPr/>
+          <p:nvPr/>
+        </p:nvSpPr>
+        <p:spPr>
+          <a:xfrm>
+            <a:off x="6519672" y="2258568"/>
+            <a:ext cx="1828800" cy="292608"/>
+          </a:xfrm>
+          <a:prstGeom prst="rect">
+            <a:avLst>
+              <a:gd name="adj" fmla="val 25000"/>
+            </a:avLst>
+          </a:prstGeom>
+          <a:solidFill>
+            <a:srgbClr val="FCE7F3"/>
+          </a:solidFill>
+          <a:ln w="19050">
+            <a:solidFill>
+              <a:srgbClr val="DB2777"/>
+            </a:solidFill>
+            <a:prstDash val="solid"/>
+          </a:ln>
+          <a:effectLst>
+            <a:outerShdw sx="100000" sy="100000" kx="0" ky="0" algn="bl" rotWithShape="0" blurRad="101600" dist="38100" dir="8100000">
+              <a:srgbClr val="000000">
+                <a:alpha val="12000"/>
+              </a:srgbClr>
+            </a:outerShdw>
+          </a:effectLst>
+        </p:spPr>
+      </p:sp>
+      <p:sp>
+        <p:nvSpPr>
+          <p:cNvPr id="23" name="Text 21"/>
+          <p:cNvSpPr/>
+          <p:nvPr/>
+        </p:nvSpPr>
+        <p:spPr>
+          <a:xfrm>
+            <a:off x="6519672" y="2258568"/>
+            <a:ext cx="1828800" cy="292608"/>
+          </a:xfrm>
+          <a:prstGeom prst="rect">
+            <a:avLst/>
+          </a:prstGeom>
+          <a:noFill/>
+          <a:ln/>
+        </p:spPr>
+        <p:txBody>
+          <a:bodyPr wrap="square" lIns="0" tIns="0" rIns="0" bIns="0" rtlCol="0" anchor="ctr"/>
+          <a:lstStyle/>
+          <a:p>
+            <a:pPr algn="ctr" indent="0" marL="0">
+              <a:buNone/>
+            </a:pPr>
+            <a:r>
+              <a:rPr lang="en-US" sz="1300" b="1" dirty="0">
+                <a:solidFill>
+                  <a:srgbClr val="9D174D"/>
+                </a:solidFill>
+                <a:latin typeface="Trebuchet MS" pitchFamily="34" charset="0"/>
+                <a:ea typeface="Trebuchet MS" pitchFamily="34" charset="-122"/>
+                <a:cs typeface="Trebuchet MS" pitchFamily="34" charset="-120"/>
+              </a:rPr>
+              <a:t>ed</a:t>
+            </a:r>
+            <a:endParaRPr lang="en-US" sz="1300" dirty="0"/>
+          </a:p>
+        </p:txBody>
+      </p:sp>
+      <p:sp>
+        <p:nvSpPr>
+          <p:cNvPr id="24" name="Text 22"/>
+          <p:cNvSpPr/>
+          <p:nvPr/>
+        </p:nvSpPr>
+        <p:spPr>
+          <a:xfrm>
+            <a:off x="6519672" y="2569464"/>
+            <a:ext cx="1828800" cy="201168"/>
+          </a:xfrm>
+          <a:prstGeom prst="rect">
+            <a:avLst/>
+          </a:prstGeom>
+          <a:noFill/>
+          <a:ln/>
+        </p:spPr>
+        <p:txBody>
+          <a:bodyPr wrap="square" lIns="0" tIns="0" rIns="0" bIns="0" rtlCol="0" anchor="t"/>
+          <a:lstStyle/>
+          <a:p>
+            <a:pPr algn="ctr" indent="0" marL="0">
+              <a:buNone/>
+            </a:pPr>
+            <a:r>
+              <a:rPr lang="en-US" sz="850" dirty="0">
+                <a:solidFill>
+                  <a:srgbClr val="475569"/>
+                </a:solidFill>
+                <a:latin typeface="Calibri" pitchFamily="34" charset="0"/>
+                <a:ea typeface="Calibri" pitchFamily="34" charset="-122"/>
+                <a:cs typeface="Calibri" pitchFamily="34" charset="-120"/>
+              </a:rPr>
+              <a:t>past tense</a:t>
+            </a:r>
+            <a:endParaRPr lang="en-US" sz="850" dirty="0"/>
+          </a:p>
+        </p:txBody>
+      </p:sp>
+      <p:sp>
+        <p:nvSpPr>
+          <p:cNvPr id="25" name="Shape 23"/>
           <p:cNvSpPr/>
           <p:nvPr/>
         </p:nvSpPr>
@@ -13815,7 +14309,7 @@
       </p:sp>
       <p:sp>
         <p:nvSpPr>
-          <p:cNvPr id="23" name="Text 21"/>
+          <p:cNvPr id="26" name="Text 24"/>
           <p:cNvSpPr/>
           <p:nvPr/>
         </p:nvSpPr>
@@ -13854,7 +14348,7 @@
       </p:sp>
       <p:sp>
         <p:nvSpPr>
-          <p:cNvPr id="24" name="Shape 22"/>
+          <p:cNvPr id="27" name="Shape 25"/>
           <p:cNvSpPr/>
           <p:nvPr/>
         </p:nvSpPr>
@@ -13881,7 +14375,7 @@
       </p:sp>
       <p:sp>
         <p:nvSpPr>
-          <p:cNvPr id="25" name="Shape 23"/>
+          <p:cNvPr id="28" name="Shape 26"/>
           <p:cNvSpPr/>
           <p:nvPr/>
         </p:nvSpPr>
@@ -13908,7 +14402,7 @@
       </p:sp>
       <p:sp>
         <p:nvSpPr>
-          <p:cNvPr id="26" name="Text 24"/>
+          <p:cNvPr id="29" name="Text 27"/>
           <p:cNvSpPr/>
           <p:nvPr/>
         </p:nvSpPr>
@@ -13947,7 +14441,7 @@
       </p:sp>
       <p:sp>
         <p:nvSpPr>
-          <p:cNvPr id="27" name="Text 25"/>
+          <p:cNvPr id="30" name="Text 28"/>
           <p:cNvSpPr/>
           <p:nvPr/>
         </p:nvSpPr>
@@ -13986,7 +14480,7 @@
       </p:sp>
       <p:sp>
         <p:nvSpPr>
-          <p:cNvPr id="28" name="Shape 26"/>
+          <p:cNvPr id="31" name="Shape 29"/>
           <p:cNvSpPr/>
           <p:nvPr/>
         </p:nvSpPr>
@@ -14013,7 +14507,7 @@
       </p:sp>
       <p:sp>
         <p:nvSpPr>
-          <p:cNvPr id="29" name="Text 27"/>
+          <p:cNvPr id="32" name="Text 30"/>
           <p:cNvSpPr/>
           <p:nvPr/>
         </p:nvSpPr>
@@ -14044,7 +14538,7 @@
                 <a:ea typeface="Trebuchet MS" pitchFamily="34" charset="-122"/>
                 <a:cs typeface="Trebuchet MS" pitchFamily="34" charset="-120"/>
               </a:rPr>
-              <a:t>jec</a:t>
+              <a:t>ject</a:t>
             </a:r>
             <a:endParaRPr lang="en-US" sz="1400" dirty="0"/>
           </a:p>
@@ -14052,7 +14546,7 @@
       </p:sp>
       <p:sp>
         <p:nvSpPr>
-          <p:cNvPr id="30" name="Text 28"/>
+          <p:cNvPr id="33" name="Text 31"/>
           <p:cNvSpPr/>
           <p:nvPr/>
         </p:nvSpPr>
@@ -14091,7 +14585,7 @@
       </p:sp>
       <p:sp>
         <p:nvSpPr>
-          <p:cNvPr id="31" name="Shape 29"/>
+          <p:cNvPr id="34" name="Shape 32"/>
           <p:cNvSpPr/>
           <p:nvPr/>
         </p:nvSpPr>
@@ -14118,7 +14612,7 @@
       </p:sp>
       <p:sp>
         <p:nvSpPr>
-          <p:cNvPr id="32" name="Text 30"/>
+          <p:cNvPr id="35" name="Text 33"/>
           <p:cNvSpPr/>
           <p:nvPr/>
         </p:nvSpPr>
@@ -14149,7 +14643,7 @@
                 <a:ea typeface="Trebuchet MS" pitchFamily="34" charset="-122"/>
                 <a:cs typeface="Trebuchet MS" pitchFamily="34" charset="-120"/>
               </a:rPr>
-              <a:t>ted</a:t>
+              <a:t>ed</a:t>
             </a:r>
             <a:endParaRPr lang="en-US" sz="1400" dirty="0"/>
           </a:p>
@@ -14157,7 +14651,7 @@
       </p:sp>
       <p:sp>
         <p:nvSpPr>
-          <p:cNvPr id="33" name="Shape 31"/>
+          <p:cNvPr id="36" name="Shape 34"/>
           <p:cNvSpPr/>
           <p:nvPr/>
         </p:nvSpPr>
@@ -14184,7 +14678,7 @@
       </p:sp>
       <p:sp>
         <p:nvSpPr>
-          <p:cNvPr id="34" name="Text 32"/>
+          <p:cNvPr id="37" name="Text 35"/>
           <p:cNvSpPr/>
           <p:nvPr/>
         </p:nvSpPr>
@@ -14223,7 +14717,7 @@
       </p:sp>
       <p:sp>
         <p:nvSpPr>
-          <p:cNvPr id="35" name="Shape 33"/>
+          <p:cNvPr id="38" name="Shape 36"/>
           <p:cNvSpPr/>
           <p:nvPr/>
         </p:nvSpPr>
@@ -14250,7 +14744,7 @@
       </p:sp>
       <p:sp>
         <p:nvSpPr>
-          <p:cNvPr id="36" name="Text 34"/>
+          <p:cNvPr id="39" name="Text 37"/>
           <p:cNvSpPr/>
           <p:nvPr/>
         </p:nvSpPr>
@@ -14482,7 +14976,7 @@
                 <a:ea typeface="Calibri" pitchFamily="34" charset="-122"/>
                 <a:cs typeface="Calibri" pitchFamily="34" charset="-120"/>
               </a:rPr>
-              <a:t>Root 'reject' — throw back, refuse to accept</a:t>
+              <a:t>Root 'reject' — throw back, refuse, push away</a:t>
             </a:r>
             <a:endParaRPr lang="en-US" sz="1600" dirty="0"/>
           </a:p>
@@ -14838,7 +15332,7 @@
                 <a:ea typeface="Calibri" pitchFamily="34" charset="-122"/>
                 <a:cs typeface="Calibri" pitchFamily="34" charset="-120"/>
               </a:rPr>
-              <a:t>Word Labs  •  wordlabs.app  •  Root: 'reject' = throw back, refuse to accept</a:t>
+              <a:t>Word Labs  •  wordlabs.app  •  Root: 'reject' = throw back, refuse, push away</a:t>
             </a:r>
             <a:endParaRPr lang="en-US" sz="800" dirty="0"/>
           </a:p>
@@ -15057,7 +15551,7 @@
         </p:nvSpPr>
         <p:spPr>
           <a:xfrm>
-            <a:off x="2938272" y="2258568"/>
+            <a:off x="2221992" y="2258568"/>
             <a:ext cx="1828800" cy="292608"/>
           </a:xfrm>
           <a:prstGeom prst="rect">
@@ -15066,11 +15560,11 @@
             </a:avLst>
           </a:prstGeom>
           <a:solidFill>
-            <a:srgbClr val="CCFBF1"/>
+            <a:srgbClr val="DDD6FE"/>
           </a:solidFill>
           <a:ln w="19050">
             <a:solidFill>
-              <a:srgbClr val="0D9488"/>
+              <a:srgbClr val="7C3AED"/>
             </a:solidFill>
             <a:prstDash val="solid"/>
           </a:ln>
@@ -15091,7 +15585,7 @@
         </p:nvSpPr>
         <p:spPr>
           <a:xfrm>
-            <a:off x="2938272" y="2258568"/>
+            <a:off x="2221992" y="2258568"/>
             <a:ext cx="1828800" cy="292608"/>
           </a:xfrm>
           <a:prstGeom prst="rect">
@@ -15110,13 +15604,13 @@
             <a:r>
               <a:rPr lang="en-US" sz="1300" b="1" dirty="0">
                 <a:solidFill>
-                  <a:srgbClr val="0F766E"/>
+                  <a:srgbClr val="4C1D95"/>
                 </a:solidFill>
                 <a:latin typeface="Trebuchet MS" pitchFamily="34" charset="0"/>
                 <a:ea typeface="Trebuchet MS" pitchFamily="34" charset="-122"/>
                 <a:cs typeface="Trebuchet MS" pitchFamily="34" charset="-120"/>
               </a:rPr>
-              <a:t>reject</a:t>
+              <a:t>re</a:t>
             </a:r>
             <a:endParaRPr lang="en-US" sz="1300" dirty="0"/>
           </a:p>
@@ -15130,7 +15624,7 @@
         </p:nvSpPr>
         <p:spPr>
           <a:xfrm>
-            <a:off x="2938272" y="2569464"/>
+            <a:off x="2221992" y="2569464"/>
             <a:ext cx="1828800" cy="201168"/>
           </a:xfrm>
           <a:prstGeom prst="rect">
@@ -15155,7 +15649,7 @@
                 <a:ea typeface="Calibri" pitchFamily="34" charset="-122"/>
                 <a:cs typeface="Calibri" pitchFamily="34" charset="-120"/>
               </a:rPr>
-              <a:t>to throw back or refuse</a:t>
+              <a:t>back</a:t>
             </a:r>
             <a:endParaRPr lang="en-US" sz="850" dirty="0"/>
           </a:p>
@@ -15169,7 +15663,7 @@
         </p:nvSpPr>
         <p:spPr>
           <a:xfrm>
-            <a:off x="5803392" y="2258568"/>
+            <a:off x="4370832" y="2258568"/>
             <a:ext cx="1828800" cy="292608"/>
           </a:xfrm>
           <a:prstGeom prst="rect">
@@ -15203,7 +15697,7 @@
         </p:nvSpPr>
         <p:spPr>
           <a:xfrm>
-            <a:off x="5803392" y="2258568"/>
+            <a:off x="4370832" y="2258568"/>
             <a:ext cx="1828800" cy="292608"/>
           </a:xfrm>
           <a:prstGeom prst="rect">
@@ -15228,7 +15722,7 @@
                 <a:ea typeface="Trebuchet MS" pitchFamily="34" charset="-122"/>
                 <a:cs typeface="Trebuchet MS" pitchFamily="34" charset="-120"/>
               </a:rPr>
-              <a:t>ed</a:t>
+              <a:t>ject</a:t>
             </a:r>
             <a:endParaRPr lang="en-US" sz="1300" dirty="0"/>
           </a:p>
@@ -15242,7 +15736,7 @@
         </p:nvSpPr>
         <p:spPr>
           <a:xfrm>
-            <a:off x="5803392" y="2569464"/>
+            <a:off x="4370832" y="2569464"/>
             <a:ext cx="1828800" cy="201168"/>
           </a:xfrm>
           <a:prstGeom prst="rect">
@@ -15267,7 +15761,7 @@
                 <a:ea typeface="Calibri" pitchFamily="34" charset="-122"/>
                 <a:cs typeface="Calibri" pitchFamily="34" charset="-120"/>
               </a:rPr>
-              <a:t>happened in the past</a:t>
+              <a:t>throw</a:t>
             </a:r>
             <a:endParaRPr lang="en-US" sz="850" dirty="0"/>
           </a:p>
@@ -15276,6 +15770,118 @@
       <p:sp>
         <p:nvSpPr>
           <p:cNvPr id="22" name="Shape 20"/>
+          <p:cNvSpPr/>
+          <p:nvPr/>
+        </p:nvSpPr>
+        <p:spPr>
+          <a:xfrm>
+            <a:off x="6519672" y="2258568"/>
+            <a:ext cx="1828800" cy="292608"/>
+          </a:xfrm>
+          <a:prstGeom prst="rect">
+            <a:avLst>
+              <a:gd name="adj" fmla="val 25000"/>
+            </a:avLst>
+          </a:prstGeom>
+          <a:solidFill>
+            <a:srgbClr val="FCE7F3"/>
+          </a:solidFill>
+          <a:ln w="19050">
+            <a:solidFill>
+              <a:srgbClr val="DB2777"/>
+            </a:solidFill>
+            <a:prstDash val="solid"/>
+          </a:ln>
+          <a:effectLst>
+            <a:outerShdw sx="100000" sy="100000" kx="0" ky="0" algn="bl" rotWithShape="0" blurRad="101600" dist="38100" dir="8100000">
+              <a:srgbClr val="000000">
+                <a:alpha val="12000"/>
+              </a:srgbClr>
+            </a:outerShdw>
+          </a:effectLst>
+        </p:spPr>
+      </p:sp>
+      <p:sp>
+        <p:nvSpPr>
+          <p:cNvPr id="23" name="Text 21"/>
+          <p:cNvSpPr/>
+          <p:nvPr/>
+        </p:nvSpPr>
+        <p:spPr>
+          <a:xfrm>
+            <a:off x="6519672" y="2258568"/>
+            <a:ext cx="1828800" cy="292608"/>
+          </a:xfrm>
+          <a:prstGeom prst="rect">
+            <a:avLst/>
+          </a:prstGeom>
+          <a:noFill/>
+          <a:ln/>
+        </p:spPr>
+        <p:txBody>
+          <a:bodyPr wrap="square" lIns="0" tIns="0" rIns="0" bIns="0" rtlCol="0" anchor="ctr"/>
+          <a:lstStyle/>
+          <a:p>
+            <a:pPr algn="ctr" indent="0" marL="0">
+              <a:buNone/>
+            </a:pPr>
+            <a:r>
+              <a:rPr lang="en-US" sz="1300" b="1" dirty="0">
+                <a:solidFill>
+                  <a:srgbClr val="9D174D"/>
+                </a:solidFill>
+                <a:latin typeface="Trebuchet MS" pitchFamily="34" charset="0"/>
+                <a:ea typeface="Trebuchet MS" pitchFamily="34" charset="-122"/>
+                <a:cs typeface="Trebuchet MS" pitchFamily="34" charset="-120"/>
+              </a:rPr>
+              <a:t>ed</a:t>
+            </a:r>
+            <a:endParaRPr lang="en-US" sz="1300" dirty="0"/>
+          </a:p>
+        </p:txBody>
+      </p:sp>
+      <p:sp>
+        <p:nvSpPr>
+          <p:cNvPr id="24" name="Text 22"/>
+          <p:cNvSpPr/>
+          <p:nvPr/>
+        </p:nvSpPr>
+        <p:spPr>
+          <a:xfrm>
+            <a:off x="6519672" y="2569464"/>
+            <a:ext cx="1828800" cy="201168"/>
+          </a:xfrm>
+          <a:prstGeom prst="rect">
+            <a:avLst/>
+          </a:prstGeom>
+          <a:noFill/>
+          <a:ln/>
+        </p:spPr>
+        <p:txBody>
+          <a:bodyPr wrap="square" lIns="0" tIns="0" rIns="0" bIns="0" rtlCol="0" anchor="t"/>
+          <a:lstStyle/>
+          <a:p>
+            <a:pPr algn="ctr" indent="0" marL="0">
+              <a:buNone/>
+            </a:pPr>
+            <a:r>
+              <a:rPr lang="en-US" sz="850" dirty="0">
+                <a:solidFill>
+                  <a:srgbClr val="475569"/>
+                </a:solidFill>
+                <a:latin typeface="Calibri" pitchFamily="34" charset="0"/>
+                <a:ea typeface="Calibri" pitchFamily="34" charset="-122"/>
+                <a:cs typeface="Calibri" pitchFamily="34" charset="-120"/>
+              </a:rPr>
+              <a:t>past tense</a:t>
+            </a:r>
+            <a:endParaRPr lang="en-US" sz="850" dirty="0"/>
+          </a:p>
+        </p:txBody>
+      </p:sp>
+      <p:sp>
+        <p:nvSpPr>
+          <p:cNvPr id="25" name="Shape 23"/>
           <p:cNvSpPr/>
           <p:nvPr/>
         </p:nvSpPr>
@@ -15302,7 +15908,7 @@
       </p:sp>
       <p:sp>
         <p:nvSpPr>
-          <p:cNvPr id="23" name="Text 21"/>
+          <p:cNvPr id="26" name="Text 24"/>
           <p:cNvSpPr/>
           <p:nvPr/>
         </p:nvSpPr>
@@ -15341,7 +15947,7 @@
       </p:sp>
       <p:sp>
         <p:nvSpPr>
-          <p:cNvPr id="24" name="Shape 22"/>
+          <p:cNvPr id="27" name="Shape 25"/>
           <p:cNvSpPr/>
           <p:nvPr/>
         </p:nvSpPr>
@@ -15368,7 +15974,7 @@
       </p:sp>
       <p:sp>
         <p:nvSpPr>
-          <p:cNvPr id="25" name="Shape 23"/>
+          <p:cNvPr id="28" name="Shape 26"/>
           <p:cNvSpPr/>
           <p:nvPr/>
         </p:nvSpPr>
@@ -15395,7 +16001,7 @@
       </p:sp>
       <p:sp>
         <p:nvSpPr>
-          <p:cNvPr id="26" name="Text 24"/>
+          <p:cNvPr id="29" name="Text 27"/>
           <p:cNvSpPr/>
           <p:nvPr/>
         </p:nvSpPr>
@@ -15434,7 +16040,7 @@
       </p:sp>
       <p:sp>
         <p:nvSpPr>
-          <p:cNvPr id="27" name="Text 25"/>
+          <p:cNvPr id="30" name="Text 28"/>
           <p:cNvSpPr/>
           <p:nvPr/>
         </p:nvSpPr>
@@ -15473,7 +16079,7 @@
       </p:sp>
       <p:sp>
         <p:nvSpPr>
-          <p:cNvPr id="28" name="Shape 26"/>
+          <p:cNvPr id="31" name="Shape 29"/>
           <p:cNvSpPr/>
           <p:nvPr/>
         </p:nvSpPr>
@@ -15500,7 +16106,7 @@
       </p:sp>
       <p:sp>
         <p:nvSpPr>
-          <p:cNvPr id="29" name="Text 27"/>
+          <p:cNvPr id="32" name="Text 30"/>
           <p:cNvSpPr/>
           <p:nvPr/>
         </p:nvSpPr>
@@ -15531,7 +16137,7 @@
                 <a:ea typeface="Trebuchet MS" pitchFamily="34" charset="-122"/>
                 <a:cs typeface="Trebuchet MS" pitchFamily="34" charset="-120"/>
               </a:rPr>
-              <a:t>jec</a:t>
+              <a:t>ject</a:t>
             </a:r>
             <a:endParaRPr lang="en-US" sz="1400" dirty="0"/>
           </a:p>
@@ -15539,7 +16145,7 @@
       </p:sp>
       <p:sp>
         <p:nvSpPr>
-          <p:cNvPr id="30" name="Text 28"/>
+          <p:cNvPr id="33" name="Text 31"/>
           <p:cNvSpPr/>
           <p:nvPr/>
         </p:nvSpPr>
@@ -15578,7 +16184,7 @@
       </p:sp>
       <p:sp>
         <p:nvSpPr>
-          <p:cNvPr id="31" name="Shape 29"/>
+          <p:cNvPr id="34" name="Shape 32"/>
           <p:cNvSpPr/>
           <p:nvPr/>
         </p:nvSpPr>
@@ -15605,7 +16211,7 @@
       </p:sp>
       <p:sp>
         <p:nvSpPr>
-          <p:cNvPr id="32" name="Text 30"/>
+          <p:cNvPr id="35" name="Text 33"/>
           <p:cNvSpPr/>
           <p:nvPr/>
         </p:nvSpPr>
@@ -15636,7 +16242,7 @@
                 <a:ea typeface="Trebuchet MS" pitchFamily="34" charset="-122"/>
                 <a:cs typeface="Trebuchet MS" pitchFamily="34" charset="-120"/>
               </a:rPr>
-              <a:t>ted</a:t>
+              <a:t>ed</a:t>
             </a:r>
             <a:endParaRPr lang="en-US" sz="1400" dirty="0"/>
           </a:p>
@@ -15644,7 +16250,7 @@
       </p:sp>
       <p:sp>
         <p:nvSpPr>
-          <p:cNvPr id="33" name="Shape 31"/>
+          <p:cNvPr id="36" name="Shape 34"/>
           <p:cNvSpPr/>
           <p:nvPr/>
         </p:nvSpPr>
@@ -15671,7 +16277,7 @@
       </p:sp>
       <p:sp>
         <p:nvSpPr>
-          <p:cNvPr id="34" name="Text 32"/>
+          <p:cNvPr id="37" name="Text 35"/>
           <p:cNvSpPr/>
           <p:nvPr/>
         </p:nvSpPr>
@@ -15710,7 +16316,7 @@
       </p:sp>
       <p:sp>
         <p:nvSpPr>
-          <p:cNvPr id="35" name="Shape 33"/>
+          <p:cNvPr id="38" name="Shape 36"/>
           <p:cNvSpPr/>
           <p:nvPr/>
         </p:nvSpPr>
@@ -15737,13 +16343,13 @@
       </p:sp>
       <p:sp>
         <p:nvSpPr>
-          <p:cNvPr id="36" name="Shape 34"/>
-          <p:cNvSpPr/>
-          <p:nvPr/>
-        </p:nvSpPr>
-        <p:spPr>
-          <a:xfrm>
-            <a:off x="2023872" y="4169664"/>
+          <p:cNvPr id="39" name="Shape 37"/>
+          <p:cNvSpPr/>
+          <p:nvPr/>
+        </p:nvSpPr>
+        <p:spPr>
+          <a:xfrm>
+            <a:off x="2124837" y="4169664"/>
             <a:ext cx="685800" cy="384048"/>
           </a:xfrm>
           <a:prstGeom prst="rect">
@@ -15764,13 +16370,13 @@
       </p:sp>
       <p:sp>
         <p:nvSpPr>
-          <p:cNvPr id="37" name="Text 35"/>
-          <p:cNvSpPr/>
-          <p:nvPr/>
-        </p:nvSpPr>
-        <p:spPr>
-          <a:xfrm>
-            <a:off x="2023872" y="4169664"/>
+          <p:cNvPr id="40" name="Text 38"/>
+          <p:cNvSpPr/>
+          <p:nvPr/>
+        </p:nvSpPr>
+        <p:spPr>
+          <a:xfrm>
+            <a:off x="2124837" y="4169664"/>
             <a:ext cx="685800" cy="384048"/>
           </a:xfrm>
           <a:prstGeom prst="rect">
@@ -15803,13 +16409,13 @@
       </p:sp>
       <p:sp>
         <p:nvSpPr>
-          <p:cNvPr id="38" name="Shape 36"/>
-          <p:cNvSpPr/>
-          <p:nvPr/>
-        </p:nvSpPr>
-        <p:spPr>
-          <a:xfrm>
-            <a:off x="2831592" y="4169664"/>
+          <p:cNvPr id="41" name="Shape 39"/>
+          <p:cNvSpPr/>
+          <p:nvPr/>
+        </p:nvSpPr>
+        <p:spPr>
+          <a:xfrm>
+            <a:off x="3033522" y="4169664"/>
             <a:ext cx="685800" cy="384048"/>
           </a:xfrm>
           <a:prstGeom prst="rect">
@@ -15830,13 +16436,13 @@
       </p:sp>
       <p:sp>
         <p:nvSpPr>
-          <p:cNvPr id="39" name="Text 37"/>
-          <p:cNvSpPr/>
-          <p:nvPr/>
-        </p:nvSpPr>
-        <p:spPr>
-          <a:xfrm>
-            <a:off x="2831592" y="4169664"/>
+          <p:cNvPr id="42" name="Text 40"/>
+          <p:cNvSpPr/>
+          <p:nvPr/>
+        </p:nvSpPr>
+        <p:spPr>
+          <a:xfrm>
+            <a:off x="3033522" y="4169664"/>
             <a:ext cx="685800" cy="384048"/>
           </a:xfrm>
           <a:prstGeom prst="rect">
@@ -15869,13 +16475,13 @@
       </p:sp>
       <p:sp>
         <p:nvSpPr>
-          <p:cNvPr id="40" name="Shape 38"/>
-          <p:cNvSpPr/>
-          <p:nvPr/>
-        </p:nvSpPr>
-        <p:spPr>
-          <a:xfrm>
-            <a:off x="3639312" y="4169664"/>
+          <p:cNvPr id="43" name="Shape 41"/>
+          <p:cNvSpPr/>
+          <p:nvPr/>
+        </p:nvSpPr>
+        <p:spPr>
+          <a:xfrm>
+            <a:off x="3942207" y="4169664"/>
             <a:ext cx="685800" cy="384048"/>
           </a:xfrm>
           <a:prstGeom prst="rect">
@@ -15896,13 +16502,13 @@
       </p:sp>
       <p:sp>
         <p:nvSpPr>
-          <p:cNvPr id="41" name="Text 39"/>
-          <p:cNvSpPr/>
-          <p:nvPr/>
-        </p:nvSpPr>
-        <p:spPr>
-          <a:xfrm>
-            <a:off x="3639312" y="4169664"/>
+          <p:cNvPr id="44" name="Text 42"/>
+          <p:cNvSpPr/>
+          <p:nvPr/>
+        </p:nvSpPr>
+        <p:spPr>
+          <a:xfrm>
+            <a:off x="3942207" y="4169664"/>
             <a:ext cx="685800" cy="384048"/>
           </a:xfrm>
           <a:prstGeom prst="rect">
@@ -15935,13 +16541,13 @@
       </p:sp>
       <p:sp>
         <p:nvSpPr>
-          <p:cNvPr id="42" name="Shape 40"/>
-          <p:cNvSpPr/>
-          <p:nvPr/>
-        </p:nvSpPr>
-        <p:spPr>
-          <a:xfrm>
-            <a:off x="4447032" y="4169664"/>
+          <p:cNvPr id="45" name="Shape 43"/>
+          <p:cNvSpPr/>
+          <p:nvPr/>
+        </p:nvSpPr>
+        <p:spPr>
+          <a:xfrm>
+            <a:off x="4850892" y="4169664"/>
             <a:ext cx="685800" cy="384048"/>
           </a:xfrm>
           <a:prstGeom prst="rect">
@@ -15962,13 +16568,13 @@
       </p:sp>
       <p:sp>
         <p:nvSpPr>
-          <p:cNvPr id="43" name="Text 41"/>
-          <p:cNvSpPr/>
-          <p:nvPr/>
-        </p:nvSpPr>
-        <p:spPr>
-          <a:xfrm>
-            <a:off x="4447032" y="4169664"/>
+          <p:cNvPr id="46" name="Text 44"/>
+          <p:cNvSpPr/>
+          <p:nvPr/>
+        </p:nvSpPr>
+        <p:spPr>
+          <a:xfrm>
+            <a:off x="4850892" y="4169664"/>
             <a:ext cx="685800" cy="384048"/>
           </a:xfrm>
           <a:prstGeom prst="rect">
@@ -16001,13 +16607,13 @@
       </p:sp>
       <p:sp>
         <p:nvSpPr>
-          <p:cNvPr id="44" name="Shape 42"/>
-          <p:cNvSpPr/>
-          <p:nvPr/>
-        </p:nvSpPr>
-        <p:spPr>
-          <a:xfrm>
-            <a:off x="5254752" y="4169664"/>
+          <p:cNvPr id="47" name="Shape 45"/>
+          <p:cNvSpPr/>
+          <p:nvPr/>
+        </p:nvSpPr>
+        <p:spPr>
+          <a:xfrm>
+            <a:off x="5759577" y="4169664"/>
             <a:ext cx="685800" cy="384048"/>
           </a:xfrm>
           <a:prstGeom prst="rect">
@@ -16028,13 +16634,13 @@
       </p:sp>
       <p:sp>
         <p:nvSpPr>
-          <p:cNvPr id="45" name="Text 43"/>
-          <p:cNvSpPr/>
-          <p:nvPr/>
-        </p:nvSpPr>
-        <p:spPr>
-          <a:xfrm>
-            <a:off x="5254752" y="4169664"/>
+          <p:cNvPr id="48" name="Text 46"/>
+          <p:cNvSpPr/>
+          <p:nvPr/>
+        </p:nvSpPr>
+        <p:spPr>
+          <a:xfrm>
+            <a:off x="5759577" y="4169664"/>
             <a:ext cx="685800" cy="384048"/>
           </a:xfrm>
           <a:prstGeom prst="rect">
@@ -16067,13 +16673,13 @@
       </p:sp>
       <p:sp>
         <p:nvSpPr>
-          <p:cNvPr id="46" name="Text 44"/>
-          <p:cNvSpPr/>
-          <p:nvPr/>
-        </p:nvSpPr>
-        <p:spPr>
-          <a:xfrm>
-            <a:off x="5254752" y="4572000"/>
+          <p:cNvPr id="49" name="Text 47"/>
+          <p:cNvSpPr/>
+          <p:nvPr/>
+        </p:nvSpPr>
+        <p:spPr>
+          <a:xfrm>
+            <a:off x="5759577" y="4572000"/>
             <a:ext cx="685800" cy="219456"/>
           </a:xfrm>
           <a:prstGeom prst="rect">
@@ -16106,13 +16712,13 @@
       </p:sp>
       <p:sp>
         <p:nvSpPr>
-          <p:cNvPr id="47" name="Shape 45"/>
-          <p:cNvSpPr/>
-          <p:nvPr/>
-        </p:nvSpPr>
-        <p:spPr>
-          <a:xfrm>
-            <a:off x="6062472" y="4169664"/>
+          <p:cNvPr id="50" name="Shape 48"/>
+          <p:cNvSpPr/>
+          <p:nvPr/>
+        </p:nvSpPr>
+        <p:spPr>
+          <a:xfrm>
+            <a:off x="6668262" y="4169664"/>
             <a:ext cx="685800" cy="384048"/>
           </a:xfrm>
           <a:prstGeom prst="rect">
@@ -16133,13 +16739,13 @@
       </p:sp>
       <p:sp>
         <p:nvSpPr>
-          <p:cNvPr id="48" name="Text 46"/>
-          <p:cNvSpPr/>
-          <p:nvPr/>
-        </p:nvSpPr>
-        <p:spPr>
-          <a:xfrm>
-            <a:off x="6062472" y="4169664"/>
+          <p:cNvPr id="51" name="Text 49"/>
+          <p:cNvSpPr/>
+          <p:nvPr/>
+        </p:nvSpPr>
+        <p:spPr>
+          <a:xfrm>
+            <a:off x="6668262" y="4169664"/>
             <a:ext cx="685800" cy="384048"/>
           </a:xfrm>
           <a:prstGeom prst="rect">
@@ -16172,13 +16778,13 @@
       </p:sp>
       <p:sp>
         <p:nvSpPr>
-          <p:cNvPr id="49" name="Shape 47"/>
-          <p:cNvSpPr/>
-          <p:nvPr/>
-        </p:nvSpPr>
-        <p:spPr>
-          <a:xfrm>
-            <a:off x="6870192" y="4169664"/>
+          <p:cNvPr id="52" name="Shape 50"/>
+          <p:cNvSpPr/>
+          <p:nvPr/>
+        </p:nvSpPr>
+        <p:spPr>
+          <a:xfrm>
+            <a:off x="7576947" y="4169664"/>
             <a:ext cx="685800" cy="384048"/>
           </a:xfrm>
           <a:prstGeom prst="rect">
@@ -16199,13 +16805,13 @@
       </p:sp>
       <p:sp>
         <p:nvSpPr>
-          <p:cNvPr id="50" name="Text 48"/>
-          <p:cNvSpPr/>
-          <p:nvPr/>
-        </p:nvSpPr>
-        <p:spPr>
-          <a:xfrm>
-            <a:off x="6870192" y="4169664"/>
+          <p:cNvPr id="53" name="Text 51"/>
+          <p:cNvSpPr/>
+          <p:nvPr/>
+        </p:nvSpPr>
+        <p:spPr>
+          <a:xfrm>
+            <a:off x="7576947" y="4169664"/>
             <a:ext cx="685800" cy="384048"/>
           </a:xfrm>
           <a:prstGeom prst="rect">
@@ -16230,73 +16836,7 @@
                 <a:ea typeface="Trebuchet MS" pitchFamily="34" charset="-122"/>
                 <a:cs typeface="Trebuchet MS" pitchFamily="34" charset="-120"/>
               </a:rPr>
-              <a:t>e</a:t>
-            </a:r>
-            <a:endParaRPr lang="en-US" sz="900" dirty="0"/>
-          </a:p>
-        </p:txBody>
-      </p:sp>
-      <p:sp>
-        <p:nvSpPr>
-          <p:cNvPr id="51" name="Shape 49"/>
-          <p:cNvSpPr/>
-          <p:nvPr/>
-        </p:nvSpPr>
-        <p:spPr>
-          <a:xfrm>
-            <a:off x="7677912" y="4169664"/>
-            <a:ext cx="685800" cy="384048"/>
-          </a:xfrm>
-          <a:prstGeom prst="rect">
-            <a:avLst>
-              <a:gd name="adj" fmla="val 9524"/>
-            </a:avLst>
-          </a:prstGeom>
-          <a:solidFill>
-            <a:srgbClr val="FFFFFF"/>
-          </a:solidFill>
-          <a:ln w="12700">
-            <a:solidFill>
-              <a:srgbClr val="DB2777"/>
-            </a:solidFill>
-            <a:prstDash val="solid"/>
-          </a:ln>
-        </p:spPr>
-      </p:sp>
-      <p:sp>
-        <p:nvSpPr>
-          <p:cNvPr id="52" name="Text 50"/>
-          <p:cNvSpPr/>
-          <p:nvPr/>
-        </p:nvSpPr>
-        <p:spPr>
-          <a:xfrm>
-            <a:off x="7677912" y="4169664"/>
-            <a:ext cx="685800" cy="384048"/>
-          </a:xfrm>
-          <a:prstGeom prst="rect">
-            <a:avLst/>
-          </a:prstGeom>
-          <a:noFill/>
-          <a:ln/>
-        </p:spPr>
-        <p:txBody>
-          <a:bodyPr wrap="square" lIns="0" tIns="0" rIns="0" bIns="0" rtlCol="0" anchor="ctr"/>
-          <a:lstStyle/>
-          <a:p>
-            <a:pPr algn="ctr" indent="0" marL="0">
-              <a:buNone/>
-            </a:pPr>
-            <a:r>
-              <a:rPr lang="en-US" sz="900" b="1" dirty="0">
-                <a:solidFill>
-                  <a:srgbClr val="9D174D"/>
-                </a:solidFill>
-                <a:latin typeface="Trebuchet MS" pitchFamily="34" charset="0"/>
-                <a:ea typeface="Trebuchet MS" pitchFamily="34" charset="-122"/>
-                <a:cs typeface="Trebuchet MS" pitchFamily="34" charset="-120"/>
-              </a:rPr>
-              <a:t>d</a:t>
+              <a:t>ed</a:t>
             </a:r>
             <a:endParaRPr lang="en-US" sz="900" dirty="0"/>
           </a:p>
@@ -16870,7 +17410,7 @@
                 <a:ea typeface="Calibri" pitchFamily="34" charset="-122"/>
                 <a:cs typeface="Calibri" pitchFamily="34" charset="-120"/>
               </a:rPr>
-              <a:t>Word Labs  •  wordlabs.app  •  Root: 'reject' = throw back, refuse to accept</a:t>
+              <a:t>Word Labs  •  wordlabs.app  •  Root: 'reject' = throw back, refuse, push away</a:t>
             </a:r>
             <a:endParaRPr lang="en-US" sz="800" dirty="0"/>
           </a:p>
@@ -17510,7 +18050,7 @@
                 <a:ea typeface="Calibri" pitchFamily="34" charset="-122"/>
                 <a:cs typeface="Calibri" pitchFamily="34" charset="-120"/>
               </a:rPr>
-              <a:t>Word Labs  •  wordlabs.app  •  Root: 'reject' = throw back, refuse to accept</a:t>
+              <a:t>Word Labs  •  wordlabs.app  •  Root: 'reject' = throw back, refuse, push away</a:t>
             </a:r>
             <a:endParaRPr lang="en-US" sz="800" dirty="0"/>
           </a:p>
@@ -17622,7 +18162,7 @@
                 <a:ea typeface="Calibri" pitchFamily="34" charset="-122"/>
                 <a:cs typeface="Calibri" pitchFamily="34" charset="-120"/>
               </a:rPr>
-              <a:t>After the </a:t>
+              <a:t>The scientist was </a:t>
             </a:r>
             <a:pPr algn="l" indent="0" marL="0">
               <a:buNone/>
@@ -17639,7 +18179,7 @@
                 <a:ea typeface="Calibri" pitchFamily="34" charset="-122"/>
                 <a:cs typeface="Calibri" pitchFamily="34" charset="-120"/>
               </a:rPr>
-              <a:t>rejection</a:t>
+              <a:t>rejecting</a:t>
             </a:r>
             <a:pPr algn="l" indent="0" marL="0">
               <a:buNone/>
@@ -17653,7 +18193,7 @@
                 <a:ea typeface="Calibri" pitchFamily="34" charset="-122"/>
                 <a:cs typeface="Calibri" pitchFamily="34" charset="-120"/>
               </a:rPr>
-              <a:t> of her artwork, she kept </a:t>
+              <a:t> the faulty samples, and her </a:t>
             </a:r>
             <a:pPr algn="l" indent="0" marL="0">
               <a:buNone/>
@@ -17670,7 +18210,7 @@
                 <a:ea typeface="Calibri" pitchFamily="34" charset="-122"/>
                 <a:cs typeface="Calibri" pitchFamily="34" charset="-120"/>
               </a:rPr>
-              <a:t>rejecting</a:t>
+              <a:t>rejections</a:t>
             </a:r>
             <a:pPr algn="l" indent="0" marL="0">
               <a:buNone/>
@@ -17684,7 +18224,7 @@
                 <a:ea typeface="Calibri" pitchFamily="34" charset="-122"/>
                 <a:cs typeface="Calibri" pitchFamily="34" charset="-120"/>
               </a:rPr>
-              <a:t> doubt, and proudly showed her </a:t>
+              <a:t> were carefully recorded, making the process feel like a </a:t>
             </a:r>
             <a:pPr algn="l" indent="0" marL="0">
               <a:buNone/>
@@ -17701,7 +18241,7 @@
                 <a:ea typeface="Calibri" pitchFamily="34" charset="-122"/>
                 <a:cs typeface="Calibri" pitchFamily="34" charset="-120"/>
               </a:rPr>
-              <a:t>rejects</a:t>
+              <a:t>reject</a:t>
             </a:r>
             <a:pPr algn="l" indent="0" marL="0">
               <a:buNone/>
@@ -17715,7 +18255,7 @@
                 <a:ea typeface="Calibri" pitchFamily="34" charset="-122"/>
                 <a:cs typeface="Calibri" pitchFamily="34" charset="-120"/>
               </a:rPr>
-              <a:t> to the class!</a:t>
+              <a:t> pile was forming.</a:t>
             </a:r>
             <a:endParaRPr lang="en-US" sz="1800" dirty="0"/>
           </a:p>
@@ -17870,7 +18410,7 @@
                 <a:ea typeface="Trebuchet MS" pitchFamily="34" charset="-122"/>
                 <a:cs typeface="Trebuchet MS" pitchFamily="34" charset="-120"/>
               </a:rPr>
-              <a:t>rejection</a:t>
+              <a:t>rejecting</a:t>
             </a:r>
             <a:endParaRPr lang="en-US" sz="1400" dirty="0"/>
           </a:p>
@@ -17998,7 +18538,7 @@
                 <a:ea typeface="Trebuchet MS" pitchFamily="34" charset="-122"/>
                 <a:cs typeface="Trebuchet MS" pitchFamily="34" charset="-120"/>
               </a:rPr>
-              <a:t>rejecting</a:t>
+              <a:t>rejections</a:t>
             </a:r>
             <a:endParaRPr lang="en-US" sz="1400" dirty="0"/>
           </a:p>
@@ -18126,7 +18666,7 @@
                 <a:ea typeface="Trebuchet MS" pitchFamily="34" charset="-122"/>
                 <a:cs typeface="Trebuchet MS" pitchFamily="34" charset="-120"/>
               </a:rPr>
-              <a:t>rejects</a:t>
+              <a:t>reject</a:t>
             </a:r>
             <a:endParaRPr lang="en-US" sz="1400" dirty="0"/>
           </a:p>
@@ -18457,7 +18997,7 @@
                 <a:ea typeface="Calibri" pitchFamily="34" charset="-122"/>
                 <a:cs typeface="Calibri" pitchFamily="34" charset="-120"/>
               </a:rPr>
-              <a:t>Word Labs  •  wordlabs.app  •  Root: 'reject' = throw back, refuse to accept</a:t>
+              <a:t>Word Labs  •  wordlabs.app  •  Root: 'reject' = throw back, refuse, push away</a:t>
             </a:r>
             <a:endParaRPr lang="en-US" sz="800" dirty="0"/>
           </a:p>
@@ -18596,7 +19136,7 @@
                 <a:ea typeface="Trebuchet MS" pitchFamily="34" charset="-122"/>
                 <a:cs typeface="Trebuchet MS" pitchFamily="34" charset="-120"/>
               </a:rPr>
-              <a:t>rejection</a:t>
+              <a:t>rejecting</a:t>
             </a:r>
             <a:endParaRPr lang="en-US" sz="2800" dirty="0"/>
           </a:p>
@@ -19284,7 +19824,7 @@
                 <a:ea typeface="Calibri" pitchFamily="34" charset="-122"/>
                 <a:cs typeface="Calibri" pitchFamily="34" charset="-120"/>
               </a:rPr>
-              <a:t>Word Labs  •  wordlabs.app  •  Root: 'reject' = throw back, refuse to accept</a:t>
+              <a:t>Word Labs  •  wordlabs.app  •  Root: 'reject' = throw back, refuse, push away</a:t>
             </a:r>
             <a:endParaRPr lang="en-US" sz="800" dirty="0"/>
           </a:p>
@@ -19423,7 +19963,7 @@
                 <a:ea typeface="Trebuchet MS" pitchFamily="34" charset="-122"/>
                 <a:cs typeface="Trebuchet MS" pitchFamily="34" charset="-120"/>
               </a:rPr>
-              <a:t>rejection</a:t>
+              <a:t>rejecting</a:t>
             </a:r>
             <a:endParaRPr lang="en-US" sz="2800" dirty="0"/>
           </a:p>
@@ -19503,7 +20043,7 @@
         </p:nvSpPr>
         <p:spPr>
           <a:xfrm>
-            <a:off x="2938272" y="2258568"/>
+            <a:off x="2221992" y="2258568"/>
             <a:ext cx="1828800" cy="292608"/>
           </a:xfrm>
           <a:prstGeom prst="rect">
@@ -19512,11 +20052,11 @@
             </a:avLst>
           </a:prstGeom>
           <a:solidFill>
-            <a:srgbClr val="CCFBF1"/>
+            <a:srgbClr val="DDD6FE"/>
           </a:solidFill>
           <a:ln w="19050">
             <a:solidFill>
-              <a:srgbClr val="0D9488"/>
+              <a:srgbClr val="7C3AED"/>
             </a:solidFill>
             <a:prstDash val="solid"/>
           </a:ln>
@@ -19537,7 +20077,7 @@
         </p:nvSpPr>
         <p:spPr>
           <a:xfrm>
-            <a:off x="2938272" y="2258568"/>
+            <a:off x="2221992" y="2258568"/>
             <a:ext cx="1828800" cy="292608"/>
           </a:xfrm>
           <a:prstGeom prst="rect">
@@ -19556,13 +20096,13 @@
             <a:r>
               <a:rPr lang="en-US" sz="1300" b="1" dirty="0">
                 <a:solidFill>
-                  <a:srgbClr val="0F766E"/>
+                  <a:srgbClr val="4C1D95"/>
                 </a:solidFill>
                 <a:latin typeface="Trebuchet MS" pitchFamily="34" charset="0"/>
                 <a:ea typeface="Trebuchet MS" pitchFamily="34" charset="-122"/>
                 <a:cs typeface="Trebuchet MS" pitchFamily="34" charset="-120"/>
               </a:rPr>
-              <a:t>reject</a:t>
+              <a:t>re</a:t>
             </a:r>
             <a:endParaRPr lang="en-US" sz="1300" dirty="0"/>
           </a:p>
@@ -19576,7 +20116,7 @@
         </p:nvSpPr>
         <p:spPr>
           <a:xfrm>
-            <a:off x="2938272" y="2569464"/>
+            <a:off x="2221992" y="2569464"/>
             <a:ext cx="1828800" cy="201168"/>
           </a:xfrm>
           <a:prstGeom prst="rect">
@@ -19601,7 +20141,7 @@
                 <a:ea typeface="Calibri" pitchFamily="34" charset="-122"/>
                 <a:cs typeface="Calibri" pitchFamily="34" charset="-120"/>
               </a:rPr>
-              <a:t>to throw back or refuse</a:t>
+              <a:t>back</a:t>
             </a:r>
             <a:endParaRPr lang="en-US" sz="850" dirty="0"/>
           </a:p>
@@ -19615,7 +20155,7 @@
         </p:nvSpPr>
         <p:spPr>
           <a:xfrm>
-            <a:off x="5803392" y="2258568"/>
+            <a:off x="4370832" y="2258568"/>
             <a:ext cx="1828800" cy="292608"/>
           </a:xfrm>
           <a:prstGeom prst="rect">
@@ -19649,7 +20189,7 @@
         </p:nvSpPr>
         <p:spPr>
           <a:xfrm>
-            <a:off x="5803392" y="2258568"/>
+            <a:off x="4370832" y="2258568"/>
             <a:ext cx="1828800" cy="292608"/>
           </a:xfrm>
           <a:prstGeom prst="rect">
@@ -19674,7 +20214,7 @@
                 <a:ea typeface="Trebuchet MS" pitchFamily="34" charset="-122"/>
                 <a:cs typeface="Trebuchet MS" pitchFamily="34" charset="-120"/>
               </a:rPr>
-              <a:t>ion</a:t>
+              <a:t>ject</a:t>
             </a:r>
             <a:endParaRPr lang="en-US" sz="1300" dirty="0"/>
           </a:p>
@@ -19688,7 +20228,7 @@
         </p:nvSpPr>
         <p:spPr>
           <a:xfrm>
-            <a:off x="5803392" y="2569464"/>
+            <a:off x="4370832" y="2569464"/>
             <a:ext cx="1828800" cy="201168"/>
           </a:xfrm>
           <a:prstGeom prst="rect">
@@ -19713,7 +20253,7 @@
                 <a:ea typeface="Calibri" pitchFamily="34" charset="-122"/>
                 <a:cs typeface="Calibri" pitchFamily="34" charset="-120"/>
               </a:rPr>
-              <a:t>act or state of</a:t>
+              <a:t>throw</a:t>
             </a:r>
             <a:endParaRPr lang="en-US" sz="850" dirty="0"/>
           </a:p>
@@ -19722,6 +20262,118 @@
       <p:sp>
         <p:nvSpPr>
           <p:cNvPr id="22" name="Shape 20"/>
+          <p:cNvSpPr/>
+          <p:nvPr/>
+        </p:nvSpPr>
+        <p:spPr>
+          <a:xfrm>
+            <a:off x="6519672" y="2258568"/>
+            <a:ext cx="1828800" cy="292608"/>
+          </a:xfrm>
+          <a:prstGeom prst="rect">
+            <a:avLst>
+              <a:gd name="adj" fmla="val 25000"/>
+            </a:avLst>
+          </a:prstGeom>
+          <a:solidFill>
+            <a:srgbClr val="FCE7F3"/>
+          </a:solidFill>
+          <a:ln w="19050">
+            <a:solidFill>
+              <a:srgbClr val="DB2777"/>
+            </a:solidFill>
+            <a:prstDash val="solid"/>
+          </a:ln>
+          <a:effectLst>
+            <a:outerShdw sx="100000" sy="100000" kx="0" ky="0" algn="bl" rotWithShape="0" blurRad="101600" dist="38100" dir="8100000">
+              <a:srgbClr val="000000">
+                <a:alpha val="12000"/>
+              </a:srgbClr>
+            </a:outerShdw>
+          </a:effectLst>
+        </p:spPr>
+      </p:sp>
+      <p:sp>
+        <p:nvSpPr>
+          <p:cNvPr id="23" name="Text 21"/>
+          <p:cNvSpPr/>
+          <p:nvPr/>
+        </p:nvSpPr>
+        <p:spPr>
+          <a:xfrm>
+            <a:off x="6519672" y="2258568"/>
+            <a:ext cx="1828800" cy="292608"/>
+          </a:xfrm>
+          <a:prstGeom prst="rect">
+            <a:avLst/>
+          </a:prstGeom>
+          <a:noFill/>
+          <a:ln/>
+        </p:spPr>
+        <p:txBody>
+          <a:bodyPr wrap="square" lIns="0" tIns="0" rIns="0" bIns="0" rtlCol="0" anchor="ctr"/>
+          <a:lstStyle/>
+          <a:p>
+            <a:pPr algn="ctr" indent="0" marL="0">
+              <a:buNone/>
+            </a:pPr>
+            <a:r>
+              <a:rPr lang="en-US" sz="1300" b="1" dirty="0">
+                <a:solidFill>
+                  <a:srgbClr val="9D174D"/>
+                </a:solidFill>
+                <a:latin typeface="Trebuchet MS" pitchFamily="34" charset="0"/>
+                <a:ea typeface="Trebuchet MS" pitchFamily="34" charset="-122"/>
+                <a:cs typeface="Trebuchet MS" pitchFamily="34" charset="-120"/>
+              </a:rPr>
+              <a:t>ing</a:t>
+            </a:r>
+            <a:endParaRPr lang="en-US" sz="1300" dirty="0"/>
+          </a:p>
+        </p:txBody>
+      </p:sp>
+      <p:sp>
+        <p:nvSpPr>
+          <p:cNvPr id="24" name="Text 22"/>
+          <p:cNvSpPr/>
+          <p:nvPr/>
+        </p:nvSpPr>
+        <p:spPr>
+          <a:xfrm>
+            <a:off x="6519672" y="2569464"/>
+            <a:ext cx="1828800" cy="201168"/>
+          </a:xfrm>
+          <a:prstGeom prst="rect">
+            <a:avLst/>
+          </a:prstGeom>
+          <a:noFill/>
+          <a:ln/>
+        </p:spPr>
+        <p:txBody>
+          <a:bodyPr wrap="square" lIns="0" tIns="0" rIns="0" bIns="0" rtlCol="0" anchor="t"/>
+          <a:lstStyle/>
+          <a:p>
+            <a:pPr algn="ctr" indent="0" marL="0">
+              <a:buNone/>
+            </a:pPr>
+            <a:r>
+              <a:rPr lang="en-US" sz="850" dirty="0">
+                <a:solidFill>
+                  <a:srgbClr val="475569"/>
+                </a:solidFill>
+                <a:latin typeface="Calibri" pitchFamily="34" charset="0"/>
+                <a:ea typeface="Calibri" pitchFamily="34" charset="-122"/>
+                <a:cs typeface="Calibri" pitchFamily="34" charset="-120"/>
+              </a:rPr>
+              <a:t>happening now</a:t>
+            </a:r>
+            <a:endParaRPr lang="en-US" sz="850" dirty="0"/>
+          </a:p>
+        </p:txBody>
+      </p:sp>
+      <p:sp>
+        <p:nvSpPr>
+          <p:cNvPr id="25" name="Shape 23"/>
           <p:cNvSpPr/>
           <p:nvPr/>
         </p:nvSpPr>
@@ -19748,7 +20400,7 @@
       </p:sp>
       <p:sp>
         <p:nvSpPr>
-          <p:cNvPr id="23" name="Text 21"/>
+          <p:cNvPr id="26" name="Text 24"/>
           <p:cNvSpPr/>
           <p:nvPr/>
         </p:nvSpPr>
@@ -19787,7 +20439,7 @@
       </p:sp>
       <p:sp>
         <p:nvSpPr>
-          <p:cNvPr id="24" name="Shape 22"/>
+          <p:cNvPr id="27" name="Shape 25"/>
           <p:cNvSpPr/>
           <p:nvPr/>
         </p:nvSpPr>
@@ -19814,7 +20466,7 @@
       </p:sp>
       <p:sp>
         <p:nvSpPr>
-          <p:cNvPr id="25" name="Text 23"/>
+          <p:cNvPr id="28" name="Text 26"/>
           <p:cNvSpPr/>
           <p:nvPr/>
         </p:nvSpPr>
@@ -19853,7 +20505,7 @@
       </p:sp>
       <p:sp>
         <p:nvSpPr>
-          <p:cNvPr id="26" name="Shape 24"/>
+          <p:cNvPr id="29" name="Shape 27"/>
           <p:cNvSpPr/>
           <p:nvPr/>
         </p:nvSpPr>
@@ -19880,7 +20532,7 @@
       </p:sp>
       <p:sp>
         <p:nvSpPr>
-          <p:cNvPr id="27" name="Text 25"/>
+          <p:cNvPr id="30" name="Text 28"/>
           <p:cNvSpPr/>
           <p:nvPr/>
         </p:nvSpPr>
@@ -19919,7 +20571,7 @@
       </p:sp>
       <p:sp>
         <p:nvSpPr>
-          <p:cNvPr id="28" name="Shape 26"/>
+          <p:cNvPr id="31" name="Shape 29"/>
           <p:cNvSpPr/>
           <p:nvPr/>
         </p:nvSpPr>
@@ -19946,7 +20598,7 @@
       </p:sp>
       <p:sp>
         <p:nvSpPr>
-          <p:cNvPr id="29" name="Text 27"/>
+          <p:cNvPr id="32" name="Text 30"/>
           <p:cNvSpPr/>
           <p:nvPr/>
         </p:nvSpPr>
@@ -20269,7 +20921,7 @@
                 <a:ea typeface="Calibri" pitchFamily="34" charset="-122"/>
                 <a:cs typeface="Calibri" pitchFamily="34" charset="-120"/>
               </a:rPr>
-              <a:t>Word Labs  •  wordlabs.app  •  Root: 'reject' = throw back, refuse to accept</a:t>
+              <a:t>Word Labs  •  wordlabs.app  •  Root: 'reject' = throw back, refuse, push away</a:t>
             </a:r>
             <a:endParaRPr lang="en-US" sz="800" dirty="0"/>
           </a:p>
@@ -20408,7 +21060,7 @@
                 <a:ea typeface="Trebuchet MS" pitchFamily="34" charset="-122"/>
                 <a:cs typeface="Trebuchet MS" pitchFamily="34" charset="-120"/>
               </a:rPr>
-              <a:t>rejection</a:t>
+              <a:t>rejecting</a:t>
             </a:r>
             <a:endParaRPr lang="en-US" sz="2800" dirty="0"/>
           </a:p>
@@ -20488,7 +21140,7 @@
         </p:nvSpPr>
         <p:spPr>
           <a:xfrm>
-            <a:off x="2938272" y="2258568"/>
+            <a:off x="2221992" y="2258568"/>
             <a:ext cx="1828800" cy="292608"/>
           </a:xfrm>
           <a:prstGeom prst="rect">
@@ -20497,11 +21149,11 @@
             </a:avLst>
           </a:prstGeom>
           <a:solidFill>
-            <a:srgbClr val="CCFBF1"/>
+            <a:srgbClr val="DDD6FE"/>
           </a:solidFill>
           <a:ln w="19050">
             <a:solidFill>
-              <a:srgbClr val="0D9488"/>
+              <a:srgbClr val="7C3AED"/>
             </a:solidFill>
             <a:prstDash val="solid"/>
           </a:ln>
@@ -20522,7 +21174,7 @@
         </p:nvSpPr>
         <p:spPr>
           <a:xfrm>
-            <a:off x="2938272" y="2258568"/>
+            <a:off x="2221992" y="2258568"/>
             <a:ext cx="1828800" cy="292608"/>
           </a:xfrm>
           <a:prstGeom prst="rect">
@@ -20541,13 +21193,13 @@
             <a:r>
               <a:rPr lang="en-US" sz="1300" b="1" dirty="0">
                 <a:solidFill>
-                  <a:srgbClr val="0F766E"/>
+                  <a:srgbClr val="4C1D95"/>
                 </a:solidFill>
                 <a:latin typeface="Trebuchet MS" pitchFamily="34" charset="0"/>
                 <a:ea typeface="Trebuchet MS" pitchFamily="34" charset="-122"/>
                 <a:cs typeface="Trebuchet MS" pitchFamily="34" charset="-120"/>
               </a:rPr>
-              <a:t>reject</a:t>
+              <a:t>re</a:t>
             </a:r>
             <a:endParaRPr lang="en-US" sz="1300" dirty="0"/>
           </a:p>
@@ -20561,7 +21213,7 @@
         </p:nvSpPr>
         <p:spPr>
           <a:xfrm>
-            <a:off x="2938272" y="2569464"/>
+            <a:off x="2221992" y="2569464"/>
             <a:ext cx="1828800" cy="201168"/>
           </a:xfrm>
           <a:prstGeom prst="rect">
@@ -20586,7 +21238,7 @@
                 <a:ea typeface="Calibri" pitchFamily="34" charset="-122"/>
                 <a:cs typeface="Calibri" pitchFamily="34" charset="-120"/>
               </a:rPr>
-              <a:t>to throw back or refuse</a:t>
+              <a:t>back</a:t>
             </a:r>
             <a:endParaRPr lang="en-US" sz="850" dirty="0"/>
           </a:p>
@@ -20600,7 +21252,7 @@
         </p:nvSpPr>
         <p:spPr>
           <a:xfrm>
-            <a:off x="5803392" y="2258568"/>
+            <a:off x="4370832" y="2258568"/>
             <a:ext cx="1828800" cy="292608"/>
           </a:xfrm>
           <a:prstGeom prst="rect">
@@ -20634,7 +21286,7 @@
         </p:nvSpPr>
         <p:spPr>
           <a:xfrm>
-            <a:off x="5803392" y="2258568"/>
+            <a:off x="4370832" y="2258568"/>
             <a:ext cx="1828800" cy="292608"/>
           </a:xfrm>
           <a:prstGeom prst="rect">
@@ -20659,7 +21311,7 @@
                 <a:ea typeface="Trebuchet MS" pitchFamily="34" charset="-122"/>
                 <a:cs typeface="Trebuchet MS" pitchFamily="34" charset="-120"/>
               </a:rPr>
-              <a:t>ion</a:t>
+              <a:t>ject</a:t>
             </a:r>
             <a:endParaRPr lang="en-US" sz="1300" dirty="0"/>
           </a:p>
@@ -20673,7 +21325,7 @@
         </p:nvSpPr>
         <p:spPr>
           <a:xfrm>
-            <a:off x="5803392" y="2569464"/>
+            <a:off x="4370832" y="2569464"/>
             <a:ext cx="1828800" cy="201168"/>
           </a:xfrm>
           <a:prstGeom prst="rect">
@@ -20698,7 +21350,7 @@
                 <a:ea typeface="Calibri" pitchFamily="34" charset="-122"/>
                 <a:cs typeface="Calibri" pitchFamily="34" charset="-120"/>
               </a:rPr>
-              <a:t>act or state of</a:t>
+              <a:t>throw</a:t>
             </a:r>
             <a:endParaRPr lang="en-US" sz="850" dirty="0"/>
           </a:p>
@@ -20707,6 +21359,118 @@
       <p:sp>
         <p:nvSpPr>
           <p:cNvPr id="22" name="Shape 20"/>
+          <p:cNvSpPr/>
+          <p:nvPr/>
+        </p:nvSpPr>
+        <p:spPr>
+          <a:xfrm>
+            <a:off x="6519672" y="2258568"/>
+            <a:ext cx="1828800" cy="292608"/>
+          </a:xfrm>
+          <a:prstGeom prst="rect">
+            <a:avLst>
+              <a:gd name="adj" fmla="val 25000"/>
+            </a:avLst>
+          </a:prstGeom>
+          <a:solidFill>
+            <a:srgbClr val="FCE7F3"/>
+          </a:solidFill>
+          <a:ln w="19050">
+            <a:solidFill>
+              <a:srgbClr val="DB2777"/>
+            </a:solidFill>
+            <a:prstDash val="solid"/>
+          </a:ln>
+          <a:effectLst>
+            <a:outerShdw sx="100000" sy="100000" kx="0" ky="0" algn="bl" rotWithShape="0" blurRad="101600" dist="38100" dir="8100000">
+              <a:srgbClr val="000000">
+                <a:alpha val="12000"/>
+              </a:srgbClr>
+            </a:outerShdw>
+          </a:effectLst>
+        </p:spPr>
+      </p:sp>
+      <p:sp>
+        <p:nvSpPr>
+          <p:cNvPr id="23" name="Text 21"/>
+          <p:cNvSpPr/>
+          <p:nvPr/>
+        </p:nvSpPr>
+        <p:spPr>
+          <a:xfrm>
+            <a:off x="6519672" y="2258568"/>
+            <a:ext cx="1828800" cy="292608"/>
+          </a:xfrm>
+          <a:prstGeom prst="rect">
+            <a:avLst/>
+          </a:prstGeom>
+          <a:noFill/>
+          <a:ln/>
+        </p:spPr>
+        <p:txBody>
+          <a:bodyPr wrap="square" lIns="0" tIns="0" rIns="0" bIns="0" rtlCol="0" anchor="ctr"/>
+          <a:lstStyle/>
+          <a:p>
+            <a:pPr algn="ctr" indent="0" marL="0">
+              <a:buNone/>
+            </a:pPr>
+            <a:r>
+              <a:rPr lang="en-US" sz="1300" b="1" dirty="0">
+                <a:solidFill>
+                  <a:srgbClr val="9D174D"/>
+                </a:solidFill>
+                <a:latin typeface="Trebuchet MS" pitchFamily="34" charset="0"/>
+                <a:ea typeface="Trebuchet MS" pitchFamily="34" charset="-122"/>
+                <a:cs typeface="Trebuchet MS" pitchFamily="34" charset="-120"/>
+              </a:rPr>
+              <a:t>ing</a:t>
+            </a:r>
+            <a:endParaRPr lang="en-US" sz="1300" dirty="0"/>
+          </a:p>
+        </p:txBody>
+      </p:sp>
+      <p:sp>
+        <p:nvSpPr>
+          <p:cNvPr id="24" name="Text 22"/>
+          <p:cNvSpPr/>
+          <p:nvPr/>
+        </p:nvSpPr>
+        <p:spPr>
+          <a:xfrm>
+            <a:off x="6519672" y="2569464"/>
+            <a:ext cx="1828800" cy="201168"/>
+          </a:xfrm>
+          <a:prstGeom prst="rect">
+            <a:avLst/>
+          </a:prstGeom>
+          <a:noFill/>
+          <a:ln/>
+        </p:spPr>
+        <p:txBody>
+          <a:bodyPr wrap="square" lIns="0" tIns="0" rIns="0" bIns="0" rtlCol="0" anchor="t"/>
+          <a:lstStyle/>
+          <a:p>
+            <a:pPr algn="ctr" indent="0" marL="0">
+              <a:buNone/>
+            </a:pPr>
+            <a:r>
+              <a:rPr lang="en-US" sz="850" dirty="0">
+                <a:solidFill>
+                  <a:srgbClr val="475569"/>
+                </a:solidFill>
+                <a:latin typeface="Calibri" pitchFamily="34" charset="0"/>
+                <a:ea typeface="Calibri" pitchFamily="34" charset="-122"/>
+                <a:cs typeface="Calibri" pitchFamily="34" charset="-120"/>
+              </a:rPr>
+              <a:t>happening now</a:t>
+            </a:r>
+            <a:endParaRPr lang="en-US" sz="850" dirty="0"/>
+          </a:p>
+        </p:txBody>
+      </p:sp>
+      <p:sp>
+        <p:nvSpPr>
+          <p:cNvPr id="25" name="Shape 23"/>
           <p:cNvSpPr/>
           <p:nvPr/>
         </p:nvSpPr>
@@ -20733,7 +21497,7 @@
       </p:sp>
       <p:sp>
         <p:nvSpPr>
-          <p:cNvPr id="23" name="Text 21"/>
+          <p:cNvPr id="26" name="Text 24"/>
           <p:cNvSpPr/>
           <p:nvPr/>
         </p:nvSpPr>
@@ -20772,7 +21536,7 @@
       </p:sp>
       <p:sp>
         <p:nvSpPr>
-          <p:cNvPr id="24" name="Shape 22"/>
+          <p:cNvPr id="27" name="Shape 25"/>
           <p:cNvSpPr/>
           <p:nvPr/>
         </p:nvSpPr>
@@ -20799,7 +21563,7 @@
       </p:sp>
       <p:sp>
         <p:nvSpPr>
-          <p:cNvPr id="25" name="Shape 23"/>
+          <p:cNvPr id="28" name="Shape 26"/>
           <p:cNvSpPr/>
           <p:nvPr/>
         </p:nvSpPr>
@@ -20826,7 +21590,7 @@
       </p:sp>
       <p:sp>
         <p:nvSpPr>
-          <p:cNvPr id="26" name="Text 24"/>
+          <p:cNvPr id="29" name="Text 27"/>
           <p:cNvSpPr/>
           <p:nvPr/>
         </p:nvSpPr>
@@ -20865,7 +21629,7 @@
       </p:sp>
       <p:sp>
         <p:nvSpPr>
-          <p:cNvPr id="27" name="Text 25"/>
+          <p:cNvPr id="30" name="Text 28"/>
           <p:cNvSpPr/>
           <p:nvPr/>
         </p:nvSpPr>
@@ -20904,7 +21668,7 @@
       </p:sp>
       <p:sp>
         <p:nvSpPr>
-          <p:cNvPr id="28" name="Shape 26"/>
+          <p:cNvPr id="31" name="Shape 29"/>
           <p:cNvSpPr/>
           <p:nvPr/>
         </p:nvSpPr>
@@ -20931,7 +21695,7 @@
       </p:sp>
       <p:sp>
         <p:nvSpPr>
-          <p:cNvPr id="29" name="Text 27"/>
+          <p:cNvPr id="32" name="Text 30"/>
           <p:cNvSpPr/>
           <p:nvPr/>
         </p:nvSpPr>
@@ -20962,7 +21726,7 @@
                 <a:ea typeface="Trebuchet MS" pitchFamily="34" charset="-122"/>
                 <a:cs typeface="Trebuchet MS" pitchFamily="34" charset="-120"/>
               </a:rPr>
-              <a:t>jec</a:t>
+              <a:t>ject</a:t>
             </a:r>
             <a:endParaRPr lang="en-US" sz="1400" dirty="0"/>
           </a:p>
@@ -20970,7 +21734,7 @@
       </p:sp>
       <p:sp>
         <p:nvSpPr>
-          <p:cNvPr id="30" name="Text 28"/>
+          <p:cNvPr id="33" name="Text 31"/>
           <p:cNvSpPr/>
           <p:nvPr/>
         </p:nvSpPr>
@@ -21009,7 +21773,7 @@
       </p:sp>
       <p:sp>
         <p:nvSpPr>
-          <p:cNvPr id="31" name="Shape 29"/>
+          <p:cNvPr id="34" name="Shape 32"/>
           <p:cNvSpPr/>
           <p:nvPr/>
         </p:nvSpPr>
@@ -21036,7 +21800,7 @@
       </p:sp>
       <p:sp>
         <p:nvSpPr>
-          <p:cNvPr id="32" name="Text 30"/>
+          <p:cNvPr id="35" name="Text 33"/>
           <p:cNvSpPr/>
           <p:nvPr/>
         </p:nvSpPr>
@@ -21067,7 +21831,7 @@
                 <a:ea typeface="Trebuchet MS" pitchFamily="34" charset="-122"/>
                 <a:cs typeface="Trebuchet MS" pitchFamily="34" charset="-120"/>
               </a:rPr>
-              <a:t>tion</a:t>
+              <a:t>ing</a:t>
             </a:r>
             <a:endParaRPr lang="en-US" sz="1400" dirty="0"/>
           </a:p>
@@ -21075,7 +21839,7 @@
       </p:sp>
       <p:sp>
         <p:nvSpPr>
-          <p:cNvPr id="33" name="Shape 31"/>
+          <p:cNvPr id="36" name="Shape 34"/>
           <p:cNvSpPr/>
           <p:nvPr/>
         </p:nvSpPr>
@@ -21102,7 +21866,7 @@
       </p:sp>
       <p:sp>
         <p:nvSpPr>
-          <p:cNvPr id="34" name="Text 32"/>
+          <p:cNvPr id="37" name="Text 35"/>
           <p:cNvSpPr/>
           <p:nvPr/>
         </p:nvSpPr>
@@ -21141,7 +21905,7 @@
       </p:sp>
       <p:sp>
         <p:nvSpPr>
-          <p:cNvPr id="35" name="Shape 33"/>
+          <p:cNvPr id="38" name="Shape 36"/>
           <p:cNvSpPr/>
           <p:nvPr/>
         </p:nvSpPr>
@@ -21168,7 +21932,7 @@
       </p:sp>
       <p:sp>
         <p:nvSpPr>
-          <p:cNvPr id="36" name="Text 34"/>
+          <p:cNvPr id="39" name="Text 37"/>
           <p:cNvSpPr/>
           <p:nvPr/>
         </p:nvSpPr>
@@ -21491,7 +22255,7 @@
                 <a:ea typeface="Calibri" pitchFamily="34" charset="-122"/>
                 <a:cs typeface="Calibri" pitchFamily="34" charset="-120"/>
               </a:rPr>
-              <a:t>Word Labs  •  wordlabs.app  •  Root: 'reject' = throw back, refuse to accept</a:t>
+              <a:t>Word Labs  •  wordlabs.app  •  Root: 'reject' = throw back, refuse, push away</a:t>
             </a:r>
             <a:endParaRPr lang="en-US" sz="800" dirty="0"/>
           </a:p>
@@ -21630,7 +22394,7 @@
                 <a:ea typeface="Trebuchet MS" pitchFamily="34" charset="-122"/>
                 <a:cs typeface="Trebuchet MS" pitchFamily="34" charset="-120"/>
               </a:rPr>
-              <a:t>rejection</a:t>
+              <a:t>rejecting</a:t>
             </a:r>
             <a:endParaRPr lang="en-US" sz="2800" dirty="0"/>
           </a:p>
@@ -21710,7 +22474,7 @@
         </p:nvSpPr>
         <p:spPr>
           <a:xfrm>
-            <a:off x="2938272" y="2258568"/>
+            <a:off x="2221992" y="2258568"/>
             <a:ext cx="1828800" cy="292608"/>
           </a:xfrm>
           <a:prstGeom prst="rect">
@@ -21719,11 +22483,11 @@
             </a:avLst>
           </a:prstGeom>
           <a:solidFill>
-            <a:srgbClr val="CCFBF1"/>
+            <a:srgbClr val="DDD6FE"/>
           </a:solidFill>
           <a:ln w="19050">
             <a:solidFill>
-              <a:srgbClr val="0D9488"/>
+              <a:srgbClr val="7C3AED"/>
             </a:solidFill>
             <a:prstDash val="solid"/>
           </a:ln>
@@ -21744,7 +22508,7 @@
         </p:nvSpPr>
         <p:spPr>
           <a:xfrm>
-            <a:off x="2938272" y="2258568"/>
+            <a:off x="2221992" y="2258568"/>
             <a:ext cx="1828800" cy="292608"/>
           </a:xfrm>
           <a:prstGeom prst="rect">
@@ -21763,13 +22527,13 @@
             <a:r>
               <a:rPr lang="en-US" sz="1300" b="1" dirty="0">
                 <a:solidFill>
-                  <a:srgbClr val="0F766E"/>
+                  <a:srgbClr val="4C1D95"/>
                 </a:solidFill>
                 <a:latin typeface="Trebuchet MS" pitchFamily="34" charset="0"/>
                 <a:ea typeface="Trebuchet MS" pitchFamily="34" charset="-122"/>
                 <a:cs typeface="Trebuchet MS" pitchFamily="34" charset="-120"/>
               </a:rPr>
-              <a:t>reject</a:t>
+              <a:t>re</a:t>
             </a:r>
             <a:endParaRPr lang="en-US" sz="1300" dirty="0"/>
           </a:p>
@@ -21783,7 +22547,7 @@
         </p:nvSpPr>
         <p:spPr>
           <a:xfrm>
-            <a:off x="2938272" y="2569464"/>
+            <a:off x="2221992" y="2569464"/>
             <a:ext cx="1828800" cy="201168"/>
           </a:xfrm>
           <a:prstGeom prst="rect">
@@ -21808,7 +22572,7 @@
                 <a:ea typeface="Calibri" pitchFamily="34" charset="-122"/>
                 <a:cs typeface="Calibri" pitchFamily="34" charset="-120"/>
               </a:rPr>
-              <a:t>to throw back or refuse</a:t>
+              <a:t>back</a:t>
             </a:r>
             <a:endParaRPr lang="en-US" sz="850" dirty="0"/>
           </a:p>
@@ -21822,7 +22586,7 @@
         </p:nvSpPr>
         <p:spPr>
           <a:xfrm>
-            <a:off x="5803392" y="2258568"/>
+            <a:off x="4370832" y="2258568"/>
             <a:ext cx="1828800" cy="292608"/>
           </a:xfrm>
           <a:prstGeom prst="rect">
@@ -21856,7 +22620,7 @@
         </p:nvSpPr>
         <p:spPr>
           <a:xfrm>
-            <a:off x="5803392" y="2258568"/>
+            <a:off x="4370832" y="2258568"/>
             <a:ext cx="1828800" cy="292608"/>
           </a:xfrm>
           <a:prstGeom prst="rect">
@@ -21881,7 +22645,7 @@
                 <a:ea typeface="Trebuchet MS" pitchFamily="34" charset="-122"/>
                 <a:cs typeface="Trebuchet MS" pitchFamily="34" charset="-120"/>
               </a:rPr>
-              <a:t>ion</a:t>
+              <a:t>ject</a:t>
             </a:r>
             <a:endParaRPr lang="en-US" sz="1300" dirty="0"/>
           </a:p>
@@ -21895,7 +22659,7 @@
         </p:nvSpPr>
         <p:spPr>
           <a:xfrm>
-            <a:off x="5803392" y="2569464"/>
+            <a:off x="4370832" y="2569464"/>
             <a:ext cx="1828800" cy="201168"/>
           </a:xfrm>
           <a:prstGeom prst="rect">
@@ -21920,7 +22684,7 @@
                 <a:ea typeface="Calibri" pitchFamily="34" charset="-122"/>
                 <a:cs typeface="Calibri" pitchFamily="34" charset="-120"/>
               </a:rPr>
-              <a:t>act or state of</a:t>
+              <a:t>throw</a:t>
             </a:r>
             <a:endParaRPr lang="en-US" sz="850" dirty="0"/>
           </a:p>
@@ -21929,6 +22693,118 @@
       <p:sp>
         <p:nvSpPr>
           <p:cNvPr id="22" name="Shape 20"/>
+          <p:cNvSpPr/>
+          <p:nvPr/>
+        </p:nvSpPr>
+        <p:spPr>
+          <a:xfrm>
+            <a:off x="6519672" y="2258568"/>
+            <a:ext cx="1828800" cy="292608"/>
+          </a:xfrm>
+          <a:prstGeom prst="rect">
+            <a:avLst>
+              <a:gd name="adj" fmla="val 25000"/>
+            </a:avLst>
+          </a:prstGeom>
+          <a:solidFill>
+            <a:srgbClr val="FCE7F3"/>
+          </a:solidFill>
+          <a:ln w="19050">
+            <a:solidFill>
+              <a:srgbClr val="DB2777"/>
+            </a:solidFill>
+            <a:prstDash val="solid"/>
+          </a:ln>
+          <a:effectLst>
+            <a:outerShdw sx="100000" sy="100000" kx="0" ky="0" algn="bl" rotWithShape="0" blurRad="101600" dist="38100" dir="8100000">
+              <a:srgbClr val="000000">
+                <a:alpha val="12000"/>
+              </a:srgbClr>
+            </a:outerShdw>
+          </a:effectLst>
+        </p:spPr>
+      </p:sp>
+      <p:sp>
+        <p:nvSpPr>
+          <p:cNvPr id="23" name="Text 21"/>
+          <p:cNvSpPr/>
+          <p:nvPr/>
+        </p:nvSpPr>
+        <p:spPr>
+          <a:xfrm>
+            <a:off x="6519672" y="2258568"/>
+            <a:ext cx="1828800" cy="292608"/>
+          </a:xfrm>
+          <a:prstGeom prst="rect">
+            <a:avLst/>
+          </a:prstGeom>
+          <a:noFill/>
+          <a:ln/>
+        </p:spPr>
+        <p:txBody>
+          <a:bodyPr wrap="square" lIns="0" tIns="0" rIns="0" bIns="0" rtlCol="0" anchor="ctr"/>
+          <a:lstStyle/>
+          <a:p>
+            <a:pPr algn="ctr" indent="0" marL="0">
+              <a:buNone/>
+            </a:pPr>
+            <a:r>
+              <a:rPr lang="en-US" sz="1300" b="1" dirty="0">
+                <a:solidFill>
+                  <a:srgbClr val="9D174D"/>
+                </a:solidFill>
+                <a:latin typeface="Trebuchet MS" pitchFamily="34" charset="0"/>
+                <a:ea typeface="Trebuchet MS" pitchFamily="34" charset="-122"/>
+                <a:cs typeface="Trebuchet MS" pitchFamily="34" charset="-120"/>
+              </a:rPr>
+              <a:t>ing</a:t>
+            </a:r>
+            <a:endParaRPr lang="en-US" sz="1300" dirty="0"/>
+          </a:p>
+        </p:txBody>
+      </p:sp>
+      <p:sp>
+        <p:nvSpPr>
+          <p:cNvPr id="24" name="Text 22"/>
+          <p:cNvSpPr/>
+          <p:nvPr/>
+        </p:nvSpPr>
+        <p:spPr>
+          <a:xfrm>
+            <a:off x="6519672" y="2569464"/>
+            <a:ext cx="1828800" cy="201168"/>
+          </a:xfrm>
+          <a:prstGeom prst="rect">
+            <a:avLst/>
+          </a:prstGeom>
+          <a:noFill/>
+          <a:ln/>
+        </p:spPr>
+        <p:txBody>
+          <a:bodyPr wrap="square" lIns="0" tIns="0" rIns="0" bIns="0" rtlCol="0" anchor="t"/>
+          <a:lstStyle/>
+          <a:p>
+            <a:pPr algn="ctr" indent="0" marL="0">
+              <a:buNone/>
+            </a:pPr>
+            <a:r>
+              <a:rPr lang="en-US" sz="850" dirty="0">
+                <a:solidFill>
+                  <a:srgbClr val="475569"/>
+                </a:solidFill>
+                <a:latin typeface="Calibri" pitchFamily="34" charset="0"/>
+                <a:ea typeface="Calibri" pitchFamily="34" charset="-122"/>
+                <a:cs typeface="Calibri" pitchFamily="34" charset="-120"/>
+              </a:rPr>
+              <a:t>happening now</a:t>
+            </a:r>
+            <a:endParaRPr lang="en-US" sz="850" dirty="0"/>
+          </a:p>
+        </p:txBody>
+      </p:sp>
+      <p:sp>
+        <p:nvSpPr>
+          <p:cNvPr id="25" name="Shape 23"/>
           <p:cNvSpPr/>
           <p:nvPr/>
         </p:nvSpPr>
@@ -21955,7 +22831,7 @@
       </p:sp>
       <p:sp>
         <p:nvSpPr>
-          <p:cNvPr id="23" name="Text 21"/>
+          <p:cNvPr id="26" name="Text 24"/>
           <p:cNvSpPr/>
           <p:nvPr/>
         </p:nvSpPr>
@@ -21994,7 +22870,7 @@
       </p:sp>
       <p:sp>
         <p:nvSpPr>
-          <p:cNvPr id="24" name="Shape 22"/>
+          <p:cNvPr id="27" name="Shape 25"/>
           <p:cNvSpPr/>
           <p:nvPr/>
         </p:nvSpPr>
@@ -22021,7 +22897,7 @@
       </p:sp>
       <p:sp>
         <p:nvSpPr>
-          <p:cNvPr id="25" name="Shape 23"/>
+          <p:cNvPr id="28" name="Shape 26"/>
           <p:cNvSpPr/>
           <p:nvPr/>
         </p:nvSpPr>
@@ -22048,7 +22924,7 @@
       </p:sp>
       <p:sp>
         <p:nvSpPr>
-          <p:cNvPr id="26" name="Text 24"/>
+          <p:cNvPr id="29" name="Text 27"/>
           <p:cNvSpPr/>
           <p:nvPr/>
         </p:nvSpPr>
@@ -22087,7 +22963,7 @@
       </p:sp>
       <p:sp>
         <p:nvSpPr>
-          <p:cNvPr id="27" name="Text 25"/>
+          <p:cNvPr id="30" name="Text 28"/>
           <p:cNvSpPr/>
           <p:nvPr/>
         </p:nvSpPr>
@@ -22126,7 +23002,7 @@
       </p:sp>
       <p:sp>
         <p:nvSpPr>
-          <p:cNvPr id="28" name="Shape 26"/>
+          <p:cNvPr id="31" name="Shape 29"/>
           <p:cNvSpPr/>
           <p:nvPr/>
         </p:nvSpPr>
@@ -22153,7 +23029,7 @@
       </p:sp>
       <p:sp>
         <p:nvSpPr>
-          <p:cNvPr id="29" name="Text 27"/>
+          <p:cNvPr id="32" name="Text 30"/>
           <p:cNvSpPr/>
           <p:nvPr/>
         </p:nvSpPr>
@@ -22184,7 +23060,7 @@
                 <a:ea typeface="Trebuchet MS" pitchFamily="34" charset="-122"/>
                 <a:cs typeface="Trebuchet MS" pitchFamily="34" charset="-120"/>
               </a:rPr>
-              <a:t>jec</a:t>
+              <a:t>ject</a:t>
             </a:r>
             <a:endParaRPr lang="en-US" sz="1400" dirty="0"/>
           </a:p>
@@ -22192,7 +23068,7 @@
       </p:sp>
       <p:sp>
         <p:nvSpPr>
-          <p:cNvPr id="30" name="Text 28"/>
+          <p:cNvPr id="33" name="Text 31"/>
           <p:cNvSpPr/>
           <p:nvPr/>
         </p:nvSpPr>
@@ -22231,7 +23107,7 @@
       </p:sp>
       <p:sp>
         <p:nvSpPr>
-          <p:cNvPr id="31" name="Shape 29"/>
+          <p:cNvPr id="34" name="Shape 32"/>
           <p:cNvSpPr/>
           <p:nvPr/>
         </p:nvSpPr>
@@ -22258,7 +23134,7 @@
       </p:sp>
       <p:sp>
         <p:nvSpPr>
-          <p:cNvPr id="32" name="Text 30"/>
+          <p:cNvPr id="35" name="Text 33"/>
           <p:cNvSpPr/>
           <p:nvPr/>
         </p:nvSpPr>
@@ -22289,7 +23165,7 @@
                 <a:ea typeface="Trebuchet MS" pitchFamily="34" charset="-122"/>
                 <a:cs typeface="Trebuchet MS" pitchFamily="34" charset="-120"/>
               </a:rPr>
-              <a:t>tion</a:t>
+              <a:t>ing</a:t>
             </a:r>
             <a:endParaRPr lang="en-US" sz="1400" dirty="0"/>
           </a:p>
@@ -22297,7 +23173,7 @@
       </p:sp>
       <p:sp>
         <p:nvSpPr>
-          <p:cNvPr id="33" name="Shape 31"/>
+          <p:cNvPr id="36" name="Shape 34"/>
           <p:cNvSpPr/>
           <p:nvPr/>
         </p:nvSpPr>
@@ -22324,7 +23200,7 @@
       </p:sp>
       <p:sp>
         <p:nvSpPr>
-          <p:cNvPr id="34" name="Text 32"/>
+          <p:cNvPr id="37" name="Text 35"/>
           <p:cNvSpPr/>
           <p:nvPr/>
         </p:nvSpPr>
@@ -22363,7 +23239,7 @@
       </p:sp>
       <p:sp>
         <p:nvSpPr>
-          <p:cNvPr id="35" name="Shape 33"/>
+          <p:cNvPr id="38" name="Shape 36"/>
           <p:cNvSpPr/>
           <p:nvPr/>
         </p:nvSpPr>
@@ -22390,13 +23266,13 @@
       </p:sp>
       <p:sp>
         <p:nvSpPr>
-          <p:cNvPr id="36" name="Shape 34"/>
-          <p:cNvSpPr/>
-          <p:nvPr/>
-        </p:nvSpPr>
-        <p:spPr>
-          <a:xfrm>
-            <a:off x="2023872" y="4169664"/>
+          <p:cNvPr id="39" name="Shape 37"/>
+          <p:cNvSpPr/>
+          <p:nvPr/>
+        </p:nvSpPr>
+        <p:spPr>
+          <a:xfrm>
+            <a:off x="2124837" y="4169664"/>
             <a:ext cx="685800" cy="384048"/>
           </a:xfrm>
           <a:prstGeom prst="rect">
@@ -22417,13 +23293,13 @@
       </p:sp>
       <p:sp>
         <p:nvSpPr>
-          <p:cNvPr id="37" name="Text 35"/>
-          <p:cNvSpPr/>
-          <p:nvPr/>
-        </p:nvSpPr>
-        <p:spPr>
-          <a:xfrm>
-            <a:off x="2023872" y="4169664"/>
+          <p:cNvPr id="40" name="Text 38"/>
+          <p:cNvSpPr/>
+          <p:nvPr/>
+        </p:nvSpPr>
+        <p:spPr>
+          <a:xfrm>
+            <a:off x="2124837" y="4169664"/>
             <a:ext cx="685800" cy="384048"/>
           </a:xfrm>
           <a:prstGeom prst="rect">
@@ -22456,13 +23332,13 @@
       </p:sp>
       <p:sp>
         <p:nvSpPr>
-          <p:cNvPr id="38" name="Shape 36"/>
-          <p:cNvSpPr/>
-          <p:nvPr/>
-        </p:nvSpPr>
-        <p:spPr>
-          <a:xfrm>
-            <a:off x="2831592" y="4169664"/>
+          <p:cNvPr id="41" name="Shape 39"/>
+          <p:cNvSpPr/>
+          <p:nvPr/>
+        </p:nvSpPr>
+        <p:spPr>
+          <a:xfrm>
+            <a:off x="3033522" y="4169664"/>
             <a:ext cx="685800" cy="384048"/>
           </a:xfrm>
           <a:prstGeom prst="rect">
@@ -22483,13 +23359,13 @@
       </p:sp>
       <p:sp>
         <p:nvSpPr>
-          <p:cNvPr id="39" name="Text 37"/>
-          <p:cNvSpPr/>
-          <p:nvPr/>
-        </p:nvSpPr>
-        <p:spPr>
-          <a:xfrm>
-            <a:off x="2831592" y="4169664"/>
+          <p:cNvPr id="42" name="Text 40"/>
+          <p:cNvSpPr/>
+          <p:nvPr/>
+        </p:nvSpPr>
+        <p:spPr>
+          <a:xfrm>
+            <a:off x="3033522" y="4169664"/>
             <a:ext cx="685800" cy="384048"/>
           </a:xfrm>
           <a:prstGeom prst="rect">
@@ -22522,13 +23398,13 @@
       </p:sp>
       <p:sp>
         <p:nvSpPr>
-          <p:cNvPr id="40" name="Shape 38"/>
-          <p:cNvSpPr/>
-          <p:nvPr/>
-        </p:nvSpPr>
-        <p:spPr>
-          <a:xfrm>
-            <a:off x="3639312" y="4169664"/>
+          <p:cNvPr id="43" name="Shape 41"/>
+          <p:cNvSpPr/>
+          <p:nvPr/>
+        </p:nvSpPr>
+        <p:spPr>
+          <a:xfrm>
+            <a:off x="3942207" y="4169664"/>
             <a:ext cx="685800" cy="384048"/>
           </a:xfrm>
           <a:prstGeom prst="rect">
@@ -22549,13 +23425,13 @@
       </p:sp>
       <p:sp>
         <p:nvSpPr>
-          <p:cNvPr id="41" name="Text 39"/>
-          <p:cNvSpPr/>
-          <p:nvPr/>
-        </p:nvSpPr>
-        <p:spPr>
-          <a:xfrm>
-            <a:off x="3639312" y="4169664"/>
+          <p:cNvPr id="44" name="Text 42"/>
+          <p:cNvSpPr/>
+          <p:nvPr/>
+        </p:nvSpPr>
+        <p:spPr>
+          <a:xfrm>
+            <a:off x="3942207" y="4169664"/>
             <a:ext cx="685800" cy="384048"/>
           </a:xfrm>
           <a:prstGeom prst="rect">
@@ -22588,13 +23464,13 @@
       </p:sp>
       <p:sp>
         <p:nvSpPr>
-          <p:cNvPr id="42" name="Shape 40"/>
-          <p:cNvSpPr/>
-          <p:nvPr/>
-        </p:nvSpPr>
-        <p:spPr>
-          <a:xfrm>
-            <a:off x="4447032" y="4169664"/>
+          <p:cNvPr id="45" name="Shape 43"/>
+          <p:cNvSpPr/>
+          <p:nvPr/>
+        </p:nvSpPr>
+        <p:spPr>
+          <a:xfrm>
+            <a:off x="4850892" y="4169664"/>
             <a:ext cx="685800" cy="384048"/>
           </a:xfrm>
           <a:prstGeom prst="rect">
@@ -22615,13 +23491,13 @@
       </p:sp>
       <p:sp>
         <p:nvSpPr>
-          <p:cNvPr id="43" name="Text 41"/>
-          <p:cNvSpPr/>
-          <p:nvPr/>
-        </p:nvSpPr>
-        <p:spPr>
-          <a:xfrm>
-            <a:off x="4447032" y="4169664"/>
+          <p:cNvPr id="46" name="Text 44"/>
+          <p:cNvSpPr/>
+          <p:nvPr/>
+        </p:nvSpPr>
+        <p:spPr>
+          <a:xfrm>
+            <a:off x="4850892" y="4169664"/>
             <a:ext cx="685800" cy="384048"/>
           </a:xfrm>
           <a:prstGeom prst="rect">
@@ -22654,13 +23530,13 @@
       </p:sp>
       <p:sp>
         <p:nvSpPr>
-          <p:cNvPr id="44" name="Shape 42"/>
-          <p:cNvSpPr/>
-          <p:nvPr/>
-        </p:nvSpPr>
-        <p:spPr>
-          <a:xfrm>
-            <a:off x="5254752" y="4169664"/>
+          <p:cNvPr id="47" name="Shape 45"/>
+          <p:cNvSpPr/>
+          <p:nvPr/>
+        </p:nvSpPr>
+        <p:spPr>
+          <a:xfrm>
+            <a:off x="5759577" y="4169664"/>
             <a:ext cx="685800" cy="384048"/>
           </a:xfrm>
           <a:prstGeom prst="rect">
@@ -22681,13 +23557,13 @@
       </p:sp>
       <p:sp>
         <p:nvSpPr>
-          <p:cNvPr id="45" name="Text 43"/>
-          <p:cNvSpPr/>
-          <p:nvPr/>
-        </p:nvSpPr>
-        <p:spPr>
-          <a:xfrm>
-            <a:off x="5254752" y="4169664"/>
+          <p:cNvPr id="48" name="Text 46"/>
+          <p:cNvSpPr/>
+          <p:nvPr/>
+        </p:nvSpPr>
+        <p:spPr>
+          <a:xfrm>
+            <a:off x="5759577" y="4169664"/>
             <a:ext cx="685800" cy="384048"/>
           </a:xfrm>
           <a:prstGeom prst="rect">
@@ -22720,13 +23596,13 @@
       </p:sp>
       <p:sp>
         <p:nvSpPr>
-          <p:cNvPr id="46" name="Text 44"/>
-          <p:cNvSpPr/>
-          <p:nvPr/>
-        </p:nvSpPr>
-        <p:spPr>
-          <a:xfrm>
-            <a:off x="5254752" y="4572000"/>
+          <p:cNvPr id="49" name="Text 47"/>
+          <p:cNvSpPr/>
+          <p:nvPr/>
+        </p:nvSpPr>
+        <p:spPr>
+          <a:xfrm>
+            <a:off x="5759577" y="4572000"/>
             <a:ext cx="685800" cy="219456"/>
           </a:xfrm>
           <a:prstGeom prst="rect">
@@ -22759,13 +23635,13 @@
       </p:sp>
       <p:sp>
         <p:nvSpPr>
-          <p:cNvPr id="47" name="Shape 45"/>
-          <p:cNvSpPr/>
-          <p:nvPr/>
-        </p:nvSpPr>
-        <p:spPr>
-          <a:xfrm>
-            <a:off x="6062472" y="4169664"/>
+          <p:cNvPr id="50" name="Shape 48"/>
+          <p:cNvSpPr/>
+          <p:nvPr/>
+        </p:nvSpPr>
+        <p:spPr>
+          <a:xfrm>
+            <a:off x="6668262" y="4169664"/>
             <a:ext cx="685800" cy="384048"/>
           </a:xfrm>
           <a:prstGeom prst="rect">
@@ -22786,13 +23662,13 @@
       </p:sp>
       <p:sp>
         <p:nvSpPr>
-          <p:cNvPr id="48" name="Text 46"/>
-          <p:cNvSpPr/>
-          <p:nvPr/>
-        </p:nvSpPr>
-        <p:spPr>
-          <a:xfrm>
-            <a:off x="6062472" y="4169664"/>
+          <p:cNvPr id="51" name="Text 49"/>
+          <p:cNvSpPr/>
+          <p:nvPr/>
+        </p:nvSpPr>
+        <p:spPr>
+          <a:xfrm>
+            <a:off x="6668262" y="4169664"/>
             <a:ext cx="685800" cy="384048"/>
           </a:xfrm>
           <a:prstGeom prst="rect">
@@ -22825,13 +23701,13 @@
       </p:sp>
       <p:sp>
         <p:nvSpPr>
-          <p:cNvPr id="49" name="Shape 47"/>
-          <p:cNvSpPr/>
-          <p:nvPr/>
-        </p:nvSpPr>
-        <p:spPr>
-          <a:xfrm>
-            <a:off x="6870192" y="4169664"/>
+          <p:cNvPr id="52" name="Shape 50"/>
+          <p:cNvSpPr/>
+          <p:nvPr/>
+        </p:nvSpPr>
+        <p:spPr>
+          <a:xfrm>
+            <a:off x="7576947" y="4169664"/>
             <a:ext cx="685800" cy="384048"/>
           </a:xfrm>
           <a:prstGeom prst="rect">
@@ -22852,13 +23728,13 @@
       </p:sp>
       <p:sp>
         <p:nvSpPr>
-          <p:cNvPr id="50" name="Text 48"/>
-          <p:cNvSpPr/>
-          <p:nvPr/>
-        </p:nvSpPr>
-        <p:spPr>
-          <a:xfrm>
-            <a:off x="6870192" y="4169664"/>
+          <p:cNvPr id="53" name="Text 51"/>
+          <p:cNvSpPr/>
+          <p:nvPr/>
+        </p:nvSpPr>
+        <p:spPr>
+          <a:xfrm>
+            <a:off x="7576947" y="4169664"/>
             <a:ext cx="685800" cy="384048"/>
           </a:xfrm>
           <a:prstGeom prst="rect">
@@ -22883,112 +23759,7 @@
                 <a:ea typeface="Trebuchet MS" pitchFamily="34" charset="-122"/>
                 <a:cs typeface="Trebuchet MS" pitchFamily="34" charset="-120"/>
               </a:rPr>
-              <a:t>io</a:t>
-            </a:r>
-            <a:endParaRPr lang="en-US" sz="900" dirty="0"/>
-          </a:p>
-        </p:txBody>
-      </p:sp>
-      <p:sp>
-        <p:nvSpPr>
-          <p:cNvPr id="51" name="Text 49"/>
-          <p:cNvSpPr/>
-          <p:nvPr/>
-        </p:nvSpPr>
-        <p:spPr>
-          <a:xfrm>
-            <a:off x="6870192" y="4572000"/>
-            <a:ext cx="685800" cy="219456"/>
-          </a:xfrm>
-          <a:prstGeom prst="rect">
-            <a:avLst/>
-          </a:prstGeom>
-          <a:noFill/>
-          <a:ln/>
-        </p:spPr>
-        <p:txBody>
-          <a:bodyPr wrap="square" lIns="0" tIns="0" rIns="0" bIns="0" rtlCol="0" anchor="t"/>
-          <a:lstStyle/>
-          <a:p>
-            <a:pPr algn="ctr" indent="0" marL="0">
-              <a:buNone/>
-            </a:pPr>
-            <a:r>
-              <a:rPr lang="en-US" sz="750" i="1" dirty="0">
-                <a:solidFill>
-                  <a:srgbClr val="94A3B8"/>
-                </a:solidFill>
-                <a:latin typeface="Calibri" pitchFamily="34" charset="0"/>
-                <a:ea typeface="Calibri" pitchFamily="34" charset="-122"/>
-                <a:cs typeface="Calibri" pitchFamily="34" charset="-120"/>
-              </a:rPr>
-              <a:t>/sh/</a:t>
-            </a:r>
-            <a:endParaRPr lang="en-US" sz="750" dirty="0"/>
-          </a:p>
-        </p:txBody>
-      </p:sp>
-      <p:sp>
-        <p:nvSpPr>
-          <p:cNvPr id="52" name="Shape 50"/>
-          <p:cNvSpPr/>
-          <p:nvPr/>
-        </p:nvSpPr>
-        <p:spPr>
-          <a:xfrm>
-            <a:off x="7677912" y="4169664"/>
-            <a:ext cx="685800" cy="384048"/>
-          </a:xfrm>
-          <a:prstGeom prst="rect">
-            <a:avLst>
-              <a:gd name="adj" fmla="val 9524"/>
-            </a:avLst>
-          </a:prstGeom>
-          <a:solidFill>
-            <a:srgbClr val="FFFFFF"/>
-          </a:solidFill>
-          <a:ln w="12700">
-            <a:solidFill>
-              <a:srgbClr val="DB2777"/>
-            </a:solidFill>
-            <a:prstDash val="solid"/>
-          </a:ln>
-        </p:spPr>
-      </p:sp>
-      <p:sp>
-        <p:nvSpPr>
-          <p:cNvPr id="53" name="Text 51"/>
-          <p:cNvSpPr/>
-          <p:nvPr/>
-        </p:nvSpPr>
-        <p:spPr>
-          <a:xfrm>
-            <a:off x="7677912" y="4169664"/>
-            <a:ext cx="685800" cy="384048"/>
-          </a:xfrm>
-          <a:prstGeom prst="rect">
-            <a:avLst/>
-          </a:prstGeom>
-          <a:noFill/>
-          <a:ln/>
-        </p:spPr>
-        <p:txBody>
-          <a:bodyPr wrap="square" lIns="0" tIns="0" rIns="0" bIns="0" rtlCol="0" anchor="ctr"/>
-          <a:lstStyle/>
-          <a:p>
-            <a:pPr algn="ctr" indent="0" marL="0">
-              <a:buNone/>
-            </a:pPr>
-            <a:r>
-              <a:rPr lang="en-US" sz="900" b="1" dirty="0">
-                <a:solidFill>
-                  <a:srgbClr val="9D174D"/>
-                </a:solidFill>
-                <a:latin typeface="Trebuchet MS" pitchFamily="34" charset="0"/>
-                <a:ea typeface="Trebuchet MS" pitchFamily="34" charset="-122"/>
-                <a:cs typeface="Trebuchet MS" pitchFamily="34" charset="-120"/>
-              </a:rPr>
-              <a:t>n</a:t>
+              <a:t>ing</a:t>
             </a:r>
             <a:endParaRPr lang="en-US" sz="900" dirty="0"/>
           </a:p>
@@ -23280,7 +24051,7 @@
                 <a:ea typeface="Calibri" pitchFamily="34" charset="-122"/>
                 <a:cs typeface="Calibri" pitchFamily="34" charset="-120"/>
               </a:rPr>
-              <a:t>Word Labs  •  wordlabs.app  •  Root: 'reject' = throw back, refuse to accept</a:t>
+              <a:t>Word Labs  •  wordlabs.app  •  Root: 'reject' = throw back, refuse, push away</a:t>
             </a:r>
             <a:endParaRPr lang="en-US" sz="800" dirty="0"/>
           </a:p>
@@ -23419,7 +24190,7 @@
                 <a:ea typeface="Trebuchet MS" pitchFamily="34" charset="-122"/>
                 <a:cs typeface="Trebuchet MS" pitchFamily="34" charset="-120"/>
               </a:rPr>
-              <a:t>rejecting</a:t>
+              <a:t>rejections</a:t>
             </a:r>
             <a:endParaRPr lang="en-US" sz="2800" dirty="0"/>
           </a:p>
@@ -24107,7 +24878,7 @@
                 <a:ea typeface="Calibri" pitchFamily="34" charset="-122"/>
                 <a:cs typeface="Calibri" pitchFamily="34" charset="-120"/>
               </a:rPr>
-              <a:t>Word Labs  •  wordlabs.app  •  Root: 'reject' = throw back, refuse to accept</a:t>
+              <a:t>Word Labs  •  wordlabs.app  •  Root: 'reject' = throw back, refuse, push away</a:t>
             </a:r>
             <a:endParaRPr lang="en-US" sz="800" dirty="0"/>
           </a:p>
@@ -24246,7 +25017,7 @@
                 <a:ea typeface="Trebuchet MS" pitchFamily="34" charset="-122"/>
                 <a:cs typeface="Trebuchet MS" pitchFamily="34" charset="-120"/>
               </a:rPr>
-              <a:t>rejecting</a:t>
+              <a:t>rejections</a:t>
             </a:r>
             <a:endParaRPr lang="en-US" sz="2800" dirty="0"/>
           </a:p>
@@ -24326,8 +25097,8 @@
         </p:nvSpPr>
         <p:spPr>
           <a:xfrm>
-            <a:off x="2938272" y="2258568"/>
-            <a:ext cx="1828800" cy="292608"/>
+            <a:off x="1989734" y="2258568"/>
+            <a:ext cx="1581912" cy="292608"/>
           </a:xfrm>
           <a:prstGeom prst="rect">
             <a:avLst>
@@ -24335,11 +25106,11 @@
             </a:avLst>
           </a:prstGeom>
           <a:solidFill>
-            <a:srgbClr val="CCFBF1"/>
+            <a:srgbClr val="DDD6FE"/>
           </a:solidFill>
           <a:ln w="19050">
             <a:solidFill>
-              <a:srgbClr val="0D9488"/>
+              <a:srgbClr val="7C3AED"/>
             </a:solidFill>
             <a:prstDash val="solid"/>
           </a:ln>
@@ -24360,8 +25131,8 @@
         </p:nvSpPr>
         <p:spPr>
           <a:xfrm>
-            <a:off x="2938272" y="2258568"/>
-            <a:ext cx="1828800" cy="292608"/>
+            <a:off x="1989734" y="2258568"/>
+            <a:ext cx="1581912" cy="292608"/>
           </a:xfrm>
           <a:prstGeom prst="rect">
             <a:avLst/>
@@ -24379,13 +25150,13 @@
             <a:r>
               <a:rPr lang="en-US" sz="1300" b="1" dirty="0">
                 <a:solidFill>
-                  <a:srgbClr val="0F766E"/>
+                  <a:srgbClr val="4C1D95"/>
                 </a:solidFill>
                 <a:latin typeface="Trebuchet MS" pitchFamily="34" charset="0"/>
                 <a:ea typeface="Trebuchet MS" pitchFamily="34" charset="-122"/>
                 <a:cs typeface="Trebuchet MS" pitchFamily="34" charset="-120"/>
               </a:rPr>
-              <a:t>reject</a:t>
+              <a:t>re</a:t>
             </a:r>
             <a:endParaRPr lang="en-US" sz="1300" dirty="0"/>
           </a:p>
@@ -24399,8 +25170,8 @@
         </p:nvSpPr>
         <p:spPr>
           <a:xfrm>
-            <a:off x="2938272" y="2569464"/>
-            <a:ext cx="1828800" cy="201168"/>
+            <a:off x="1989734" y="2569464"/>
+            <a:ext cx="1581912" cy="201168"/>
           </a:xfrm>
           <a:prstGeom prst="rect">
             <a:avLst/>
@@ -24424,7 +25195,7 @@
                 <a:ea typeface="Calibri" pitchFamily="34" charset="-122"/>
                 <a:cs typeface="Calibri" pitchFamily="34" charset="-120"/>
               </a:rPr>
-              <a:t>to throw back or refuse</a:t>
+              <a:t>back</a:t>
             </a:r>
             <a:endParaRPr lang="en-US" sz="850" dirty="0"/>
           </a:p>
@@ -24438,8 +25209,8 @@
         </p:nvSpPr>
         <p:spPr>
           <a:xfrm>
-            <a:off x="5803392" y="2258568"/>
-            <a:ext cx="1828800" cy="292608"/>
+            <a:off x="3659429" y="2258568"/>
+            <a:ext cx="1581912" cy="292608"/>
           </a:xfrm>
           <a:prstGeom prst="rect">
             <a:avLst>
@@ -24472,8 +25243,8 @@
         </p:nvSpPr>
         <p:spPr>
           <a:xfrm>
-            <a:off x="5803392" y="2258568"/>
-            <a:ext cx="1828800" cy="292608"/>
+            <a:off x="3659429" y="2258568"/>
+            <a:ext cx="1581912" cy="292608"/>
           </a:xfrm>
           <a:prstGeom prst="rect">
             <a:avLst/>
@@ -24497,7 +25268,7 @@
                 <a:ea typeface="Trebuchet MS" pitchFamily="34" charset="-122"/>
                 <a:cs typeface="Trebuchet MS" pitchFamily="34" charset="-120"/>
               </a:rPr>
-              <a:t>ing</a:t>
+              <a:t>ject</a:t>
             </a:r>
             <a:endParaRPr lang="en-US" sz="1300" dirty="0"/>
           </a:p>
@@ -24511,8 +25282,8 @@
         </p:nvSpPr>
         <p:spPr>
           <a:xfrm>
-            <a:off x="5803392" y="2569464"/>
-            <a:ext cx="1828800" cy="201168"/>
+            <a:off x="3659429" y="2569464"/>
+            <a:ext cx="1581912" cy="201168"/>
           </a:xfrm>
           <a:prstGeom prst="rect">
             <a:avLst/>
@@ -24536,7 +25307,7 @@
                 <a:ea typeface="Calibri" pitchFamily="34" charset="-122"/>
                 <a:cs typeface="Calibri" pitchFamily="34" charset="-120"/>
               </a:rPr>
-              <a:t>happening right now</a:t>
+              <a:t>throw</a:t>
             </a:r>
             <a:endParaRPr lang="en-US" sz="850" dirty="0"/>
           </a:p>
@@ -24545,6 +25316,230 @@
       <p:sp>
         <p:nvSpPr>
           <p:cNvPr id="22" name="Shape 20"/>
+          <p:cNvSpPr/>
+          <p:nvPr/>
+        </p:nvSpPr>
+        <p:spPr>
+          <a:xfrm>
+            <a:off x="5329123" y="2258568"/>
+            <a:ext cx="1581912" cy="292608"/>
+          </a:xfrm>
+          <a:prstGeom prst="rect">
+            <a:avLst>
+              <a:gd name="adj" fmla="val 25000"/>
+            </a:avLst>
+          </a:prstGeom>
+          <a:solidFill>
+            <a:srgbClr val="FCE7F3"/>
+          </a:solidFill>
+          <a:ln w="19050">
+            <a:solidFill>
+              <a:srgbClr val="DB2777"/>
+            </a:solidFill>
+            <a:prstDash val="solid"/>
+          </a:ln>
+          <a:effectLst>
+            <a:outerShdw sx="100000" sy="100000" kx="0" ky="0" algn="bl" rotWithShape="0" blurRad="101600" dist="38100" dir="8100000">
+              <a:srgbClr val="000000">
+                <a:alpha val="12000"/>
+              </a:srgbClr>
+            </a:outerShdw>
+          </a:effectLst>
+        </p:spPr>
+      </p:sp>
+      <p:sp>
+        <p:nvSpPr>
+          <p:cNvPr id="23" name="Text 21"/>
+          <p:cNvSpPr/>
+          <p:nvPr/>
+        </p:nvSpPr>
+        <p:spPr>
+          <a:xfrm>
+            <a:off x="5329123" y="2258568"/>
+            <a:ext cx="1581912" cy="292608"/>
+          </a:xfrm>
+          <a:prstGeom prst="rect">
+            <a:avLst/>
+          </a:prstGeom>
+          <a:noFill/>
+          <a:ln/>
+        </p:spPr>
+        <p:txBody>
+          <a:bodyPr wrap="square" lIns="0" tIns="0" rIns="0" bIns="0" rtlCol="0" anchor="ctr"/>
+          <a:lstStyle/>
+          <a:p>
+            <a:pPr algn="ctr" indent="0" marL="0">
+              <a:buNone/>
+            </a:pPr>
+            <a:r>
+              <a:rPr lang="en-US" sz="1300" b="1" dirty="0">
+                <a:solidFill>
+                  <a:srgbClr val="9D174D"/>
+                </a:solidFill>
+                <a:latin typeface="Trebuchet MS" pitchFamily="34" charset="0"/>
+                <a:ea typeface="Trebuchet MS" pitchFamily="34" charset="-122"/>
+                <a:cs typeface="Trebuchet MS" pitchFamily="34" charset="-120"/>
+              </a:rPr>
+              <a:t>ion</a:t>
+            </a:r>
+            <a:endParaRPr lang="en-US" sz="1300" dirty="0"/>
+          </a:p>
+        </p:txBody>
+      </p:sp>
+      <p:sp>
+        <p:nvSpPr>
+          <p:cNvPr id="24" name="Text 22"/>
+          <p:cNvSpPr/>
+          <p:nvPr/>
+        </p:nvSpPr>
+        <p:spPr>
+          <a:xfrm>
+            <a:off x="5329123" y="2569464"/>
+            <a:ext cx="1581912" cy="201168"/>
+          </a:xfrm>
+          <a:prstGeom prst="rect">
+            <a:avLst/>
+          </a:prstGeom>
+          <a:noFill/>
+          <a:ln/>
+        </p:spPr>
+        <p:txBody>
+          <a:bodyPr wrap="square" lIns="0" tIns="0" rIns="0" bIns="0" rtlCol="0" anchor="t"/>
+          <a:lstStyle/>
+          <a:p>
+            <a:pPr algn="ctr" indent="0" marL="0">
+              <a:buNone/>
+            </a:pPr>
+            <a:r>
+              <a:rPr lang="en-US" sz="850" dirty="0">
+                <a:solidFill>
+                  <a:srgbClr val="475569"/>
+                </a:solidFill>
+                <a:latin typeface="Calibri" pitchFamily="34" charset="0"/>
+                <a:ea typeface="Calibri" pitchFamily="34" charset="-122"/>
+                <a:cs typeface="Calibri" pitchFamily="34" charset="-120"/>
+              </a:rPr>
+              <a:t>act or result of</a:t>
+            </a:r>
+            <a:endParaRPr lang="en-US" sz="850" dirty="0"/>
+          </a:p>
+        </p:txBody>
+      </p:sp>
+      <p:sp>
+        <p:nvSpPr>
+          <p:cNvPr id="25" name="Shape 23"/>
+          <p:cNvSpPr/>
+          <p:nvPr/>
+        </p:nvSpPr>
+        <p:spPr>
+          <a:xfrm>
+            <a:off x="6998818" y="2258568"/>
+            <a:ext cx="1581912" cy="292608"/>
+          </a:xfrm>
+          <a:prstGeom prst="rect">
+            <a:avLst>
+              <a:gd name="adj" fmla="val 25000"/>
+            </a:avLst>
+          </a:prstGeom>
+          <a:solidFill>
+            <a:srgbClr val="FCE7F3"/>
+          </a:solidFill>
+          <a:ln w="19050">
+            <a:solidFill>
+              <a:srgbClr val="DB2777"/>
+            </a:solidFill>
+            <a:prstDash val="solid"/>
+          </a:ln>
+          <a:effectLst>
+            <a:outerShdw sx="100000" sy="100000" kx="0" ky="0" algn="bl" rotWithShape="0" blurRad="101600" dist="38100" dir="8100000">
+              <a:srgbClr val="000000">
+                <a:alpha val="12000"/>
+              </a:srgbClr>
+            </a:outerShdw>
+          </a:effectLst>
+        </p:spPr>
+      </p:sp>
+      <p:sp>
+        <p:nvSpPr>
+          <p:cNvPr id="26" name="Text 24"/>
+          <p:cNvSpPr/>
+          <p:nvPr/>
+        </p:nvSpPr>
+        <p:spPr>
+          <a:xfrm>
+            <a:off x="6998818" y="2258568"/>
+            <a:ext cx="1581912" cy="292608"/>
+          </a:xfrm>
+          <a:prstGeom prst="rect">
+            <a:avLst/>
+          </a:prstGeom>
+          <a:noFill/>
+          <a:ln/>
+        </p:spPr>
+        <p:txBody>
+          <a:bodyPr wrap="square" lIns="0" tIns="0" rIns="0" bIns="0" rtlCol="0" anchor="ctr"/>
+          <a:lstStyle/>
+          <a:p>
+            <a:pPr algn="ctr" indent="0" marL="0">
+              <a:buNone/>
+            </a:pPr>
+            <a:r>
+              <a:rPr lang="en-US" sz="1300" b="1" dirty="0">
+                <a:solidFill>
+                  <a:srgbClr val="9D174D"/>
+                </a:solidFill>
+                <a:latin typeface="Trebuchet MS" pitchFamily="34" charset="0"/>
+                <a:ea typeface="Trebuchet MS" pitchFamily="34" charset="-122"/>
+                <a:cs typeface="Trebuchet MS" pitchFamily="34" charset="-120"/>
+              </a:rPr>
+              <a:t>s</a:t>
+            </a:r>
+            <a:endParaRPr lang="en-US" sz="1300" dirty="0"/>
+          </a:p>
+        </p:txBody>
+      </p:sp>
+      <p:sp>
+        <p:nvSpPr>
+          <p:cNvPr id="27" name="Text 25"/>
+          <p:cNvSpPr/>
+          <p:nvPr/>
+        </p:nvSpPr>
+        <p:spPr>
+          <a:xfrm>
+            <a:off x="6998818" y="2569464"/>
+            <a:ext cx="1581912" cy="201168"/>
+          </a:xfrm>
+          <a:prstGeom prst="rect">
+            <a:avLst/>
+          </a:prstGeom>
+          <a:noFill/>
+          <a:ln/>
+        </p:spPr>
+        <p:txBody>
+          <a:bodyPr wrap="square" lIns="0" tIns="0" rIns="0" bIns="0" rtlCol="0" anchor="t"/>
+          <a:lstStyle/>
+          <a:p>
+            <a:pPr algn="ctr" indent="0" marL="0">
+              <a:buNone/>
+            </a:pPr>
+            <a:r>
+              <a:rPr lang="en-US" sz="850" dirty="0">
+                <a:solidFill>
+                  <a:srgbClr val="475569"/>
+                </a:solidFill>
+                <a:latin typeface="Calibri" pitchFamily="34" charset="0"/>
+                <a:ea typeface="Calibri" pitchFamily="34" charset="-122"/>
+                <a:cs typeface="Calibri" pitchFamily="34" charset="-120"/>
+              </a:rPr>
+              <a:t>more than one</a:t>
+            </a:r>
+            <a:endParaRPr lang="en-US" sz="850" dirty="0"/>
+          </a:p>
+        </p:txBody>
+      </p:sp>
+      <p:sp>
+        <p:nvSpPr>
+          <p:cNvPr id="28" name="Shape 26"/>
           <p:cNvSpPr/>
           <p:nvPr/>
         </p:nvSpPr>
@@ -24571,7 +25566,7 @@
       </p:sp>
       <p:sp>
         <p:nvSpPr>
-          <p:cNvPr id="23" name="Text 21"/>
+          <p:cNvPr id="29" name="Text 27"/>
           <p:cNvSpPr/>
           <p:nvPr/>
         </p:nvSpPr>
@@ -24610,7 +25605,7 @@
       </p:sp>
       <p:sp>
         <p:nvSpPr>
-          <p:cNvPr id="24" name="Shape 22"/>
+          <p:cNvPr id="30" name="Shape 28"/>
           <p:cNvSpPr/>
           <p:nvPr/>
         </p:nvSpPr>
@@ -24637,7 +25632,7 @@
       </p:sp>
       <p:sp>
         <p:nvSpPr>
-          <p:cNvPr id="25" name="Text 23"/>
+          <p:cNvPr id="31" name="Text 29"/>
           <p:cNvSpPr/>
           <p:nvPr/>
         </p:nvSpPr>
@@ -24676,7 +25671,7 @@
       </p:sp>
       <p:sp>
         <p:nvSpPr>
-          <p:cNvPr id="26" name="Shape 24"/>
+          <p:cNvPr id="32" name="Shape 30"/>
           <p:cNvSpPr/>
           <p:nvPr/>
         </p:nvSpPr>
@@ -24703,7 +25698,7 @@
       </p:sp>
       <p:sp>
         <p:nvSpPr>
-          <p:cNvPr id="27" name="Text 25"/>
+          <p:cNvPr id="33" name="Text 31"/>
           <p:cNvSpPr/>
           <p:nvPr/>
         </p:nvSpPr>
@@ -24742,7 +25737,7 @@
       </p:sp>
       <p:sp>
         <p:nvSpPr>
-          <p:cNvPr id="28" name="Shape 26"/>
+          <p:cNvPr id="34" name="Shape 32"/>
           <p:cNvSpPr/>
           <p:nvPr/>
         </p:nvSpPr>
@@ -24769,7 +25764,7 @@
       </p:sp>
       <p:sp>
         <p:nvSpPr>
-          <p:cNvPr id="29" name="Text 27"/>
+          <p:cNvPr id="35" name="Text 33"/>
           <p:cNvSpPr/>
           <p:nvPr/>
         </p:nvSpPr>
@@ -25092,7 +26087,7 @@
                 <a:ea typeface="Calibri" pitchFamily="34" charset="-122"/>
                 <a:cs typeface="Calibri" pitchFamily="34" charset="-120"/>
               </a:rPr>
-              <a:t>Word Labs  •  wordlabs.app  •  Root: 'reject' = throw back, refuse to accept</a:t>
+              <a:t>Word Labs  •  wordlabs.app  •  Root: 'reject' = throw back, refuse, push away</a:t>
             </a:r>
             <a:endParaRPr lang="en-US" sz="800" dirty="0"/>
           </a:p>
@@ -25165,7 +26160,7 @@
                 <a:ea typeface="Trebuchet MS" pitchFamily="34" charset="-122"/>
                 <a:cs typeface="Trebuchet MS" pitchFamily="34" charset="-120"/>
               </a:rPr>
-              <a:t>We are learning that the root 'reject' means 'throw back, refuse to accept'.</a:t>
+              <a:t>We are learning that the root 'reject' means 'throw back, refuse, push away'.</a:t>
             </a:r>
             <a:endParaRPr lang="en-US" sz="2000" dirty="0"/>
           </a:p>
@@ -25811,7 +26806,7 @@
                 <a:ea typeface="Calibri" pitchFamily="34" charset="-122"/>
                 <a:cs typeface="Calibri" pitchFamily="34" charset="-120"/>
               </a:rPr>
-              <a:t>Word Labs  •  wordlabs.app  •  Root: 'reject' = throw back, refuse to accept</a:t>
+              <a:t>Word Labs  •  wordlabs.app  •  Root: 'reject' = throw back, refuse, push away</a:t>
             </a:r>
             <a:endParaRPr lang="en-US" sz="800" dirty="0"/>
           </a:p>
@@ -25950,7 +26945,7 @@
                 <a:ea typeface="Trebuchet MS" pitchFamily="34" charset="-122"/>
                 <a:cs typeface="Trebuchet MS" pitchFamily="34" charset="-120"/>
               </a:rPr>
-              <a:t>rejecting</a:t>
+              <a:t>rejections</a:t>
             </a:r>
             <a:endParaRPr lang="en-US" sz="2800" dirty="0"/>
           </a:p>
@@ -26030,8 +27025,8 @@
         </p:nvSpPr>
         <p:spPr>
           <a:xfrm>
-            <a:off x="2938272" y="2258568"/>
-            <a:ext cx="1828800" cy="292608"/>
+            <a:off x="1989734" y="2258568"/>
+            <a:ext cx="1581912" cy="292608"/>
           </a:xfrm>
           <a:prstGeom prst="rect">
             <a:avLst>
@@ -26039,11 +27034,11 @@
             </a:avLst>
           </a:prstGeom>
           <a:solidFill>
-            <a:srgbClr val="CCFBF1"/>
+            <a:srgbClr val="DDD6FE"/>
           </a:solidFill>
           <a:ln w="19050">
             <a:solidFill>
-              <a:srgbClr val="0D9488"/>
+              <a:srgbClr val="7C3AED"/>
             </a:solidFill>
             <a:prstDash val="solid"/>
           </a:ln>
@@ -26064,8 +27059,8 @@
         </p:nvSpPr>
         <p:spPr>
           <a:xfrm>
-            <a:off x="2938272" y="2258568"/>
-            <a:ext cx="1828800" cy="292608"/>
+            <a:off x="1989734" y="2258568"/>
+            <a:ext cx="1581912" cy="292608"/>
           </a:xfrm>
           <a:prstGeom prst="rect">
             <a:avLst/>
@@ -26083,13 +27078,13 @@
             <a:r>
               <a:rPr lang="en-US" sz="1300" b="1" dirty="0">
                 <a:solidFill>
-                  <a:srgbClr val="0F766E"/>
+                  <a:srgbClr val="4C1D95"/>
                 </a:solidFill>
                 <a:latin typeface="Trebuchet MS" pitchFamily="34" charset="0"/>
                 <a:ea typeface="Trebuchet MS" pitchFamily="34" charset="-122"/>
                 <a:cs typeface="Trebuchet MS" pitchFamily="34" charset="-120"/>
               </a:rPr>
-              <a:t>reject</a:t>
+              <a:t>re</a:t>
             </a:r>
             <a:endParaRPr lang="en-US" sz="1300" dirty="0"/>
           </a:p>
@@ -26103,8 +27098,8 @@
         </p:nvSpPr>
         <p:spPr>
           <a:xfrm>
-            <a:off x="2938272" y="2569464"/>
-            <a:ext cx="1828800" cy="201168"/>
+            <a:off x="1989734" y="2569464"/>
+            <a:ext cx="1581912" cy="201168"/>
           </a:xfrm>
           <a:prstGeom prst="rect">
             <a:avLst/>
@@ -26128,7 +27123,7 @@
                 <a:ea typeface="Calibri" pitchFamily="34" charset="-122"/>
                 <a:cs typeface="Calibri" pitchFamily="34" charset="-120"/>
               </a:rPr>
-              <a:t>to throw back or refuse</a:t>
+              <a:t>back</a:t>
             </a:r>
             <a:endParaRPr lang="en-US" sz="850" dirty="0"/>
           </a:p>
@@ -26142,8 +27137,8 @@
         </p:nvSpPr>
         <p:spPr>
           <a:xfrm>
-            <a:off x="5803392" y="2258568"/>
-            <a:ext cx="1828800" cy="292608"/>
+            <a:off x="3659429" y="2258568"/>
+            <a:ext cx="1581912" cy="292608"/>
           </a:xfrm>
           <a:prstGeom prst="rect">
             <a:avLst>
@@ -26176,8 +27171,8 @@
         </p:nvSpPr>
         <p:spPr>
           <a:xfrm>
-            <a:off x="5803392" y="2258568"/>
-            <a:ext cx="1828800" cy="292608"/>
+            <a:off x="3659429" y="2258568"/>
+            <a:ext cx="1581912" cy="292608"/>
           </a:xfrm>
           <a:prstGeom prst="rect">
             <a:avLst/>
@@ -26201,7 +27196,7 @@
                 <a:ea typeface="Trebuchet MS" pitchFamily="34" charset="-122"/>
                 <a:cs typeface="Trebuchet MS" pitchFamily="34" charset="-120"/>
               </a:rPr>
-              <a:t>ing</a:t>
+              <a:t>ject</a:t>
             </a:r>
             <a:endParaRPr lang="en-US" sz="1300" dirty="0"/>
           </a:p>
@@ -26215,8 +27210,8 @@
         </p:nvSpPr>
         <p:spPr>
           <a:xfrm>
-            <a:off x="5803392" y="2569464"/>
-            <a:ext cx="1828800" cy="201168"/>
+            <a:off x="3659429" y="2569464"/>
+            <a:ext cx="1581912" cy="201168"/>
           </a:xfrm>
           <a:prstGeom prst="rect">
             <a:avLst/>
@@ -26240,7 +27235,7 @@
                 <a:ea typeface="Calibri" pitchFamily="34" charset="-122"/>
                 <a:cs typeface="Calibri" pitchFamily="34" charset="-120"/>
               </a:rPr>
-              <a:t>happening right now</a:t>
+              <a:t>throw</a:t>
             </a:r>
             <a:endParaRPr lang="en-US" sz="850" dirty="0"/>
           </a:p>
@@ -26249,6 +27244,230 @@
       <p:sp>
         <p:nvSpPr>
           <p:cNvPr id="22" name="Shape 20"/>
+          <p:cNvSpPr/>
+          <p:nvPr/>
+        </p:nvSpPr>
+        <p:spPr>
+          <a:xfrm>
+            <a:off x="5329123" y="2258568"/>
+            <a:ext cx="1581912" cy="292608"/>
+          </a:xfrm>
+          <a:prstGeom prst="rect">
+            <a:avLst>
+              <a:gd name="adj" fmla="val 25000"/>
+            </a:avLst>
+          </a:prstGeom>
+          <a:solidFill>
+            <a:srgbClr val="FCE7F3"/>
+          </a:solidFill>
+          <a:ln w="19050">
+            <a:solidFill>
+              <a:srgbClr val="DB2777"/>
+            </a:solidFill>
+            <a:prstDash val="solid"/>
+          </a:ln>
+          <a:effectLst>
+            <a:outerShdw sx="100000" sy="100000" kx="0" ky="0" algn="bl" rotWithShape="0" blurRad="101600" dist="38100" dir="8100000">
+              <a:srgbClr val="000000">
+                <a:alpha val="12000"/>
+              </a:srgbClr>
+            </a:outerShdw>
+          </a:effectLst>
+        </p:spPr>
+      </p:sp>
+      <p:sp>
+        <p:nvSpPr>
+          <p:cNvPr id="23" name="Text 21"/>
+          <p:cNvSpPr/>
+          <p:nvPr/>
+        </p:nvSpPr>
+        <p:spPr>
+          <a:xfrm>
+            <a:off x="5329123" y="2258568"/>
+            <a:ext cx="1581912" cy="292608"/>
+          </a:xfrm>
+          <a:prstGeom prst="rect">
+            <a:avLst/>
+          </a:prstGeom>
+          <a:noFill/>
+          <a:ln/>
+        </p:spPr>
+        <p:txBody>
+          <a:bodyPr wrap="square" lIns="0" tIns="0" rIns="0" bIns="0" rtlCol="0" anchor="ctr"/>
+          <a:lstStyle/>
+          <a:p>
+            <a:pPr algn="ctr" indent="0" marL="0">
+              <a:buNone/>
+            </a:pPr>
+            <a:r>
+              <a:rPr lang="en-US" sz="1300" b="1" dirty="0">
+                <a:solidFill>
+                  <a:srgbClr val="9D174D"/>
+                </a:solidFill>
+                <a:latin typeface="Trebuchet MS" pitchFamily="34" charset="0"/>
+                <a:ea typeface="Trebuchet MS" pitchFamily="34" charset="-122"/>
+                <a:cs typeface="Trebuchet MS" pitchFamily="34" charset="-120"/>
+              </a:rPr>
+              <a:t>ion</a:t>
+            </a:r>
+            <a:endParaRPr lang="en-US" sz="1300" dirty="0"/>
+          </a:p>
+        </p:txBody>
+      </p:sp>
+      <p:sp>
+        <p:nvSpPr>
+          <p:cNvPr id="24" name="Text 22"/>
+          <p:cNvSpPr/>
+          <p:nvPr/>
+        </p:nvSpPr>
+        <p:spPr>
+          <a:xfrm>
+            <a:off x="5329123" y="2569464"/>
+            <a:ext cx="1581912" cy="201168"/>
+          </a:xfrm>
+          <a:prstGeom prst="rect">
+            <a:avLst/>
+          </a:prstGeom>
+          <a:noFill/>
+          <a:ln/>
+        </p:spPr>
+        <p:txBody>
+          <a:bodyPr wrap="square" lIns="0" tIns="0" rIns="0" bIns="0" rtlCol="0" anchor="t"/>
+          <a:lstStyle/>
+          <a:p>
+            <a:pPr algn="ctr" indent="0" marL="0">
+              <a:buNone/>
+            </a:pPr>
+            <a:r>
+              <a:rPr lang="en-US" sz="850" dirty="0">
+                <a:solidFill>
+                  <a:srgbClr val="475569"/>
+                </a:solidFill>
+                <a:latin typeface="Calibri" pitchFamily="34" charset="0"/>
+                <a:ea typeface="Calibri" pitchFamily="34" charset="-122"/>
+                <a:cs typeface="Calibri" pitchFamily="34" charset="-120"/>
+              </a:rPr>
+              <a:t>act or result of</a:t>
+            </a:r>
+            <a:endParaRPr lang="en-US" sz="850" dirty="0"/>
+          </a:p>
+        </p:txBody>
+      </p:sp>
+      <p:sp>
+        <p:nvSpPr>
+          <p:cNvPr id="25" name="Shape 23"/>
+          <p:cNvSpPr/>
+          <p:nvPr/>
+        </p:nvSpPr>
+        <p:spPr>
+          <a:xfrm>
+            <a:off x="6998818" y="2258568"/>
+            <a:ext cx="1581912" cy="292608"/>
+          </a:xfrm>
+          <a:prstGeom prst="rect">
+            <a:avLst>
+              <a:gd name="adj" fmla="val 25000"/>
+            </a:avLst>
+          </a:prstGeom>
+          <a:solidFill>
+            <a:srgbClr val="FCE7F3"/>
+          </a:solidFill>
+          <a:ln w="19050">
+            <a:solidFill>
+              <a:srgbClr val="DB2777"/>
+            </a:solidFill>
+            <a:prstDash val="solid"/>
+          </a:ln>
+          <a:effectLst>
+            <a:outerShdw sx="100000" sy="100000" kx="0" ky="0" algn="bl" rotWithShape="0" blurRad="101600" dist="38100" dir="8100000">
+              <a:srgbClr val="000000">
+                <a:alpha val="12000"/>
+              </a:srgbClr>
+            </a:outerShdw>
+          </a:effectLst>
+        </p:spPr>
+      </p:sp>
+      <p:sp>
+        <p:nvSpPr>
+          <p:cNvPr id="26" name="Text 24"/>
+          <p:cNvSpPr/>
+          <p:nvPr/>
+        </p:nvSpPr>
+        <p:spPr>
+          <a:xfrm>
+            <a:off x="6998818" y="2258568"/>
+            <a:ext cx="1581912" cy="292608"/>
+          </a:xfrm>
+          <a:prstGeom prst="rect">
+            <a:avLst/>
+          </a:prstGeom>
+          <a:noFill/>
+          <a:ln/>
+        </p:spPr>
+        <p:txBody>
+          <a:bodyPr wrap="square" lIns="0" tIns="0" rIns="0" bIns="0" rtlCol="0" anchor="ctr"/>
+          <a:lstStyle/>
+          <a:p>
+            <a:pPr algn="ctr" indent="0" marL="0">
+              <a:buNone/>
+            </a:pPr>
+            <a:r>
+              <a:rPr lang="en-US" sz="1300" b="1" dirty="0">
+                <a:solidFill>
+                  <a:srgbClr val="9D174D"/>
+                </a:solidFill>
+                <a:latin typeface="Trebuchet MS" pitchFamily="34" charset="0"/>
+                <a:ea typeface="Trebuchet MS" pitchFamily="34" charset="-122"/>
+                <a:cs typeface="Trebuchet MS" pitchFamily="34" charset="-120"/>
+              </a:rPr>
+              <a:t>s</a:t>
+            </a:r>
+            <a:endParaRPr lang="en-US" sz="1300" dirty="0"/>
+          </a:p>
+        </p:txBody>
+      </p:sp>
+      <p:sp>
+        <p:nvSpPr>
+          <p:cNvPr id="27" name="Text 25"/>
+          <p:cNvSpPr/>
+          <p:nvPr/>
+        </p:nvSpPr>
+        <p:spPr>
+          <a:xfrm>
+            <a:off x="6998818" y="2569464"/>
+            <a:ext cx="1581912" cy="201168"/>
+          </a:xfrm>
+          <a:prstGeom prst="rect">
+            <a:avLst/>
+          </a:prstGeom>
+          <a:noFill/>
+          <a:ln/>
+        </p:spPr>
+        <p:txBody>
+          <a:bodyPr wrap="square" lIns="0" tIns="0" rIns="0" bIns="0" rtlCol="0" anchor="t"/>
+          <a:lstStyle/>
+          <a:p>
+            <a:pPr algn="ctr" indent="0" marL="0">
+              <a:buNone/>
+            </a:pPr>
+            <a:r>
+              <a:rPr lang="en-US" sz="850" dirty="0">
+                <a:solidFill>
+                  <a:srgbClr val="475569"/>
+                </a:solidFill>
+                <a:latin typeface="Calibri" pitchFamily="34" charset="0"/>
+                <a:ea typeface="Calibri" pitchFamily="34" charset="-122"/>
+                <a:cs typeface="Calibri" pitchFamily="34" charset="-120"/>
+              </a:rPr>
+              <a:t>more than one</a:t>
+            </a:r>
+            <a:endParaRPr lang="en-US" sz="850" dirty="0"/>
+          </a:p>
+        </p:txBody>
+      </p:sp>
+      <p:sp>
+        <p:nvSpPr>
+          <p:cNvPr id="28" name="Shape 26"/>
           <p:cNvSpPr/>
           <p:nvPr/>
         </p:nvSpPr>
@@ -26275,7 +27494,7 @@
       </p:sp>
       <p:sp>
         <p:nvSpPr>
-          <p:cNvPr id="23" name="Text 21"/>
+          <p:cNvPr id="29" name="Text 27"/>
           <p:cNvSpPr/>
           <p:nvPr/>
         </p:nvSpPr>
@@ -26314,7 +27533,7 @@
       </p:sp>
       <p:sp>
         <p:nvSpPr>
-          <p:cNvPr id="24" name="Shape 22"/>
+          <p:cNvPr id="30" name="Shape 28"/>
           <p:cNvSpPr/>
           <p:nvPr/>
         </p:nvSpPr>
@@ -26341,7 +27560,7 @@
       </p:sp>
       <p:sp>
         <p:nvSpPr>
-          <p:cNvPr id="25" name="Shape 23"/>
+          <p:cNvPr id="31" name="Shape 29"/>
           <p:cNvSpPr/>
           <p:nvPr/>
         </p:nvSpPr>
@@ -26368,7 +27587,7 @@
       </p:sp>
       <p:sp>
         <p:nvSpPr>
-          <p:cNvPr id="26" name="Text 24"/>
+          <p:cNvPr id="32" name="Text 30"/>
           <p:cNvSpPr/>
           <p:nvPr/>
         </p:nvSpPr>
@@ -26407,7 +27626,7 @@
       </p:sp>
       <p:sp>
         <p:nvSpPr>
-          <p:cNvPr id="27" name="Text 25"/>
+          <p:cNvPr id="33" name="Text 31"/>
           <p:cNvSpPr/>
           <p:nvPr/>
         </p:nvSpPr>
@@ -26446,7 +27665,7 @@
       </p:sp>
       <p:sp>
         <p:nvSpPr>
-          <p:cNvPr id="28" name="Shape 26"/>
+          <p:cNvPr id="34" name="Shape 32"/>
           <p:cNvSpPr/>
           <p:nvPr/>
         </p:nvSpPr>
@@ -26473,7 +27692,7 @@
       </p:sp>
       <p:sp>
         <p:nvSpPr>
-          <p:cNvPr id="29" name="Text 27"/>
+          <p:cNvPr id="35" name="Text 33"/>
           <p:cNvSpPr/>
           <p:nvPr/>
         </p:nvSpPr>
@@ -26512,7 +27731,7 @@
       </p:sp>
       <p:sp>
         <p:nvSpPr>
-          <p:cNvPr id="30" name="Text 28"/>
+          <p:cNvPr id="36" name="Text 34"/>
           <p:cNvSpPr/>
           <p:nvPr/>
         </p:nvSpPr>
@@ -26551,7 +27770,7 @@
       </p:sp>
       <p:sp>
         <p:nvSpPr>
-          <p:cNvPr id="31" name="Shape 29"/>
+          <p:cNvPr id="37" name="Shape 35"/>
           <p:cNvSpPr/>
           <p:nvPr/>
         </p:nvSpPr>
@@ -26578,7 +27797,7 @@
       </p:sp>
       <p:sp>
         <p:nvSpPr>
-          <p:cNvPr id="32" name="Text 30"/>
+          <p:cNvPr id="38" name="Text 36"/>
           <p:cNvSpPr/>
           <p:nvPr/>
         </p:nvSpPr>
@@ -26609,7 +27828,7 @@
                 <a:ea typeface="Trebuchet MS" pitchFamily="34" charset="-122"/>
                 <a:cs typeface="Trebuchet MS" pitchFamily="34" charset="-120"/>
               </a:rPr>
-              <a:t>ting</a:t>
+              <a:t>tions</a:t>
             </a:r>
             <a:endParaRPr lang="en-US" sz="1400" dirty="0"/>
           </a:p>
@@ -26617,7 +27836,7 @@
       </p:sp>
       <p:sp>
         <p:nvSpPr>
-          <p:cNvPr id="33" name="Shape 31"/>
+          <p:cNvPr id="39" name="Shape 37"/>
           <p:cNvSpPr/>
           <p:nvPr/>
         </p:nvSpPr>
@@ -26644,7 +27863,7 @@
       </p:sp>
       <p:sp>
         <p:nvSpPr>
-          <p:cNvPr id="34" name="Text 32"/>
+          <p:cNvPr id="40" name="Text 38"/>
           <p:cNvSpPr/>
           <p:nvPr/>
         </p:nvSpPr>
@@ -26683,7 +27902,7 @@
       </p:sp>
       <p:sp>
         <p:nvSpPr>
-          <p:cNvPr id="35" name="Shape 33"/>
+          <p:cNvPr id="41" name="Shape 39"/>
           <p:cNvSpPr/>
           <p:nvPr/>
         </p:nvSpPr>
@@ -26710,7 +27929,7 @@
       </p:sp>
       <p:sp>
         <p:nvSpPr>
-          <p:cNvPr id="36" name="Text 34"/>
+          <p:cNvPr id="42" name="Text 40"/>
           <p:cNvSpPr/>
           <p:nvPr/>
         </p:nvSpPr>
@@ -27033,7 +28252,7 @@
                 <a:ea typeface="Calibri" pitchFamily="34" charset="-122"/>
                 <a:cs typeface="Calibri" pitchFamily="34" charset="-120"/>
               </a:rPr>
-              <a:t>Word Labs  •  wordlabs.app  •  Root: 'reject' = throw back, refuse to accept</a:t>
+              <a:t>Word Labs  •  wordlabs.app  •  Root: 'reject' = throw back, refuse, push away</a:t>
             </a:r>
             <a:endParaRPr lang="en-US" sz="800" dirty="0"/>
           </a:p>
@@ -27172,7 +28391,7 @@
                 <a:ea typeface="Trebuchet MS" pitchFamily="34" charset="-122"/>
                 <a:cs typeface="Trebuchet MS" pitchFamily="34" charset="-120"/>
               </a:rPr>
-              <a:t>rejecting</a:t>
+              <a:t>rejections</a:t>
             </a:r>
             <a:endParaRPr lang="en-US" sz="2800" dirty="0"/>
           </a:p>
@@ -27252,8 +28471,8 @@
         </p:nvSpPr>
         <p:spPr>
           <a:xfrm>
-            <a:off x="2938272" y="2258568"/>
-            <a:ext cx="1828800" cy="292608"/>
+            <a:off x="1989734" y="2258568"/>
+            <a:ext cx="1581912" cy="292608"/>
           </a:xfrm>
           <a:prstGeom prst="rect">
             <a:avLst>
@@ -27261,11 +28480,11 @@
             </a:avLst>
           </a:prstGeom>
           <a:solidFill>
-            <a:srgbClr val="CCFBF1"/>
+            <a:srgbClr val="DDD6FE"/>
           </a:solidFill>
           <a:ln w="19050">
             <a:solidFill>
-              <a:srgbClr val="0D9488"/>
+              <a:srgbClr val="7C3AED"/>
             </a:solidFill>
             <a:prstDash val="solid"/>
           </a:ln>
@@ -27286,8 +28505,8 @@
         </p:nvSpPr>
         <p:spPr>
           <a:xfrm>
-            <a:off x="2938272" y="2258568"/>
-            <a:ext cx="1828800" cy="292608"/>
+            <a:off x="1989734" y="2258568"/>
+            <a:ext cx="1581912" cy="292608"/>
           </a:xfrm>
           <a:prstGeom prst="rect">
             <a:avLst/>
@@ -27305,13 +28524,13 @@
             <a:r>
               <a:rPr lang="en-US" sz="1300" b="1" dirty="0">
                 <a:solidFill>
-                  <a:srgbClr val="0F766E"/>
+                  <a:srgbClr val="4C1D95"/>
                 </a:solidFill>
                 <a:latin typeface="Trebuchet MS" pitchFamily="34" charset="0"/>
                 <a:ea typeface="Trebuchet MS" pitchFamily="34" charset="-122"/>
                 <a:cs typeface="Trebuchet MS" pitchFamily="34" charset="-120"/>
               </a:rPr>
-              <a:t>reject</a:t>
+              <a:t>re</a:t>
             </a:r>
             <a:endParaRPr lang="en-US" sz="1300" dirty="0"/>
           </a:p>
@@ -27325,8 +28544,8 @@
         </p:nvSpPr>
         <p:spPr>
           <a:xfrm>
-            <a:off x="2938272" y="2569464"/>
-            <a:ext cx="1828800" cy="201168"/>
+            <a:off x="1989734" y="2569464"/>
+            <a:ext cx="1581912" cy="201168"/>
           </a:xfrm>
           <a:prstGeom prst="rect">
             <a:avLst/>
@@ -27350,7 +28569,7 @@
                 <a:ea typeface="Calibri" pitchFamily="34" charset="-122"/>
                 <a:cs typeface="Calibri" pitchFamily="34" charset="-120"/>
               </a:rPr>
-              <a:t>to throw back or refuse</a:t>
+              <a:t>back</a:t>
             </a:r>
             <a:endParaRPr lang="en-US" sz="850" dirty="0"/>
           </a:p>
@@ -27364,8 +28583,8 @@
         </p:nvSpPr>
         <p:spPr>
           <a:xfrm>
-            <a:off x="5803392" y="2258568"/>
-            <a:ext cx="1828800" cy="292608"/>
+            <a:off x="3659429" y="2258568"/>
+            <a:ext cx="1581912" cy="292608"/>
           </a:xfrm>
           <a:prstGeom prst="rect">
             <a:avLst>
@@ -27398,8 +28617,8 @@
         </p:nvSpPr>
         <p:spPr>
           <a:xfrm>
-            <a:off x="5803392" y="2258568"/>
-            <a:ext cx="1828800" cy="292608"/>
+            <a:off x="3659429" y="2258568"/>
+            <a:ext cx="1581912" cy="292608"/>
           </a:xfrm>
           <a:prstGeom prst="rect">
             <a:avLst/>
@@ -27423,7 +28642,7 @@
                 <a:ea typeface="Trebuchet MS" pitchFamily="34" charset="-122"/>
                 <a:cs typeface="Trebuchet MS" pitchFamily="34" charset="-120"/>
               </a:rPr>
-              <a:t>ing</a:t>
+              <a:t>ject</a:t>
             </a:r>
             <a:endParaRPr lang="en-US" sz="1300" dirty="0"/>
           </a:p>
@@ -27437,8 +28656,8 @@
         </p:nvSpPr>
         <p:spPr>
           <a:xfrm>
-            <a:off x="5803392" y="2569464"/>
-            <a:ext cx="1828800" cy="201168"/>
+            <a:off x="3659429" y="2569464"/>
+            <a:ext cx="1581912" cy="201168"/>
           </a:xfrm>
           <a:prstGeom prst="rect">
             <a:avLst/>
@@ -27462,7 +28681,7 @@
                 <a:ea typeface="Calibri" pitchFamily="34" charset="-122"/>
                 <a:cs typeface="Calibri" pitchFamily="34" charset="-120"/>
               </a:rPr>
-              <a:t>happening right now</a:t>
+              <a:t>throw</a:t>
             </a:r>
             <a:endParaRPr lang="en-US" sz="850" dirty="0"/>
           </a:p>
@@ -27471,6 +28690,230 @@
       <p:sp>
         <p:nvSpPr>
           <p:cNvPr id="22" name="Shape 20"/>
+          <p:cNvSpPr/>
+          <p:nvPr/>
+        </p:nvSpPr>
+        <p:spPr>
+          <a:xfrm>
+            <a:off x="5329123" y="2258568"/>
+            <a:ext cx="1581912" cy="292608"/>
+          </a:xfrm>
+          <a:prstGeom prst="rect">
+            <a:avLst>
+              <a:gd name="adj" fmla="val 25000"/>
+            </a:avLst>
+          </a:prstGeom>
+          <a:solidFill>
+            <a:srgbClr val="FCE7F3"/>
+          </a:solidFill>
+          <a:ln w="19050">
+            <a:solidFill>
+              <a:srgbClr val="DB2777"/>
+            </a:solidFill>
+            <a:prstDash val="solid"/>
+          </a:ln>
+          <a:effectLst>
+            <a:outerShdw sx="100000" sy="100000" kx="0" ky="0" algn="bl" rotWithShape="0" blurRad="101600" dist="38100" dir="8100000">
+              <a:srgbClr val="000000">
+                <a:alpha val="12000"/>
+              </a:srgbClr>
+            </a:outerShdw>
+          </a:effectLst>
+        </p:spPr>
+      </p:sp>
+      <p:sp>
+        <p:nvSpPr>
+          <p:cNvPr id="23" name="Text 21"/>
+          <p:cNvSpPr/>
+          <p:nvPr/>
+        </p:nvSpPr>
+        <p:spPr>
+          <a:xfrm>
+            <a:off x="5329123" y="2258568"/>
+            <a:ext cx="1581912" cy="292608"/>
+          </a:xfrm>
+          <a:prstGeom prst="rect">
+            <a:avLst/>
+          </a:prstGeom>
+          <a:noFill/>
+          <a:ln/>
+        </p:spPr>
+        <p:txBody>
+          <a:bodyPr wrap="square" lIns="0" tIns="0" rIns="0" bIns="0" rtlCol="0" anchor="ctr"/>
+          <a:lstStyle/>
+          <a:p>
+            <a:pPr algn="ctr" indent="0" marL="0">
+              <a:buNone/>
+            </a:pPr>
+            <a:r>
+              <a:rPr lang="en-US" sz="1300" b="1" dirty="0">
+                <a:solidFill>
+                  <a:srgbClr val="9D174D"/>
+                </a:solidFill>
+                <a:latin typeface="Trebuchet MS" pitchFamily="34" charset="0"/>
+                <a:ea typeface="Trebuchet MS" pitchFamily="34" charset="-122"/>
+                <a:cs typeface="Trebuchet MS" pitchFamily="34" charset="-120"/>
+              </a:rPr>
+              <a:t>ion</a:t>
+            </a:r>
+            <a:endParaRPr lang="en-US" sz="1300" dirty="0"/>
+          </a:p>
+        </p:txBody>
+      </p:sp>
+      <p:sp>
+        <p:nvSpPr>
+          <p:cNvPr id="24" name="Text 22"/>
+          <p:cNvSpPr/>
+          <p:nvPr/>
+        </p:nvSpPr>
+        <p:spPr>
+          <a:xfrm>
+            <a:off x="5329123" y="2569464"/>
+            <a:ext cx="1581912" cy="201168"/>
+          </a:xfrm>
+          <a:prstGeom prst="rect">
+            <a:avLst/>
+          </a:prstGeom>
+          <a:noFill/>
+          <a:ln/>
+        </p:spPr>
+        <p:txBody>
+          <a:bodyPr wrap="square" lIns="0" tIns="0" rIns="0" bIns="0" rtlCol="0" anchor="t"/>
+          <a:lstStyle/>
+          <a:p>
+            <a:pPr algn="ctr" indent="0" marL="0">
+              <a:buNone/>
+            </a:pPr>
+            <a:r>
+              <a:rPr lang="en-US" sz="850" dirty="0">
+                <a:solidFill>
+                  <a:srgbClr val="475569"/>
+                </a:solidFill>
+                <a:latin typeface="Calibri" pitchFamily="34" charset="0"/>
+                <a:ea typeface="Calibri" pitchFamily="34" charset="-122"/>
+                <a:cs typeface="Calibri" pitchFamily="34" charset="-120"/>
+              </a:rPr>
+              <a:t>act or result of</a:t>
+            </a:r>
+            <a:endParaRPr lang="en-US" sz="850" dirty="0"/>
+          </a:p>
+        </p:txBody>
+      </p:sp>
+      <p:sp>
+        <p:nvSpPr>
+          <p:cNvPr id="25" name="Shape 23"/>
+          <p:cNvSpPr/>
+          <p:nvPr/>
+        </p:nvSpPr>
+        <p:spPr>
+          <a:xfrm>
+            <a:off x="6998818" y="2258568"/>
+            <a:ext cx="1581912" cy="292608"/>
+          </a:xfrm>
+          <a:prstGeom prst="rect">
+            <a:avLst>
+              <a:gd name="adj" fmla="val 25000"/>
+            </a:avLst>
+          </a:prstGeom>
+          <a:solidFill>
+            <a:srgbClr val="FCE7F3"/>
+          </a:solidFill>
+          <a:ln w="19050">
+            <a:solidFill>
+              <a:srgbClr val="DB2777"/>
+            </a:solidFill>
+            <a:prstDash val="solid"/>
+          </a:ln>
+          <a:effectLst>
+            <a:outerShdw sx="100000" sy="100000" kx="0" ky="0" algn="bl" rotWithShape="0" blurRad="101600" dist="38100" dir="8100000">
+              <a:srgbClr val="000000">
+                <a:alpha val="12000"/>
+              </a:srgbClr>
+            </a:outerShdw>
+          </a:effectLst>
+        </p:spPr>
+      </p:sp>
+      <p:sp>
+        <p:nvSpPr>
+          <p:cNvPr id="26" name="Text 24"/>
+          <p:cNvSpPr/>
+          <p:nvPr/>
+        </p:nvSpPr>
+        <p:spPr>
+          <a:xfrm>
+            <a:off x="6998818" y="2258568"/>
+            <a:ext cx="1581912" cy="292608"/>
+          </a:xfrm>
+          <a:prstGeom prst="rect">
+            <a:avLst/>
+          </a:prstGeom>
+          <a:noFill/>
+          <a:ln/>
+        </p:spPr>
+        <p:txBody>
+          <a:bodyPr wrap="square" lIns="0" tIns="0" rIns="0" bIns="0" rtlCol="0" anchor="ctr"/>
+          <a:lstStyle/>
+          <a:p>
+            <a:pPr algn="ctr" indent="0" marL="0">
+              <a:buNone/>
+            </a:pPr>
+            <a:r>
+              <a:rPr lang="en-US" sz="1300" b="1" dirty="0">
+                <a:solidFill>
+                  <a:srgbClr val="9D174D"/>
+                </a:solidFill>
+                <a:latin typeface="Trebuchet MS" pitchFamily="34" charset="0"/>
+                <a:ea typeface="Trebuchet MS" pitchFamily="34" charset="-122"/>
+                <a:cs typeface="Trebuchet MS" pitchFamily="34" charset="-120"/>
+              </a:rPr>
+              <a:t>s</a:t>
+            </a:r>
+            <a:endParaRPr lang="en-US" sz="1300" dirty="0"/>
+          </a:p>
+        </p:txBody>
+      </p:sp>
+      <p:sp>
+        <p:nvSpPr>
+          <p:cNvPr id="27" name="Text 25"/>
+          <p:cNvSpPr/>
+          <p:nvPr/>
+        </p:nvSpPr>
+        <p:spPr>
+          <a:xfrm>
+            <a:off x="6998818" y="2569464"/>
+            <a:ext cx="1581912" cy="201168"/>
+          </a:xfrm>
+          <a:prstGeom prst="rect">
+            <a:avLst/>
+          </a:prstGeom>
+          <a:noFill/>
+          <a:ln/>
+        </p:spPr>
+        <p:txBody>
+          <a:bodyPr wrap="square" lIns="0" tIns="0" rIns="0" bIns="0" rtlCol="0" anchor="t"/>
+          <a:lstStyle/>
+          <a:p>
+            <a:pPr algn="ctr" indent="0" marL="0">
+              <a:buNone/>
+            </a:pPr>
+            <a:r>
+              <a:rPr lang="en-US" sz="850" dirty="0">
+                <a:solidFill>
+                  <a:srgbClr val="475569"/>
+                </a:solidFill>
+                <a:latin typeface="Calibri" pitchFamily="34" charset="0"/>
+                <a:ea typeface="Calibri" pitchFamily="34" charset="-122"/>
+                <a:cs typeface="Calibri" pitchFamily="34" charset="-120"/>
+              </a:rPr>
+              <a:t>more than one</a:t>
+            </a:r>
+            <a:endParaRPr lang="en-US" sz="850" dirty="0"/>
+          </a:p>
+        </p:txBody>
+      </p:sp>
+      <p:sp>
+        <p:nvSpPr>
+          <p:cNvPr id="28" name="Shape 26"/>
           <p:cNvSpPr/>
           <p:nvPr/>
         </p:nvSpPr>
@@ -27497,7 +28940,7 @@
       </p:sp>
       <p:sp>
         <p:nvSpPr>
-          <p:cNvPr id="23" name="Text 21"/>
+          <p:cNvPr id="29" name="Text 27"/>
           <p:cNvSpPr/>
           <p:nvPr/>
         </p:nvSpPr>
@@ -27536,7 +28979,7 @@
       </p:sp>
       <p:sp>
         <p:nvSpPr>
-          <p:cNvPr id="24" name="Shape 22"/>
+          <p:cNvPr id="30" name="Shape 28"/>
           <p:cNvSpPr/>
           <p:nvPr/>
         </p:nvSpPr>
@@ -27563,7 +29006,7 @@
       </p:sp>
       <p:sp>
         <p:nvSpPr>
-          <p:cNvPr id="25" name="Shape 23"/>
+          <p:cNvPr id="31" name="Shape 29"/>
           <p:cNvSpPr/>
           <p:nvPr/>
         </p:nvSpPr>
@@ -27590,7 +29033,7 @@
       </p:sp>
       <p:sp>
         <p:nvSpPr>
-          <p:cNvPr id="26" name="Text 24"/>
+          <p:cNvPr id="32" name="Text 30"/>
           <p:cNvSpPr/>
           <p:nvPr/>
         </p:nvSpPr>
@@ -27629,7 +29072,7 @@
       </p:sp>
       <p:sp>
         <p:nvSpPr>
-          <p:cNvPr id="27" name="Text 25"/>
+          <p:cNvPr id="33" name="Text 31"/>
           <p:cNvSpPr/>
           <p:nvPr/>
         </p:nvSpPr>
@@ -27668,7 +29111,7 @@
       </p:sp>
       <p:sp>
         <p:nvSpPr>
-          <p:cNvPr id="28" name="Shape 26"/>
+          <p:cNvPr id="34" name="Shape 32"/>
           <p:cNvSpPr/>
           <p:nvPr/>
         </p:nvSpPr>
@@ -27695,7 +29138,7 @@
       </p:sp>
       <p:sp>
         <p:nvSpPr>
-          <p:cNvPr id="29" name="Text 27"/>
+          <p:cNvPr id="35" name="Text 33"/>
           <p:cNvSpPr/>
           <p:nvPr/>
         </p:nvSpPr>
@@ -27734,7 +29177,7 @@
       </p:sp>
       <p:sp>
         <p:nvSpPr>
-          <p:cNvPr id="30" name="Text 28"/>
+          <p:cNvPr id="36" name="Text 34"/>
           <p:cNvSpPr/>
           <p:nvPr/>
         </p:nvSpPr>
@@ -27773,7 +29216,7 @@
       </p:sp>
       <p:sp>
         <p:nvSpPr>
-          <p:cNvPr id="31" name="Shape 29"/>
+          <p:cNvPr id="37" name="Shape 35"/>
           <p:cNvSpPr/>
           <p:nvPr/>
         </p:nvSpPr>
@@ -27800,7 +29243,7 @@
       </p:sp>
       <p:sp>
         <p:nvSpPr>
-          <p:cNvPr id="32" name="Text 30"/>
+          <p:cNvPr id="38" name="Text 36"/>
           <p:cNvSpPr/>
           <p:nvPr/>
         </p:nvSpPr>
@@ -27831,7 +29274,7 @@
                 <a:ea typeface="Trebuchet MS" pitchFamily="34" charset="-122"/>
                 <a:cs typeface="Trebuchet MS" pitchFamily="34" charset="-120"/>
               </a:rPr>
-              <a:t>ting</a:t>
+              <a:t>tions</a:t>
             </a:r>
             <a:endParaRPr lang="en-US" sz="1400" dirty="0"/>
           </a:p>
@@ -27839,7 +29282,7 @@
       </p:sp>
       <p:sp>
         <p:nvSpPr>
-          <p:cNvPr id="33" name="Shape 31"/>
+          <p:cNvPr id="39" name="Shape 37"/>
           <p:cNvSpPr/>
           <p:nvPr/>
         </p:nvSpPr>
@@ -27866,7 +29309,7 @@
       </p:sp>
       <p:sp>
         <p:nvSpPr>
-          <p:cNvPr id="34" name="Text 32"/>
+          <p:cNvPr id="40" name="Text 38"/>
           <p:cNvSpPr/>
           <p:nvPr/>
         </p:nvSpPr>
@@ -27905,7 +29348,7 @@
       </p:sp>
       <p:sp>
         <p:nvSpPr>
-          <p:cNvPr id="35" name="Shape 33"/>
+          <p:cNvPr id="41" name="Shape 39"/>
           <p:cNvSpPr/>
           <p:nvPr/>
         </p:nvSpPr>
@@ -27932,7 +29375,7 @@
       </p:sp>
       <p:sp>
         <p:nvSpPr>
-          <p:cNvPr id="36" name="Shape 34"/>
+          <p:cNvPr id="42" name="Shape 40"/>
           <p:cNvSpPr/>
           <p:nvPr/>
         </p:nvSpPr>
@@ -27959,7 +29402,7 @@
       </p:sp>
       <p:sp>
         <p:nvSpPr>
-          <p:cNvPr id="37" name="Text 35"/>
+          <p:cNvPr id="43" name="Text 41"/>
           <p:cNvSpPr/>
           <p:nvPr/>
         </p:nvSpPr>
@@ -27998,7 +29441,7 @@
       </p:sp>
       <p:sp>
         <p:nvSpPr>
-          <p:cNvPr id="38" name="Shape 36"/>
+          <p:cNvPr id="44" name="Shape 42"/>
           <p:cNvSpPr/>
           <p:nvPr/>
         </p:nvSpPr>
@@ -28025,7 +29468,7 @@
       </p:sp>
       <p:sp>
         <p:nvSpPr>
-          <p:cNvPr id="39" name="Text 37"/>
+          <p:cNvPr id="45" name="Text 43"/>
           <p:cNvSpPr/>
           <p:nvPr/>
         </p:nvSpPr>
@@ -28064,7 +29507,7 @@
       </p:sp>
       <p:sp>
         <p:nvSpPr>
-          <p:cNvPr id="40" name="Shape 38"/>
+          <p:cNvPr id="46" name="Shape 44"/>
           <p:cNvSpPr/>
           <p:nvPr/>
         </p:nvSpPr>
@@ -28091,7 +29534,7 @@
       </p:sp>
       <p:sp>
         <p:nvSpPr>
-          <p:cNvPr id="41" name="Text 39"/>
+          <p:cNvPr id="47" name="Text 45"/>
           <p:cNvSpPr/>
           <p:nvPr/>
         </p:nvSpPr>
@@ -28130,7 +29573,7 @@
       </p:sp>
       <p:sp>
         <p:nvSpPr>
-          <p:cNvPr id="42" name="Shape 40"/>
+          <p:cNvPr id="48" name="Shape 46"/>
           <p:cNvSpPr/>
           <p:nvPr/>
         </p:nvSpPr>
@@ -28157,7 +29600,7 @@
       </p:sp>
       <p:sp>
         <p:nvSpPr>
-          <p:cNvPr id="43" name="Text 41"/>
+          <p:cNvPr id="49" name="Text 47"/>
           <p:cNvSpPr/>
           <p:nvPr/>
         </p:nvSpPr>
@@ -28196,7 +29639,7 @@
       </p:sp>
       <p:sp>
         <p:nvSpPr>
-          <p:cNvPr id="44" name="Shape 42"/>
+          <p:cNvPr id="50" name="Shape 48"/>
           <p:cNvSpPr/>
           <p:nvPr/>
         </p:nvSpPr>
@@ -28223,7 +29666,7 @@
       </p:sp>
       <p:sp>
         <p:nvSpPr>
-          <p:cNvPr id="45" name="Text 43"/>
+          <p:cNvPr id="51" name="Text 49"/>
           <p:cNvSpPr/>
           <p:nvPr/>
         </p:nvSpPr>
@@ -28262,7 +29705,7 @@
       </p:sp>
       <p:sp>
         <p:nvSpPr>
-          <p:cNvPr id="46" name="Text 44"/>
+          <p:cNvPr id="52" name="Text 50"/>
           <p:cNvSpPr/>
           <p:nvPr/>
         </p:nvSpPr>
@@ -28301,7 +29744,7 @@
       </p:sp>
       <p:sp>
         <p:nvSpPr>
-          <p:cNvPr id="47" name="Shape 45"/>
+          <p:cNvPr id="53" name="Shape 51"/>
           <p:cNvSpPr/>
           <p:nvPr/>
         </p:nvSpPr>
@@ -28328,7 +29771,7 @@
       </p:sp>
       <p:sp>
         <p:nvSpPr>
-          <p:cNvPr id="48" name="Text 46"/>
+          <p:cNvPr id="54" name="Text 52"/>
           <p:cNvSpPr/>
           <p:nvPr/>
         </p:nvSpPr>
@@ -28367,7 +29810,7 @@
       </p:sp>
       <p:sp>
         <p:nvSpPr>
-          <p:cNvPr id="49" name="Shape 47"/>
+          <p:cNvPr id="55" name="Shape 53"/>
           <p:cNvSpPr/>
           <p:nvPr/>
         </p:nvSpPr>
@@ -28394,7 +29837,7 @@
       </p:sp>
       <p:sp>
         <p:nvSpPr>
-          <p:cNvPr id="50" name="Text 48"/>
+          <p:cNvPr id="56" name="Text 54"/>
           <p:cNvSpPr/>
           <p:nvPr/>
         </p:nvSpPr>
@@ -28425,7 +29868,7 @@
                 <a:ea typeface="Trebuchet MS" pitchFamily="34" charset="-122"/>
                 <a:cs typeface="Trebuchet MS" pitchFamily="34" charset="-120"/>
               </a:rPr>
-              <a:t>i</a:t>
+              <a:t>ion</a:t>
             </a:r>
             <a:endParaRPr lang="en-US" sz="900" dirty="0"/>
           </a:p>
@@ -28433,7 +29876,46 @@
       </p:sp>
       <p:sp>
         <p:nvSpPr>
-          <p:cNvPr id="51" name="Shape 49"/>
+          <p:cNvPr id="57" name="Text 55"/>
+          <p:cNvSpPr/>
+          <p:nvPr/>
+        </p:nvSpPr>
+        <p:spPr>
+          <a:xfrm>
+            <a:off x="6870192" y="4572000"/>
+            <a:ext cx="685800" cy="219456"/>
+          </a:xfrm>
+          <a:prstGeom prst="rect">
+            <a:avLst/>
+          </a:prstGeom>
+          <a:noFill/>
+          <a:ln/>
+        </p:spPr>
+        <p:txBody>
+          <a:bodyPr wrap="square" lIns="0" tIns="0" rIns="0" bIns="0" rtlCol="0" anchor="t"/>
+          <a:lstStyle/>
+          <a:p>
+            <a:pPr algn="ctr" indent="0" marL="0">
+              <a:buNone/>
+            </a:pPr>
+            <a:r>
+              <a:rPr lang="en-US" sz="750" i="1" dirty="0">
+                <a:solidFill>
+                  <a:srgbClr val="94A3B8"/>
+                </a:solidFill>
+                <a:latin typeface="Calibri" pitchFamily="34" charset="0"/>
+                <a:ea typeface="Calibri" pitchFamily="34" charset="-122"/>
+                <a:cs typeface="Calibri" pitchFamily="34" charset="-120"/>
+              </a:rPr>
+              <a:t>/shun/</a:t>
+            </a:r>
+            <a:endParaRPr lang="en-US" sz="750" dirty="0"/>
+          </a:p>
+        </p:txBody>
+      </p:sp>
+      <p:sp>
+        <p:nvSpPr>
+          <p:cNvPr id="58" name="Shape 56"/>
           <p:cNvSpPr/>
           <p:nvPr/>
         </p:nvSpPr>
@@ -28460,7 +29942,7 @@
       </p:sp>
       <p:sp>
         <p:nvSpPr>
-          <p:cNvPr id="52" name="Text 50"/>
+          <p:cNvPr id="59" name="Text 57"/>
           <p:cNvSpPr/>
           <p:nvPr/>
         </p:nvSpPr>
@@ -28491,7 +29973,7 @@
                 <a:ea typeface="Trebuchet MS" pitchFamily="34" charset="-122"/>
                 <a:cs typeface="Trebuchet MS" pitchFamily="34" charset="-120"/>
               </a:rPr>
-              <a:t>ng</a:t>
+              <a:t>s</a:t>
             </a:r>
             <a:endParaRPr lang="en-US" sz="900" dirty="0"/>
           </a:p>
@@ -28783,7 +30265,7 @@
                 <a:ea typeface="Calibri" pitchFamily="34" charset="-122"/>
                 <a:cs typeface="Calibri" pitchFamily="34" charset="-120"/>
               </a:rPr>
-              <a:t>Word Labs  •  wordlabs.app  •  Root: 'reject' = throw back, refuse to accept</a:t>
+              <a:t>Word Labs  •  wordlabs.app  •  Root: 'reject' = throw back, refuse, push away</a:t>
             </a:r>
             <a:endParaRPr lang="en-US" sz="800" dirty="0"/>
           </a:p>
@@ -28922,7 +30404,7 @@
                 <a:ea typeface="Trebuchet MS" pitchFamily="34" charset="-122"/>
                 <a:cs typeface="Trebuchet MS" pitchFamily="34" charset="-120"/>
               </a:rPr>
-              <a:t>rejects</a:t>
+              <a:t>reject</a:t>
             </a:r>
             <a:endParaRPr lang="en-US" sz="2800" dirty="0"/>
           </a:p>
@@ -29610,7 +31092,7 @@
                 <a:ea typeface="Calibri" pitchFamily="34" charset="-122"/>
                 <a:cs typeface="Calibri" pitchFamily="34" charset="-120"/>
               </a:rPr>
-              <a:t>Word Labs  •  wordlabs.app  •  Root: 'reject' = throw back, refuse to accept</a:t>
+              <a:t>Word Labs  •  wordlabs.app  •  Root: 'reject' = throw back, refuse, push away</a:t>
             </a:r>
             <a:endParaRPr lang="en-US" sz="800" dirty="0"/>
           </a:p>
@@ -29749,7 +31231,7 @@
                 <a:ea typeface="Trebuchet MS" pitchFamily="34" charset="-122"/>
                 <a:cs typeface="Trebuchet MS" pitchFamily="34" charset="-120"/>
               </a:rPr>
-              <a:t>rejects</a:t>
+              <a:t>reject</a:t>
             </a:r>
             <a:endParaRPr lang="en-US" sz="2800" dirty="0"/>
           </a:p>
@@ -29838,11 +31320,11 @@
             </a:avLst>
           </a:prstGeom>
           <a:solidFill>
-            <a:srgbClr val="CCFBF1"/>
+            <a:srgbClr val="DDD6FE"/>
           </a:solidFill>
           <a:ln w="19050">
             <a:solidFill>
-              <a:srgbClr val="0D9488"/>
+              <a:srgbClr val="7C3AED"/>
             </a:solidFill>
             <a:prstDash val="solid"/>
           </a:ln>
@@ -29882,13 +31364,13 @@
             <a:r>
               <a:rPr lang="en-US" sz="1300" b="1" dirty="0">
                 <a:solidFill>
-                  <a:srgbClr val="0F766E"/>
+                  <a:srgbClr val="4C1D95"/>
                 </a:solidFill>
                 <a:latin typeface="Trebuchet MS" pitchFamily="34" charset="0"/>
                 <a:ea typeface="Trebuchet MS" pitchFamily="34" charset="-122"/>
                 <a:cs typeface="Trebuchet MS" pitchFamily="34" charset="-120"/>
               </a:rPr>
-              <a:t>reject</a:t>
+              <a:t>re</a:t>
             </a:r>
             <a:endParaRPr lang="en-US" sz="1300" dirty="0"/>
           </a:p>
@@ -29927,7 +31409,7 @@
                 <a:ea typeface="Calibri" pitchFamily="34" charset="-122"/>
                 <a:cs typeface="Calibri" pitchFamily="34" charset="-120"/>
               </a:rPr>
-              <a:t>to throw back or refuse</a:t>
+              <a:t>back</a:t>
             </a:r>
             <a:endParaRPr lang="en-US" sz="850" dirty="0"/>
           </a:p>
@@ -30000,7 +31482,7 @@
                 <a:ea typeface="Trebuchet MS" pitchFamily="34" charset="-122"/>
                 <a:cs typeface="Trebuchet MS" pitchFamily="34" charset="-120"/>
               </a:rPr>
-              <a:t>s</a:t>
+              <a:t>ject</a:t>
             </a:r>
             <a:endParaRPr lang="en-US" sz="1300" dirty="0"/>
           </a:p>
@@ -30039,7 +31521,7 @@
                 <a:ea typeface="Calibri" pitchFamily="34" charset="-122"/>
                 <a:cs typeface="Calibri" pitchFamily="34" charset="-120"/>
               </a:rPr>
-              <a:t>more than one, or present tense</a:t>
+              <a:t>throw</a:t>
             </a:r>
             <a:endParaRPr lang="en-US" sz="850" dirty="0"/>
           </a:p>
@@ -30595,7 +32077,7 @@
                 <a:ea typeface="Calibri" pitchFamily="34" charset="-122"/>
                 <a:cs typeface="Calibri" pitchFamily="34" charset="-120"/>
               </a:rPr>
-              <a:t>Word Labs  •  wordlabs.app  •  Root: 'reject' = throw back, refuse to accept</a:t>
+              <a:t>Word Labs  •  wordlabs.app  •  Root: 'reject' = throw back, refuse, push away</a:t>
             </a:r>
             <a:endParaRPr lang="en-US" sz="800" dirty="0"/>
           </a:p>
@@ -30734,7 +32216,7 @@
                 <a:ea typeface="Trebuchet MS" pitchFamily="34" charset="-122"/>
                 <a:cs typeface="Trebuchet MS" pitchFamily="34" charset="-120"/>
               </a:rPr>
-              <a:t>rejects</a:t>
+              <a:t>reject</a:t>
             </a:r>
             <a:endParaRPr lang="en-US" sz="2800" dirty="0"/>
           </a:p>
@@ -30823,11 +32305,11 @@
             </a:avLst>
           </a:prstGeom>
           <a:solidFill>
-            <a:srgbClr val="CCFBF1"/>
+            <a:srgbClr val="DDD6FE"/>
           </a:solidFill>
           <a:ln w="19050">
             <a:solidFill>
-              <a:srgbClr val="0D9488"/>
+              <a:srgbClr val="7C3AED"/>
             </a:solidFill>
             <a:prstDash val="solid"/>
           </a:ln>
@@ -30867,13 +32349,13 @@
             <a:r>
               <a:rPr lang="en-US" sz="1300" b="1" dirty="0">
                 <a:solidFill>
-                  <a:srgbClr val="0F766E"/>
+                  <a:srgbClr val="4C1D95"/>
                 </a:solidFill>
                 <a:latin typeface="Trebuchet MS" pitchFamily="34" charset="0"/>
                 <a:ea typeface="Trebuchet MS" pitchFamily="34" charset="-122"/>
                 <a:cs typeface="Trebuchet MS" pitchFamily="34" charset="-120"/>
               </a:rPr>
-              <a:t>reject</a:t>
+              <a:t>re</a:t>
             </a:r>
             <a:endParaRPr lang="en-US" sz="1300" dirty="0"/>
           </a:p>
@@ -30912,7 +32394,7 @@
                 <a:ea typeface="Calibri" pitchFamily="34" charset="-122"/>
                 <a:cs typeface="Calibri" pitchFamily="34" charset="-120"/>
               </a:rPr>
-              <a:t>to throw back or refuse</a:t>
+              <a:t>back</a:t>
             </a:r>
             <a:endParaRPr lang="en-US" sz="850" dirty="0"/>
           </a:p>
@@ -30985,7 +32467,7 @@
                 <a:ea typeface="Trebuchet MS" pitchFamily="34" charset="-122"/>
                 <a:cs typeface="Trebuchet MS" pitchFamily="34" charset="-120"/>
               </a:rPr>
-              <a:t>s</a:t>
+              <a:t>ject</a:t>
             </a:r>
             <a:endParaRPr lang="en-US" sz="1300" dirty="0"/>
           </a:p>
@@ -31024,7 +32506,7 @@
                 <a:ea typeface="Calibri" pitchFamily="34" charset="-122"/>
                 <a:cs typeface="Calibri" pitchFamily="34" charset="-120"/>
               </a:rPr>
-              <a:t>more than one, or present tense</a:t>
+              <a:t>throw</a:t>
             </a:r>
             <a:endParaRPr lang="en-US" sz="850" dirty="0"/>
           </a:p>
@@ -31288,7 +32770,7 @@
                 <a:ea typeface="Trebuchet MS" pitchFamily="34" charset="-122"/>
                 <a:cs typeface="Trebuchet MS" pitchFamily="34" charset="-120"/>
               </a:rPr>
-              <a:t>jects</a:t>
+              <a:t>ject</a:t>
             </a:r>
             <a:endParaRPr lang="en-US" sz="1400" dirty="0"/>
           </a:p>
@@ -31712,7 +33194,7 @@
                 <a:ea typeface="Calibri" pitchFamily="34" charset="-122"/>
                 <a:cs typeface="Calibri" pitchFamily="34" charset="-120"/>
               </a:rPr>
-              <a:t>Word Labs  •  wordlabs.app  •  Root: 'reject' = throw back, refuse to accept</a:t>
+              <a:t>Word Labs  •  wordlabs.app  •  Root: 'reject' = throw back, refuse, push away</a:t>
             </a:r>
             <a:endParaRPr lang="en-US" sz="800" dirty="0"/>
           </a:p>
@@ -31851,7 +33333,7 @@
                 <a:ea typeface="Trebuchet MS" pitchFamily="34" charset="-122"/>
                 <a:cs typeface="Trebuchet MS" pitchFamily="34" charset="-120"/>
               </a:rPr>
-              <a:t>rejects</a:t>
+              <a:t>reject</a:t>
             </a:r>
             <a:endParaRPr lang="en-US" sz="2800" dirty="0"/>
           </a:p>
@@ -31940,11 +33422,11 @@
             </a:avLst>
           </a:prstGeom>
           <a:solidFill>
-            <a:srgbClr val="CCFBF1"/>
+            <a:srgbClr val="DDD6FE"/>
           </a:solidFill>
           <a:ln w="19050">
             <a:solidFill>
-              <a:srgbClr val="0D9488"/>
+              <a:srgbClr val="7C3AED"/>
             </a:solidFill>
             <a:prstDash val="solid"/>
           </a:ln>
@@ -31984,13 +33466,13 @@
             <a:r>
               <a:rPr lang="en-US" sz="1300" b="1" dirty="0">
                 <a:solidFill>
-                  <a:srgbClr val="0F766E"/>
+                  <a:srgbClr val="4C1D95"/>
                 </a:solidFill>
                 <a:latin typeface="Trebuchet MS" pitchFamily="34" charset="0"/>
                 <a:ea typeface="Trebuchet MS" pitchFamily="34" charset="-122"/>
                 <a:cs typeface="Trebuchet MS" pitchFamily="34" charset="-120"/>
               </a:rPr>
-              <a:t>reject</a:t>
+              <a:t>re</a:t>
             </a:r>
             <a:endParaRPr lang="en-US" sz="1300" dirty="0"/>
           </a:p>
@@ -32029,7 +33511,7 @@
                 <a:ea typeface="Calibri" pitchFamily="34" charset="-122"/>
                 <a:cs typeface="Calibri" pitchFamily="34" charset="-120"/>
               </a:rPr>
-              <a:t>to throw back or refuse</a:t>
+              <a:t>back</a:t>
             </a:r>
             <a:endParaRPr lang="en-US" sz="850" dirty="0"/>
           </a:p>
@@ -32102,7 +33584,7 @@
                 <a:ea typeface="Trebuchet MS" pitchFamily="34" charset="-122"/>
                 <a:cs typeface="Trebuchet MS" pitchFamily="34" charset="-120"/>
               </a:rPr>
-              <a:t>s</a:t>
+              <a:t>ject</a:t>
             </a:r>
             <a:endParaRPr lang="en-US" sz="1300" dirty="0"/>
           </a:p>
@@ -32141,7 +33623,7 @@
                 <a:ea typeface="Calibri" pitchFamily="34" charset="-122"/>
                 <a:cs typeface="Calibri" pitchFamily="34" charset="-120"/>
               </a:rPr>
-              <a:t>more than one, or present tense</a:t>
+              <a:t>throw</a:t>
             </a:r>
             <a:endParaRPr lang="en-US" sz="850" dirty="0"/>
           </a:p>
@@ -32405,7 +33887,7 @@
                 <a:ea typeface="Trebuchet MS" pitchFamily="34" charset="-122"/>
                 <a:cs typeface="Trebuchet MS" pitchFamily="34" charset="-120"/>
               </a:rPr>
-              <a:t>jects</a:t>
+              <a:t>ject</a:t>
             </a:r>
             <a:endParaRPr lang="en-US" sz="1400" dirty="0"/>
           </a:p>
@@ -32512,7 +33994,7 @@
         </p:nvSpPr>
         <p:spPr>
           <a:xfrm>
-            <a:off x="2124837" y="4169664"/>
+            <a:off x="2254649" y="4169664"/>
             <a:ext cx="685800" cy="384048"/>
           </a:xfrm>
           <a:prstGeom prst="rect">
@@ -32539,7 +34021,7 @@
         </p:nvSpPr>
         <p:spPr>
           <a:xfrm>
-            <a:off x="2124837" y="4169664"/>
+            <a:off x="2254649" y="4169664"/>
             <a:ext cx="685800" cy="384048"/>
           </a:xfrm>
           <a:prstGeom prst="rect">
@@ -32578,7 +34060,7 @@
         </p:nvSpPr>
         <p:spPr>
           <a:xfrm>
-            <a:off x="3033522" y="4169664"/>
+            <a:off x="3293146" y="4169664"/>
             <a:ext cx="685800" cy="384048"/>
           </a:xfrm>
           <a:prstGeom prst="rect">
@@ -32605,7 +34087,7 @@
         </p:nvSpPr>
         <p:spPr>
           <a:xfrm>
-            <a:off x="3033522" y="4169664"/>
+            <a:off x="3293146" y="4169664"/>
             <a:ext cx="685800" cy="384048"/>
           </a:xfrm>
           <a:prstGeom prst="rect">
@@ -32644,7 +34126,7 @@
         </p:nvSpPr>
         <p:spPr>
           <a:xfrm>
-            <a:off x="3942207" y="4169664"/>
+            <a:off x="4331643" y="4169664"/>
             <a:ext cx="685800" cy="384048"/>
           </a:xfrm>
           <a:prstGeom prst="rect">
@@ -32671,7 +34153,7 @@
         </p:nvSpPr>
         <p:spPr>
           <a:xfrm>
-            <a:off x="3942207" y="4169664"/>
+            <a:off x="4331643" y="4169664"/>
             <a:ext cx="685800" cy="384048"/>
           </a:xfrm>
           <a:prstGeom prst="rect">
@@ -32710,7 +34192,7 @@
         </p:nvSpPr>
         <p:spPr>
           <a:xfrm>
-            <a:off x="4850892" y="4169664"/>
+            <a:off x="5370141" y="4169664"/>
             <a:ext cx="685800" cy="384048"/>
           </a:xfrm>
           <a:prstGeom prst="rect">
@@ -32737,7 +34219,7 @@
         </p:nvSpPr>
         <p:spPr>
           <a:xfrm>
-            <a:off x="4850892" y="4169664"/>
+            <a:off x="5370141" y="4169664"/>
             <a:ext cx="685800" cy="384048"/>
           </a:xfrm>
           <a:prstGeom prst="rect">
@@ -32776,7 +34258,7 @@
         </p:nvSpPr>
         <p:spPr>
           <a:xfrm>
-            <a:off x="5759577" y="4169664"/>
+            <a:off x="6408638" y="4169664"/>
             <a:ext cx="685800" cy="384048"/>
           </a:xfrm>
           <a:prstGeom prst="rect">
@@ -32803,7 +34285,7 @@
         </p:nvSpPr>
         <p:spPr>
           <a:xfrm>
-            <a:off x="5759577" y="4169664"/>
+            <a:off x="6408638" y="4169664"/>
             <a:ext cx="685800" cy="384048"/>
           </a:xfrm>
           <a:prstGeom prst="rect">
@@ -32842,7 +34324,7 @@
         </p:nvSpPr>
         <p:spPr>
           <a:xfrm>
-            <a:off x="5759577" y="4572000"/>
+            <a:off x="6408638" y="4572000"/>
             <a:ext cx="685800" cy="219456"/>
           </a:xfrm>
           <a:prstGeom prst="rect">
@@ -32881,7 +34363,7 @@
         </p:nvSpPr>
         <p:spPr>
           <a:xfrm>
-            <a:off x="6668262" y="4169664"/>
+            <a:off x="7447135" y="4169664"/>
             <a:ext cx="685800" cy="384048"/>
           </a:xfrm>
           <a:prstGeom prst="rect">
@@ -32908,7 +34390,7 @@
         </p:nvSpPr>
         <p:spPr>
           <a:xfrm>
-            <a:off x="6668262" y="4169664"/>
+            <a:off x="7447135" y="4169664"/>
             <a:ext cx="685800" cy="384048"/>
           </a:xfrm>
           <a:prstGeom prst="rect">
@@ -32934,72 +34416,6 @@
                 <a:cs typeface="Trebuchet MS" pitchFamily="34" charset="-120"/>
               </a:rPr>
               <a:t>t</a:t>
-            </a:r>
-            <a:endParaRPr lang="en-US" sz="900" dirty="0"/>
-          </a:p>
-        </p:txBody>
-      </p:sp>
-      <p:sp>
-        <p:nvSpPr>
-          <p:cNvPr id="46" name="Shape 44"/>
-          <p:cNvSpPr/>
-          <p:nvPr/>
-        </p:nvSpPr>
-        <p:spPr>
-          <a:xfrm>
-            <a:off x="7576947" y="4169664"/>
-            <a:ext cx="685800" cy="384048"/>
-          </a:xfrm>
-          <a:prstGeom prst="rect">
-            <a:avLst>
-              <a:gd name="adj" fmla="val 9524"/>
-            </a:avLst>
-          </a:prstGeom>
-          <a:solidFill>
-            <a:srgbClr val="FFFFFF"/>
-          </a:solidFill>
-          <a:ln w="12700">
-            <a:solidFill>
-              <a:srgbClr val="DB2777"/>
-            </a:solidFill>
-            <a:prstDash val="solid"/>
-          </a:ln>
-        </p:spPr>
-      </p:sp>
-      <p:sp>
-        <p:nvSpPr>
-          <p:cNvPr id="47" name="Text 45"/>
-          <p:cNvSpPr/>
-          <p:nvPr/>
-        </p:nvSpPr>
-        <p:spPr>
-          <a:xfrm>
-            <a:off x="7576947" y="4169664"/>
-            <a:ext cx="685800" cy="384048"/>
-          </a:xfrm>
-          <a:prstGeom prst="rect">
-            <a:avLst/>
-          </a:prstGeom>
-          <a:noFill/>
-          <a:ln/>
-        </p:spPr>
-        <p:txBody>
-          <a:bodyPr wrap="square" lIns="0" tIns="0" rIns="0" bIns="0" rtlCol="0" anchor="ctr"/>
-          <a:lstStyle/>
-          <a:p>
-            <a:pPr algn="ctr" indent="0" marL="0">
-              <a:buNone/>
-            </a:pPr>
-            <a:r>
-              <a:rPr lang="en-US" sz="900" b="1" dirty="0">
-                <a:solidFill>
-                  <a:srgbClr val="9D174D"/>
-                </a:solidFill>
-                <a:latin typeface="Trebuchet MS" pitchFamily="34" charset="0"/>
-                <a:ea typeface="Trebuchet MS" pitchFamily="34" charset="-122"/>
-                <a:cs typeface="Trebuchet MS" pitchFamily="34" charset="-120"/>
-              </a:rPr>
-              <a:t>s</a:t>
             </a:r>
             <a:endParaRPr lang="en-US" sz="900" dirty="0"/>
           </a:p>
@@ -33291,7 +34707,7 @@
                 <a:ea typeface="Calibri" pitchFamily="34" charset="-122"/>
                 <a:cs typeface="Calibri" pitchFamily="34" charset="-120"/>
               </a:rPr>
-              <a:t>Word Labs  •  wordlabs.app  •  Root: 'reject' = throw back, refuse to accept</a:t>
+              <a:t>Word Labs  •  wordlabs.app  •  Root: 'reject' = throw back, refuse, push away</a:t>
             </a:r>
             <a:endParaRPr lang="en-US" sz="800" dirty="0"/>
           </a:p>
@@ -34460,7 +35876,7 @@
                 <a:ea typeface="Calibri" pitchFamily="34" charset="-122"/>
                 <a:cs typeface="Calibri" pitchFamily="34" charset="-120"/>
               </a:rPr>
-              <a:t>Word Labs  •  wordlabs.app  •  Root: 'reject' = throw back, refuse to accept</a:t>
+              <a:t>Word Labs  •  wordlabs.app  •  Root: 'reject' = throw back, refuse, push away</a:t>
             </a:r>
             <a:endParaRPr lang="en-US" sz="800" dirty="0"/>
           </a:p>
@@ -35106,7 +36522,7 @@
                 <a:ea typeface="Trebuchet MS" pitchFamily="34" charset="-122"/>
                 <a:cs typeface="Trebuchet MS" pitchFamily="34" charset="-120"/>
               </a:rPr>
-              <a:t>non-</a:t>
+              <a:t>pre-</a:t>
             </a:r>
             <a:endParaRPr lang="en-US" sz="1300" dirty="0"/>
           </a:p>
@@ -35259,7 +36675,7 @@
                 <a:ea typeface="Trebuchet MS" pitchFamily="34" charset="-122"/>
                 <a:cs typeface="Trebuchet MS" pitchFamily="34" charset="-120"/>
               </a:rPr>
-              <a:t>pre-</a:t>
+              <a:t>self-</a:t>
             </a:r>
             <a:endParaRPr lang="en-US" sz="1300" dirty="0"/>
           </a:p>
@@ -35348,7 +36764,7 @@
                 <a:ea typeface="Trebuchet MS" pitchFamily="34" charset="-122"/>
                 <a:cs typeface="Trebuchet MS" pitchFamily="34" charset="-120"/>
               </a:rPr>
-              <a:t>-s</a:t>
+              <a:t>-able</a:t>
             </a:r>
             <a:endParaRPr lang="en-US" sz="1300" dirty="0"/>
           </a:p>
@@ -35412,7 +36828,7 @@
                 <a:ea typeface="Trebuchet MS" pitchFamily="34" charset="-122"/>
                 <a:cs typeface="Trebuchet MS" pitchFamily="34" charset="-120"/>
               </a:rPr>
-              <a:t>self-</a:t>
+              <a:t>non-</a:t>
             </a:r>
             <a:endParaRPr lang="en-US" sz="1300" dirty="0"/>
           </a:p>
@@ -35501,7 +36917,7 @@
                 <a:ea typeface="Trebuchet MS" pitchFamily="34" charset="-122"/>
                 <a:cs typeface="Trebuchet MS" pitchFamily="34" charset="-120"/>
               </a:rPr>
-              <a:t>-able</a:t>
+              <a:t>-tion</a:t>
             </a:r>
             <a:endParaRPr lang="en-US" sz="1300" dirty="0"/>
           </a:p>
@@ -35672,7 +37088,7 @@
                 <a:ea typeface="Trebuchet MS" pitchFamily="34" charset="-122"/>
                 <a:cs typeface="Trebuchet MS" pitchFamily="34" charset="-120"/>
               </a:rPr>
-              <a:t>rejection</a:t>
+              <a:t>rejected</a:t>
             </a:r>
             <a:endParaRPr lang="en-US" sz="1200" dirty="0"/>
           </a:p>
@@ -35738,7 +37154,7 @@
                 <a:ea typeface="Trebuchet MS" pitchFamily="34" charset="-122"/>
                 <a:cs typeface="Trebuchet MS" pitchFamily="34" charset="-120"/>
               </a:rPr>
-              <a:t>rejected</a:t>
+              <a:t>rejection</a:t>
             </a:r>
             <a:endParaRPr lang="en-US" sz="1200" dirty="0"/>
           </a:p>
@@ -36002,7 +37418,7 @@
                 <a:ea typeface="Trebuchet MS" pitchFamily="34" charset="-122"/>
                 <a:cs typeface="Trebuchet MS" pitchFamily="34" charset="-120"/>
               </a:rPr>
-              <a:t>self-rejection</a:t>
+              <a:t>non-rejection</a:t>
             </a:r>
             <a:endParaRPr lang="en-US" sz="1200" dirty="0"/>
           </a:p>
@@ -36068,7 +37484,7 @@
                 <a:ea typeface="Trebuchet MS" pitchFamily="34" charset="-122"/>
                 <a:cs typeface="Trebuchet MS" pitchFamily="34" charset="-120"/>
               </a:rPr>
-              <a:t>non-rejection</a:t>
+              <a:t>self-rejection</a:t>
             </a:r>
             <a:endParaRPr lang="en-US" sz="1200" dirty="0"/>
           </a:p>
@@ -36360,7 +37776,7 @@
                 <a:ea typeface="Calibri" pitchFamily="34" charset="-122"/>
                 <a:cs typeface="Calibri" pitchFamily="34" charset="-120"/>
               </a:rPr>
-              <a:t>Word Labs  •  wordlabs.app  •  Root: 'reject' = throw back, refuse to accept</a:t>
+              <a:t>Word Labs  •  wordlabs.app  •  Root: 'reject' = throw back, refuse, push away</a:t>
             </a:r>
             <a:endParaRPr lang="en-US" sz="800" dirty="0"/>
           </a:p>
@@ -36524,7 +37940,7 @@
                 <a:ea typeface="Calibri" pitchFamily="34" charset="-122"/>
                 <a:cs typeface="Calibri" pitchFamily="34" charset="-120"/>
               </a:rPr>
-              <a:t>The core part of a word carrying its basic meaning. For example, 'reject' means 'throw back, refuse to accept'.</a:t>
+              <a:t>The core part of a word carrying its basic meaning. For example, 'reject' means 'throw back, refuse, push away'.</a:t>
             </a:r>
             <a:endParaRPr lang="en-US" sz="1350" dirty="0"/>
           </a:p>
@@ -37144,7 +38560,7 @@
                 <a:ea typeface="Calibri" pitchFamily="34" charset="-122"/>
                 <a:cs typeface="Calibri" pitchFamily="34" charset="-120"/>
               </a:rPr>
-              <a:t>Word Labs  •  wordlabs.app  •  Root: 'reject' = throw back, refuse to accept</a:t>
+              <a:t>Word Labs  •  wordlabs.app  •  Root: 'reject' = throw back, refuse, push away</a:t>
             </a:r>
             <a:endParaRPr lang="en-US" sz="800" dirty="0"/>
           </a:p>
@@ -37256,7 +38672,7 @@
                 <a:ea typeface="Calibri" pitchFamily="34" charset="-122"/>
                 <a:cs typeface="Calibri" pitchFamily="34" charset="-120"/>
               </a:rPr>
-              <a:t>1.  The word 'reject' comes from Latin origins.</a:t>
+              <a:t>1.  'Rejection' contains the root 'reject' plus a suffix.</a:t>
             </a:r>
             <a:endParaRPr lang="en-US" sz="1300" dirty="0"/>
           </a:p>
@@ -37395,7 +38811,7 @@
                 <a:ea typeface="Calibri" pitchFamily="34" charset="-122"/>
                 <a:cs typeface="Calibri" pitchFamily="34" charset="-120"/>
               </a:rPr>
-              <a:t>2.  The word 'rejection' means to warmly welcome someone.</a:t>
+              <a:t>2.  The word 'reject' comes from a Latin word meaning to throw back.</a:t>
             </a:r>
             <a:endParaRPr lang="en-US" sz="1300" dirty="0"/>
           </a:p>
@@ -37418,11 +38834,11 @@
             </a:avLst>
           </a:prstGeom>
           <a:solidFill>
-            <a:srgbClr val="FEE2E2"/>
-          </a:solidFill>
-          <a:ln w="12700">
-            <a:solidFill>
-              <a:srgbClr val="DC2626"/>
+            <a:srgbClr val="DCFCE7"/>
+          </a:solidFill>
+          <a:ln w="12700">
+            <a:solidFill>
+              <a:srgbClr val="16A34A"/>
             </a:solidFill>
             <a:prstDash val="solid"/>
           </a:ln>
@@ -37455,13 +38871,13 @@
             <a:r>
               <a:rPr lang="en-US" sz="1100" b="1" dirty="0">
                 <a:solidFill>
-                  <a:srgbClr val="DC2626"/>
+                  <a:srgbClr val="16A34A"/>
                 </a:solidFill>
                 <a:latin typeface="Trebuchet MS" pitchFamily="34" charset="0"/>
                 <a:ea typeface="Trebuchet MS" pitchFamily="34" charset="-122"/>
                 <a:cs typeface="Trebuchet MS" pitchFamily="34" charset="-120"/>
               </a:rPr>
-              <a:t>FALSE</a:t>
+              <a:t>TRUE</a:t>
             </a:r>
             <a:endParaRPr lang="en-US" sz="1100" dirty="0"/>
           </a:p>
@@ -37534,7 +38950,7 @@
                 <a:ea typeface="Calibri" pitchFamily="34" charset="-122"/>
                 <a:cs typeface="Calibri" pitchFamily="34" charset="-120"/>
               </a:rPr>
-              <a:t>3.  The suffix '-ion' turns the verb 'reject' into a noun.</a:t>
+              <a:t>3.  Adding the suffix '-ion' to 'reject' makes it a verb.</a:t>
             </a:r>
             <a:endParaRPr lang="en-US" sz="1300" dirty="0"/>
           </a:p>
@@ -37557,11 +38973,11 @@
             </a:avLst>
           </a:prstGeom>
           <a:solidFill>
-            <a:srgbClr val="DCFCE7"/>
-          </a:solidFill>
-          <a:ln w="12700">
-            <a:solidFill>
-              <a:srgbClr val="16A34A"/>
+            <a:srgbClr val="FEE2E2"/>
+          </a:solidFill>
+          <a:ln w="12700">
+            <a:solidFill>
+              <a:srgbClr val="DC2626"/>
             </a:solidFill>
             <a:prstDash val="solid"/>
           </a:ln>
@@ -37594,13 +39010,13 @@
             <a:r>
               <a:rPr lang="en-US" sz="1100" b="1" dirty="0">
                 <a:solidFill>
-                  <a:srgbClr val="16A34A"/>
+                  <a:srgbClr val="DC2626"/>
                 </a:solidFill>
                 <a:latin typeface="Trebuchet MS" pitchFamily="34" charset="0"/>
                 <a:ea typeface="Trebuchet MS" pitchFamily="34" charset="-122"/>
                 <a:cs typeface="Trebuchet MS" pitchFamily="34" charset="-120"/>
               </a:rPr>
-              <a:t>TRUE</a:t>
+              <a:t>FALSE</a:t>
             </a:r>
             <a:endParaRPr lang="en-US" sz="1100" dirty="0"/>
           </a:p>
@@ -37673,7 +39089,7 @@
                 <a:ea typeface="Calibri" pitchFamily="34" charset="-122"/>
                 <a:cs typeface="Calibri" pitchFamily="34" charset="-120"/>
               </a:rPr>
-              <a:t>4.  The word 'rejected' tells us the action happened in the past.</a:t>
+              <a:t>4.  The word 'reject' can never be used as a noun.</a:t>
             </a:r>
             <a:endParaRPr lang="en-US" sz="1300" dirty="0"/>
           </a:p>
@@ -37696,11 +39112,11 @@
             </a:avLst>
           </a:prstGeom>
           <a:solidFill>
-            <a:srgbClr val="DCFCE7"/>
-          </a:solidFill>
-          <a:ln w="12700">
-            <a:solidFill>
-              <a:srgbClr val="16A34A"/>
+            <a:srgbClr val="FEE2E2"/>
+          </a:solidFill>
+          <a:ln w="12700">
+            <a:solidFill>
+              <a:srgbClr val="DC2626"/>
             </a:solidFill>
             <a:prstDash val="solid"/>
           </a:ln>
@@ -37733,13 +39149,13 @@
             <a:r>
               <a:rPr lang="en-US" sz="1100" b="1" dirty="0">
                 <a:solidFill>
-                  <a:srgbClr val="16A34A"/>
+                  <a:srgbClr val="DC2626"/>
                 </a:solidFill>
                 <a:latin typeface="Trebuchet MS" pitchFamily="34" charset="0"/>
                 <a:ea typeface="Trebuchet MS" pitchFamily="34" charset="-122"/>
                 <a:cs typeface="Trebuchet MS" pitchFamily="34" charset="-120"/>
               </a:rPr>
-              <a:t>TRUE</a:t>
+              <a:t>FALSE</a:t>
             </a:r>
             <a:endParaRPr lang="en-US" sz="1100" dirty="0"/>
           </a:p>
@@ -37812,7 +39228,7 @@
                 <a:ea typeface="Calibri" pitchFamily="34" charset="-122"/>
                 <a:cs typeface="Calibri" pitchFamily="34" charset="-120"/>
               </a:rPr>
-              <a:t>5.  The prefix 're-' in 'reject' means 'again and again'.</a:t>
+              <a:t>5.  The prefix 're-' in 'reject' means back or again.</a:t>
             </a:r>
             <a:endParaRPr lang="en-US" sz="1300" dirty="0"/>
           </a:p>
@@ -37835,11 +39251,11 @@
             </a:avLst>
           </a:prstGeom>
           <a:solidFill>
-            <a:srgbClr val="FEE2E2"/>
-          </a:solidFill>
-          <a:ln w="12700">
-            <a:solidFill>
-              <a:srgbClr val="DC2626"/>
+            <a:srgbClr val="DCFCE7"/>
+          </a:solidFill>
+          <a:ln w="12700">
+            <a:solidFill>
+              <a:srgbClr val="16A34A"/>
             </a:solidFill>
             <a:prstDash val="solid"/>
           </a:ln>
@@ -37872,13 +39288,13 @@
             <a:r>
               <a:rPr lang="en-US" sz="1100" b="1" dirty="0">
                 <a:solidFill>
-                  <a:srgbClr val="DC2626"/>
+                  <a:srgbClr val="16A34A"/>
                 </a:solidFill>
                 <a:latin typeface="Trebuchet MS" pitchFamily="34" charset="0"/>
                 <a:ea typeface="Trebuchet MS" pitchFamily="34" charset="-122"/>
                 <a:cs typeface="Trebuchet MS" pitchFamily="34" charset="-120"/>
               </a:rPr>
-              <a:t>FALSE</a:t>
+              <a:t>TRUE</a:t>
             </a:r>
             <a:endParaRPr lang="en-US" sz="1100" dirty="0"/>
           </a:p>
@@ -38170,7 +39586,7 @@
                 <a:ea typeface="Calibri" pitchFamily="34" charset="-122"/>
                 <a:cs typeface="Calibri" pitchFamily="34" charset="-120"/>
               </a:rPr>
-              <a:t>Word Labs  •  wordlabs.app  •  Root: 'reject' = throw back, refuse to accept</a:t>
+              <a:t>Word Labs  •  wordlabs.app  •  Root: 'reject' = throw back, refuse, push away</a:t>
             </a:r>
             <a:endParaRPr lang="en-US" sz="800" dirty="0"/>
           </a:p>
@@ -38307,7 +39723,7 @@
                 <a:ea typeface="Trebuchet MS" pitchFamily="34" charset="-122"/>
                 <a:cs typeface="Trebuchet MS" pitchFamily="34" charset="-120"/>
               </a:rPr>
-              <a:t>throw back, refuse to accept</a:t>
+              <a:t>throw back, refuse, push away</a:t>
             </a:r>
             <a:endParaRPr lang="en-US" sz="2000" dirty="0"/>
           </a:p>
@@ -38517,7 +39933,7 @@
                 <a:ea typeface="Trebuchet MS" pitchFamily="34" charset="-122"/>
                 <a:cs typeface="Trebuchet MS" pitchFamily="34" charset="-120"/>
               </a:rPr>
-              <a:t>rejection</a:t>
+              <a:t>rejected</a:t>
             </a:r>
             <a:endParaRPr lang="en-US" sz="1300" dirty="0"/>
           </a:p>
@@ -38583,7 +39999,7 @@
                 <a:ea typeface="Trebuchet MS" pitchFamily="34" charset="-122"/>
                 <a:cs typeface="Trebuchet MS" pitchFamily="34" charset="-120"/>
               </a:rPr>
-              <a:t>rejected</a:t>
+              <a:t>rejection</a:t>
             </a:r>
             <a:endParaRPr lang="en-US" sz="1300" dirty="0"/>
           </a:p>
@@ -38847,7 +40263,7 @@
                 <a:ea typeface="Trebuchet MS" pitchFamily="34" charset="-122"/>
                 <a:cs typeface="Trebuchet MS" pitchFamily="34" charset="-120"/>
               </a:rPr>
-              <a:t>self-rejection</a:t>
+              <a:t>non-rejection</a:t>
             </a:r>
             <a:endParaRPr lang="en-US" sz="1300" dirty="0"/>
           </a:p>
@@ -39139,7 +40555,7 @@
                 <a:ea typeface="Calibri" pitchFamily="34" charset="-122"/>
                 <a:cs typeface="Calibri" pitchFamily="34" charset="-120"/>
               </a:rPr>
-              <a:t>Word Labs  •  wordlabs.app  •  Root: 'reject' = throw back, refuse to accept</a:t>
+              <a:t>Word Labs  •  wordlabs.app  •  Root: 'reject' = throw back, refuse, push away</a:t>
             </a:r>
             <a:endParaRPr lang="en-US" sz="800" dirty="0"/>
           </a:p>
@@ -39785,7 +41201,7 @@
                 <a:ea typeface="Trebuchet MS" pitchFamily="34" charset="-122"/>
                 <a:cs typeface="Trebuchet MS" pitchFamily="34" charset="-120"/>
               </a:rPr>
-              <a:t>non-</a:t>
+              <a:t>pre-</a:t>
             </a:r>
             <a:endParaRPr lang="en-US" sz="1300" dirty="0"/>
           </a:p>
@@ -39938,7 +41354,7 @@
                 <a:ea typeface="Trebuchet MS" pitchFamily="34" charset="-122"/>
                 <a:cs typeface="Trebuchet MS" pitchFamily="34" charset="-120"/>
               </a:rPr>
-              <a:t>pre-</a:t>
+              <a:t>self-</a:t>
             </a:r>
             <a:endParaRPr lang="en-US" sz="1300" dirty="0"/>
           </a:p>
@@ -40027,7 +41443,7 @@
                 <a:ea typeface="Trebuchet MS" pitchFamily="34" charset="-122"/>
                 <a:cs typeface="Trebuchet MS" pitchFamily="34" charset="-120"/>
               </a:rPr>
-              <a:t>-s</a:t>
+              <a:t>-able</a:t>
             </a:r>
             <a:endParaRPr lang="en-US" sz="1300" dirty="0"/>
           </a:p>
@@ -40091,7 +41507,7 @@
                 <a:ea typeface="Trebuchet MS" pitchFamily="34" charset="-122"/>
                 <a:cs typeface="Trebuchet MS" pitchFamily="34" charset="-120"/>
               </a:rPr>
-              <a:t>self-</a:t>
+              <a:t>non-</a:t>
             </a:r>
             <a:endParaRPr lang="en-US" sz="1300" dirty="0"/>
           </a:p>
@@ -40180,7 +41596,7 @@
                 <a:ea typeface="Trebuchet MS" pitchFamily="34" charset="-122"/>
                 <a:cs typeface="Trebuchet MS" pitchFamily="34" charset="-120"/>
               </a:rPr>
-              <a:t>-able</a:t>
+              <a:t>-tion</a:t>
             </a:r>
             <a:endParaRPr lang="en-US" sz="1300" dirty="0"/>
           </a:p>
@@ -40913,7 +42329,7 @@
                 <a:ea typeface="Calibri" pitchFamily="34" charset="-122"/>
                 <a:cs typeface="Calibri" pitchFamily="34" charset="-120"/>
               </a:rPr>
-              <a:t>Word Labs  •  wordlabs.app  •  Root: 'reject' = throw back, refuse to accept</a:t>
+              <a:t>Word Labs  •  wordlabs.app  •  Root: 'reject' = throw back, refuse, push away</a:t>
             </a:r>
             <a:endParaRPr lang="en-US" sz="800" dirty="0"/>
           </a:p>
@@ -41091,7 +42507,7 @@
                 <a:ea typeface="Calibri" pitchFamily="34" charset="-122"/>
                 <a:cs typeface="Calibri" pitchFamily="34" charset="-120"/>
               </a:rPr>
-              <a:t>More than one thing that has been turned away, or the act of turning things away.</a:t>
+              <a:t>Items or people that have been turned away because they were not good enough.</a:t>
             </a:r>
             <a:endParaRPr lang="en-US" sz="1200" dirty="0"/>
           </a:p>
@@ -41164,7 +42580,7 @@
                 <a:ea typeface="Trebuchet MS" pitchFamily="34" charset="-122"/>
                 <a:cs typeface="Trebuchet MS" pitchFamily="34" charset="-120"/>
               </a:rPr>
-              <a:t>rejection</a:t>
+              <a:t>rejected</a:t>
             </a:r>
             <a:endParaRPr lang="en-US" sz="1200" dirty="0"/>
           </a:p>
@@ -41230,7 +42646,7 @@
                 <a:ea typeface="Calibri" pitchFamily="34" charset="-122"/>
                 <a:cs typeface="Calibri" pitchFamily="34" charset="-120"/>
               </a:rPr>
-              <a:t>Currently in the process of saying no to or turning something away.</a:t>
+              <a:t>Currently saying no to something or refusing to accept it right now.</a:t>
             </a:r>
             <a:endParaRPr lang="en-US" sz="1200" dirty="0"/>
           </a:p>
@@ -41303,7 +42719,7 @@
                 <a:ea typeface="Trebuchet MS" pitchFamily="34" charset="-122"/>
                 <a:cs typeface="Trebuchet MS" pitchFamily="34" charset="-120"/>
               </a:rPr>
-              <a:t>rejected</a:t>
+              <a:t>rejection</a:t>
             </a:r>
             <a:endParaRPr lang="en-US" sz="1200" dirty="0"/>
           </a:p>
@@ -41369,7 +42785,7 @@
                 <a:ea typeface="Calibri" pitchFamily="34" charset="-122"/>
                 <a:cs typeface="Calibri" pitchFamily="34" charset="-120"/>
               </a:rPr>
-              <a:t>When something or someone has already been turned away or not accepted.</a:t>
+              <a:t>The feeling or act of being left out or not accepted by others.</a:t>
             </a:r>
             <a:endParaRPr lang="en-US" sz="1200" dirty="0"/>
           </a:p>
@@ -41508,7 +42924,7 @@
                 <a:ea typeface="Calibri" pitchFamily="34" charset="-122"/>
                 <a:cs typeface="Calibri" pitchFamily="34" charset="-120"/>
               </a:rPr>
-              <a:t>When a person does not accept or believe in themselves.</a:t>
+              <a:t>When something is not turned away and is instead accepted.</a:t>
             </a:r>
             <a:endParaRPr lang="en-US" sz="1200" dirty="0"/>
           </a:p>
@@ -41647,7 +43063,7 @@
                 <a:ea typeface="Calibri" pitchFamily="34" charset="-122"/>
                 <a:cs typeface="Calibri" pitchFamily="34" charset="-120"/>
               </a:rPr>
-              <a:t>To say no to something or someone and not accept them.</a:t>
+              <a:t>To say no to something or push it away, like when you don't pick someone for a team.</a:t>
             </a:r>
             <a:endParaRPr lang="en-US" sz="1200" dirty="0"/>
           </a:p>
@@ -41786,7 +43202,7 @@
                 <a:ea typeface="Calibri" pitchFamily="34" charset="-122"/>
                 <a:cs typeface="Calibri" pitchFamily="34" charset="-120"/>
               </a:rPr>
-              <a:t>Something that can be turned away or refused.</a:t>
+              <a:t>Something that can be refused or turned down.</a:t>
             </a:r>
             <a:endParaRPr lang="en-US" sz="1200" dirty="0"/>
           </a:p>
@@ -41859,7 +43275,7 @@
                 <a:ea typeface="Trebuchet MS" pitchFamily="34" charset="-122"/>
                 <a:cs typeface="Trebuchet MS" pitchFamily="34" charset="-120"/>
               </a:rPr>
-              <a:t>self-rejection</a:t>
+              <a:t>non-rejection</a:t>
             </a:r>
             <a:endParaRPr lang="en-US" sz="1200" dirty="0"/>
           </a:p>
@@ -41925,7 +43341,7 @@
                 <a:ea typeface="Calibri" pitchFamily="34" charset="-122"/>
                 <a:cs typeface="Calibri" pitchFamily="34" charset="-120"/>
               </a:rPr>
-              <a:t>The feeling or act of being told no or turned away.</a:t>
+              <a:t>When something or someone has already been turned away or not chosen.</a:t>
             </a:r>
             <a:endParaRPr lang="en-US" sz="1200" dirty="0"/>
           </a:p>
@@ -42217,7 +43633,7 @@
                 <a:ea typeface="Calibri" pitchFamily="34" charset="-122"/>
                 <a:cs typeface="Calibri" pitchFamily="34" charset="-120"/>
               </a:rPr>
-              <a:t>Word Labs  •  wordlabs.app  •  Root: 'reject' = throw back, refuse to accept</a:t>
+              <a:t>Word Labs  •  wordlabs.app  •  Root: 'reject' = throw back, refuse, push away</a:t>
             </a:r>
             <a:endParaRPr lang="en-US" sz="800" dirty="0"/>
           </a:p>
@@ -42420,7 +43836,7 @@
                 <a:ea typeface="Calibri" pitchFamily="34" charset="-122"/>
                 <a:cs typeface="Calibri" pitchFamily="34" charset="-120"/>
               </a:rPr>
-              <a:t>The judges had to reject three entries in the science competition because they did not follow the rules.</a:t>
+              <a:t>The judges had to reject three entries in the art competition because they did not follow the rules.</a:t>
             </a:r>
             <a:endParaRPr lang="en-US" sz="1500" dirty="0"/>
           </a:p>
@@ -42584,7 +44000,7 @@
                 <a:ea typeface="Calibri" pitchFamily="34" charset="-122"/>
                 <a:cs typeface="Calibri" pitchFamily="34" charset="-120"/>
               </a:rPr>
-              <a:t>Feeling rejection can be really hard, but it often helps us learn and try again.</a:t>
+              <a:t>She felt sad after her story idea was rejected by the school magazine.</a:t>
             </a:r>
             <a:endParaRPr lang="en-US" sz="1500" dirty="0"/>
           </a:p>
@@ -42748,7 +44164,7 @@
                 <a:ea typeface="Calibri" pitchFamily="34" charset="-122"/>
                 <a:cs typeface="Calibri" pitchFamily="34" charset="-120"/>
               </a:rPr>
-              <a:t>The recycling machine rejected the plastic bottle because it was the wrong type.</a:t>
+              <a:t>Rejection can be hard to deal with, but it helps us grow and try again.</a:t>
             </a:r>
             <a:endParaRPr lang="en-US" sz="1500" dirty="0"/>
           </a:p>
